--- a/platform-disposition-rubric.pptx
+++ b/platform-disposition-rubric.pptx
@@ -10,9 +10,11 @@
     <p:sldId id="258" r:id="rId4"/>
     <p:sldId id="259" r:id="rId5"/>
     <p:sldId id="260" r:id="rId6"/>
+    <p:sldId id="261" r:id="rId7"/>
+    <p:sldId id="262" r:id="rId8"/>
   </p:sldIdLst>
   <p:notesMasterIdLst>
-    <p:notesMasterId r:id="rId7"/>
+    <p:notesMasterId r:id="rId9"/>
   </p:notesMasterIdLst>
   <p:sldSz cx="12192000" cy="6858000"/>
   <p:notesSz cx="6858000" cy="12192000"/>
@@ -907,6 +909,195 @@
             <a:fld id="{F7021451-1387-4CA6-816F-3879F97B5CBC}" type="slidenum">
               <a:rPr lang="en-US"/>
               <a:t>5</a:t>
+            </a:fld>
+            <a:endParaRPr lang="en-US"/>
+          </a:p>
+        </p:txBody>
+      </p:sp>
+    </p:spTree>
+    <p:extLst>
+      <p:ext uri="{BB962C8B-B14F-4D97-AF65-F5344CB8AC3E}">
+        <p14:creationId xmlns:p14="http://schemas.microsoft.com/office/powerpoint/2010/main" val="1024086991"/>
+      </p:ext>
+    </p:extLst>
+  </p:cSld>
+  <p:clrMapOvr>
+    <a:masterClrMapping/>
+  </p:clrMapOvr>
+</p:notes>
+</file>
+
+<file path=ppt/notesSlides/notesSlide6.xml><?xml version="1.0" encoding="utf-8"?>
+<p:notes xmlns:a="http://schemas.openxmlformats.org/drawingml/2006/main" xmlns:r="http://schemas.openxmlformats.org/officeDocument/2006/relationships" xmlns:p="http://schemas.openxmlformats.org/presentationml/2006/main">
+  <p:cSld>
+    <p:spTree>
+      <p:nvGrpSpPr>
+        <p:cNvPr id="1" name=""/>
+        <p:cNvGrpSpPr/>
+        <p:nvPr/>
+      </p:nvGrpSpPr>
+      <p:grpSpPr>
+        <a:xfrm>
+          <a:off x="0" y="0"/>
+          <a:ext cx="0" cy="0"/>
+          <a:chOff x="0" y="0"/>
+          <a:chExt cx="0" cy="0"/>
+        </a:xfrm>
+      </p:grpSpPr>
+      <p:sp>
+        <p:nvSpPr>
+          <p:cNvPr id="2" name="Slide Image Placeholder 1"/>
+          <p:cNvSpPr>
+            <a:spLocks noGrp="1" noRot="1" noChangeAspect="1"/>
+          </p:cNvSpPr>
+          <p:nvPr>
+            <p:ph type="sldImg"/>
+          </p:nvPr>
+        </p:nvSpPr>
+        <p:spPr/>
+      </p:sp>
+      <p:sp>
+        <p:nvSpPr>
+          <p:cNvPr id="3" name="Notes Placeholder 2"/>
+          <p:cNvSpPr>
+            <a:spLocks noGrp="1"/>
+          </p:cNvSpPr>
+          <p:nvPr>
+            <p:ph type="body" idx="1"/>
+          </p:nvPr>
+        </p:nvSpPr>
+        <p:spPr/>
+        <p:txBody>
+          <a:bodyPr/>
+          <a:lstStyle/>
+          <a:p>
+            <a:r>
+              <a:rPr lang="en-US" dirty="0"/>
+              <a:t>Same accelerator content as the coverage slide, redrawn as the agent flow the client already recognises.
+Deliberately scoped to Assess, Design, Build and Validate. Secure and Cut over are shown greyed on the lifecycle strip rather than omitted, because dropping them silently would misrepresent the coverage audit — each had zero of six activities automated.
+Two accelerators are new to this programme and marked with a star: the Platform Fit Scorer, which applies the disposition rubric, and the AI/BI Dashboard Generator, which serves Databricks. The Schema Mapper is also new and closes the Design step.
+Point to make at box 2: the Schema Mapper is where the schedule risk is sized. Tables and views convert close to mechanically; materialized views, PL/SQL procedures and packages have no like-for-like construct on either target, so each is a design decision.
+Watch-out for the room: this slide shows agents doing work, but every conversion still lands in a human review gate. Nothing here approves its own output.</a:t>
+            </a:r>
+            <a:endParaRPr lang="en-US" dirty="0"/>
+          </a:p>
+        </p:txBody>
+      </p:sp>
+      <p:sp>
+        <p:nvSpPr>
+          <p:cNvPr id="4" name="Slide Number Placeholder 3"/>
+          <p:cNvSpPr>
+            <a:spLocks noGrp="1"/>
+          </p:cNvSpPr>
+          <p:nvPr>
+            <p:ph type="sldNum" sz="quarter" idx="10"/>
+          </p:nvPr>
+        </p:nvSpPr>
+        <p:spPr/>
+        <p:txBody>
+          <a:bodyPr/>
+          <a:lstStyle/>
+          <a:p>
+            <a:fld id="{F7021451-1387-4CA6-816F-3879F97B5CBC}" type="slidenum">
+              <a:rPr lang="en-US"/>
+              <a:t>6</a:t>
+            </a:fld>
+            <a:endParaRPr lang="en-US"/>
+          </a:p>
+        </p:txBody>
+      </p:sp>
+    </p:spTree>
+    <p:extLst>
+      <p:ext uri="{BB962C8B-B14F-4D97-AF65-F5344CB8AC3E}">
+        <p14:creationId xmlns:p14="http://schemas.microsoft.com/office/powerpoint/2010/main" val="1024086991"/>
+      </p:ext>
+    </p:extLst>
+  </p:cSld>
+  <p:clrMapOvr>
+    <a:masterClrMapping/>
+  </p:clrMapOvr>
+</p:notes>
+</file>
+
+<file path=ppt/notesSlides/notesSlide7.xml><?xml version="1.0" encoding="utf-8"?>
+<p:notes xmlns:a="http://schemas.openxmlformats.org/drawingml/2006/main" xmlns:r="http://schemas.openxmlformats.org/officeDocument/2006/relationships" xmlns:p="http://schemas.openxmlformats.org/presentationml/2006/main">
+  <p:cSld>
+    <p:spTree>
+      <p:nvGrpSpPr>
+        <p:cNvPr id="1" name=""/>
+        <p:cNvGrpSpPr/>
+        <p:nvPr/>
+      </p:nvGrpSpPr>
+      <p:grpSpPr>
+        <a:xfrm>
+          <a:off x="0" y="0"/>
+          <a:ext cx="0" cy="0"/>
+          <a:chOff x="0" y="0"/>
+          <a:chExt cx="0" cy="0"/>
+        </a:xfrm>
+      </p:grpSpPr>
+      <p:sp>
+        <p:nvSpPr>
+          <p:cNvPr id="2" name="Slide Image Placeholder 1"/>
+          <p:cNvSpPr>
+            <a:spLocks noGrp="1" noRot="1" noChangeAspect="1"/>
+          </p:cNvSpPr>
+          <p:nvPr>
+            <p:ph type="sldImg"/>
+          </p:nvPr>
+        </p:nvSpPr>
+        <p:spPr/>
+      </p:sp>
+      <p:sp>
+        <p:nvSpPr>
+          <p:cNvPr id="3" name="Notes Placeholder 2"/>
+          <p:cNvSpPr>
+            <a:spLocks noGrp="1"/>
+          </p:cNvSpPr>
+          <p:nvPr>
+            <p:ph type="body" idx="1"/>
+          </p:nvPr>
+        </p:nvSpPr>
+        <p:spPr/>
+        <p:txBody>
+          <a:bodyPr/>
+          <a:lstStyle/>
+          <a:p>
+            <a:r>
+              <a:rPr lang="en-US" dirty="0"/>
+              <a:t>Rebuilt from the Teradata-to-Snowflake original. Two things changed beyond the platform names.
+First, the near-real-time streaming band is gone — there is no Kafka path here — and its place is taken by report validation across the four dispositions, which is the part the original had no coverage for.
+Second, the generic check list (DDL, count, KPI, GL balance) has been replaced with the hazards that actually bite on an Oracle 19c source:
+ - Collation. Oracle compares case-sensitively; SQL Server does not by default. Joins and filters silently return different rows and no count check catches it.
+ - Timezone. Oracle DATE has no zone; Databricks TIMESTAMP normalises to UTC. Day-grain aggregates shift.
+ - NULL ordering. Oracle sorts NULLS LAST by default; both targets differ, which changes every TOP-N and ranked result.
+ - NUMBER(p,s) precision. Rounding drift shows up in sums, not in row counts.
+GL balancing was a finance control from the source engagement. The healthcare equivalent is domain control totals — encounter counts, charge amounts, member months balanced across a subject area.
+Sequencing rule worth stating out loud: a report is not released until its data track has cleared the suite. Validate the data before the report, or the team spends the programme chasing report variances that are really data variances.
+The slide-2 matrix from the source deck (unit test, SIT, UAT, parallel run by component) is not rebuilt here — offer it if the client wants the phase view as well.</a:t>
+            </a:r>
+            <a:endParaRPr lang="en-US" dirty="0"/>
+          </a:p>
+        </p:txBody>
+      </p:sp>
+      <p:sp>
+        <p:nvSpPr>
+          <p:cNvPr id="4" name="Slide Number Placeholder 3"/>
+          <p:cNvSpPr>
+            <a:spLocks noGrp="1"/>
+          </p:cNvSpPr>
+          <p:nvPr>
+            <p:ph type="sldNum" sz="quarter" idx="10"/>
+          </p:nvPr>
+        </p:nvSpPr>
+        <p:spPr/>
+        <p:txBody>
+          <a:bodyPr/>
+          <a:lstStyle/>
+          <a:p>
+            <a:fld id="{F7021451-1387-4CA6-816F-3879F97B5CBC}" type="slidenum">
+              <a:rPr lang="en-US"/>
+              <a:t>7</a:t>
             </a:fld>
             <a:endParaRPr lang="en-US"/>
           </a:p>
@@ -24426,6 +24617,7605 @@
 </p:sld>
 </file>
 
+<file path=ppt/slides/slide6.xml><?xml version="1.0" encoding="utf-8"?>
+<p:sld xmlns:a="http://schemas.openxmlformats.org/drawingml/2006/main" xmlns:r="http://schemas.openxmlformats.org/officeDocument/2006/relationships" xmlns:p="http://schemas.openxmlformats.org/presentationml/2006/main">
+  <p:cSld name="Slide 6">
+    <p:spTree>
+      <p:nvGrpSpPr>
+        <p:cNvPr id="1" name=""/>
+        <p:cNvGrpSpPr/>
+        <p:nvPr/>
+      </p:nvGrpSpPr>
+      <p:grpSpPr>
+        <a:xfrm>
+          <a:off x="0" y="0"/>
+          <a:ext cx="0" cy="0"/>
+          <a:chOff x="0" y="0"/>
+          <a:chExt cx="0" cy="0"/>
+        </a:xfrm>
+      </p:grpSpPr>
+      <p:sp>
+        <p:nvSpPr>
+          <p:cNvPr id="2" name="Shape 0"/>
+          <p:cNvSpPr/>
+          <p:nvPr/>
+        </p:nvSpPr>
+        <p:spPr>
+          <a:xfrm>
+            <a:off x="9217152" y="164592"/>
+            <a:ext cx="2587752" cy="6327648"/>
+          </a:xfrm>
+          <a:prstGeom prst="roundRect">
+            <a:avLst>
+              <a:gd name="adj" fmla="val 2120"/>
+            </a:avLst>
+          </a:prstGeom>
+          <a:solidFill>
+            <a:srgbClr val="081F5C"/>
+          </a:solidFill>
+          <a:ln w="12700">
+            <a:solidFill>
+              <a:srgbClr val="081F5C"/>
+            </a:solidFill>
+            <a:prstDash val="solid"/>
+          </a:ln>
+        </p:spPr>
+      </p:sp>
+      <p:sp>
+        <p:nvSpPr>
+          <p:cNvPr id="3" name="Text 1"/>
+          <p:cNvSpPr/>
+          <p:nvPr/>
+        </p:nvSpPr>
+        <p:spPr>
+          <a:xfrm>
+            <a:off x="384048" y="164592"/>
+            <a:ext cx="8686800" cy="329184"/>
+          </a:xfrm>
+          <a:prstGeom prst="rect">
+            <a:avLst/>
+          </a:prstGeom>
+          <a:noFill/>
+          <a:ln/>
+        </p:spPr>
+        <p:txBody>
+          <a:bodyPr wrap="square" lIns="0" tIns="0" rIns="0" bIns="0" rtlCol="0" anchor="ctr"/>
+          <a:lstStyle/>
+          <a:p>
+            <a:pPr indent="0" marL="0">
+              <a:buNone/>
+            </a:pPr>
+            <a:r>
+              <a:rPr lang="en-US" sz="2100" dirty="0">
+                <a:solidFill>
+                  <a:srgbClr val="1A1A1A"/>
+                </a:solidFill>
+                <a:latin typeface="Arial" pitchFamily="34" charset="0"/>
+                <a:ea typeface="Arial" pitchFamily="34" charset="-122"/>
+                <a:cs typeface="Arial" pitchFamily="34" charset="-120"/>
+              </a:rPr>
+              <a:t>Accelerating the Migration  —  Agents by Phase</a:t>
+            </a:r>
+            <a:endParaRPr lang="en-US" sz="2100" dirty="0"/>
+          </a:p>
+        </p:txBody>
+      </p:sp>
+      <p:sp>
+        <p:nvSpPr>
+          <p:cNvPr id="4" name="Text 2"/>
+          <p:cNvSpPr/>
+          <p:nvPr/>
+        </p:nvSpPr>
+        <p:spPr>
+          <a:xfrm>
+            <a:off x="384048" y="512064"/>
+            <a:ext cx="8686800" cy="274320"/>
+          </a:xfrm>
+          <a:prstGeom prst="rect">
+            <a:avLst/>
+          </a:prstGeom>
+          <a:noFill/>
+          <a:ln/>
+        </p:spPr>
+        <p:txBody>
+          <a:bodyPr wrap="square" lIns="0" tIns="0" rIns="0" bIns="0" rtlCol="0" anchor="ctr"/>
+          <a:lstStyle/>
+          <a:p>
+            <a:pPr indent="0" marL="0">
+              <a:lnSpc>
+                <a:spcPct val="95000"/>
+              </a:lnSpc>
+              <a:buNone/>
+            </a:pPr>
+            <a:r>
+              <a:rPr lang="en-US" sz="900" dirty="0">
+                <a:solidFill>
+                  <a:srgbClr val="1A1A1A"/>
+                </a:solidFill>
+                <a:latin typeface="Arial" pitchFamily="34" charset="0"/>
+                <a:ea typeface="Arial" pitchFamily="34" charset="-122"/>
+                <a:cs typeface="Arial" pitchFamily="34" charset="-120"/>
+              </a:rPr>
+              <a:t>Twelve Data Assist accelerators cover Assess, Design, Build and Validate on every disposition path. Secure and Cut over are out of scope in this view and stay manual. ★ marks a new accelerator.</a:t>
+            </a:r>
+            <a:endParaRPr lang="en-US" sz="900" dirty="0"/>
+          </a:p>
+        </p:txBody>
+      </p:sp>
+      <p:sp>
+        <p:nvSpPr>
+          <p:cNvPr id="5" name="Text 3"/>
+          <p:cNvSpPr/>
+          <p:nvPr/>
+        </p:nvSpPr>
+        <p:spPr>
+          <a:xfrm>
+            <a:off x="384048" y="914400"/>
+            <a:ext cx="1399032" cy="237744"/>
+          </a:xfrm>
+          <a:prstGeom prst="rect">
+            <a:avLst/>
+          </a:prstGeom>
+          <a:noFill/>
+          <a:ln/>
+        </p:spPr>
+        <p:txBody>
+          <a:bodyPr wrap="square" lIns="0" tIns="0" rIns="0" bIns="0" rtlCol="0" anchor="ctr"/>
+          <a:lstStyle/>
+          <a:p>
+            <a:pPr algn="ctr" indent="0" marL="0">
+              <a:buNone/>
+            </a:pPr>
+            <a:r>
+              <a:rPr lang="en-US" sz="1200" b="1" dirty="0">
+                <a:solidFill>
+                  <a:srgbClr val="081F5C"/>
+                </a:solidFill>
+                <a:latin typeface="Arial" pitchFamily="34" charset="0"/>
+                <a:ea typeface="Arial" pitchFamily="34" charset="-122"/>
+                <a:cs typeface="Arial" pitchFamily="34" charset="-120"/>
+              </a:rPr>
+              <a:t>Report Rationalization</a:t>
+            </a:r>
+            <a:endParaRPr lang="en-US" sz="1200" dirty="0"/>
+          </a:p>
+        </p:txBody>
+      </p:sp>
+      <p:sp>
+        <p:nvSpPr>
+          <p:cNvPr id="6" name="Shape 4"/>
+          <p:cNvSpPr/>
+          <p:nvPr/>
+        </p:nvSpPr>
+        <p:spPr>
+          <a:xfrm>
+            <a:off x="384048" y="1188720"/>
+            <a:ext cx="1399032" cy="32004"/>
+          </a:xfrm>
+          <a:prstGeom prst="rect">
+            <a:avLst/>
+          </a:prstGeom>
+          <a:solidFill>
+            <a:srgbClr val="081F5C"/>
+          </a:solidFill>
+          <a:ln w="6350">
+            <a:solidFill>
+              <a:srgbClr val="081F5C"/>
+            </a:solidFill>
+            <a:prstDash val="solid"/>
+          </a:ln>
+        </p:spPr>
+      </p:sp>
+      <p:sp>
+        <p:nvSpPr>
+          <p:cNvPr id="7" name="Text 5"/>
+          <p:cNvSpPr/>
+          <p:nvPr/>
+        </p:nvSpPr>
+        <p:spPr>
+          <a:xfrm>
+            <a:off x="1856232" y="914400"/>
+            <a:ext cx="7214616" cy="237744"/>
+          </a:xfrm>
+          <a:prstGeom prst="rect">
+            <a:avLst/>
+          </a:prstGeom>
+          <a:noFill/>
+          <a:ln/>
+        </p:spPr>
+        <p:txBody>
+          <a:bodyPr wrap="square" lIns="0" tIns="0" rIns="0" bIns="0" rtlCol="0" anchor="ctr"/>
+          <a:lstStyle/>
+          <a:p>
+            <a:pPr algn="ctr" indent="0" marL="0">
+              <a:buNone/>
+            </a:pPr>
+            <a:r>
+              <a:rPr lang="en-US" sz="1200" b="1" dirty="0">
+                <a:solidFill>
+                  <a:srgbClr val="081F5C"/>
+                </a:solidFill>
+                <a:latin typeface="Arial" pitchFamily="34" charset="0"/>
+                <a:ea typeface="Arial" pitchFamily="34" charset="-122"/>
+                <a:cs typeface="Arial" pitchFamily="34" charset="-120"/>
+              </a:rPr>
+              <a:t>Migration Phase</a:t>
+            </a:r>
+            <a:endParaRPr lang="en-US" sz="1200" dirty="0"/>
+          </a:p>
+        </p:txBody>
+      </p:sp>
+      <p:sp>
+        <p:nvSpPr>
+          <p:cNvPr id="8" name="Shape 6"/>
+          <p:cNvSpPr/>
+          <p:nvPr/>
+        </p:nvSpPr>
+        <p:spPr>
+          <a:xfrm>
+            <a:off x="1856232" y="1188720"/>
+            <a:ext cx="7214616" cy="32004"/>
+          </a:xfrm>
+          <a:prstGeom prst="rect">
+            <a:avLst/>
+          </a:prstGeom>
+          <a:solidFill>
+            <a:srgbClr val="081F5C"/>
+          </a:solidFill>
+          <a:ln w="6350">
+            <a:solidFill>
+              <a:srgbClr val="081F5C"/>
+            </a:solidFill>
+            <a:prstDash val="solid"/>
+          </a:ln>
+        </p:spPr>
+      </p:sp>
+      <p:sp>
+        <p:nvSpPr>
+          <p:cNvPr id="9" name="Shape 7"/>
+          <p:cNvSpPr/>
+          <p:nvPr/>
+        </p:nvSpPr>
+        <p:spPr>
+          <a:xfrm>
+            <a:off x="457200" y="1335024"/>
+            <a:ext cx="1296619" cy="310896"/>
+          </a:xfrm>
+          <a:prstGeom prst="roundRect">
+            <a:avLst>
+              <a:gd name="adj" fmla="val 73529"/>
+            </a:avLst>
+          </a:prstGeom>
+          <a:solidFill>
+            <a:srgbClr val="ADDAFB"/>
+          </a:solidFill>
+          <a:ln w="12700">
+            <a:solidFill>
+              <a:srgbClr val="3E6DA8"/>
+            </a:solidFill>
+            <a:prstDash val="solid"/>
+          </a:ln>
+        </p:spPr>
+      </p:sp>
+      <p:sp>
+        <p:nvSpPr>
+          <p:cNvPr id="10" name="Text 8"/>
+          <p:cNvSpPr/>
+          <p:nvPr/>
+        </p:nvSpPr>
+        <p:spPr>
+          <a:xfrm>
+            <a:off x="457200" y="1335024"/>
+            <a:ext cx="1296619" cy="310896"/>
+          </a:xfrm>
+          <a:prstGeom prst="rect">
+            <a:avLst/>
+          </a:prstGeom>
+          <a:noFill/>
+          <a:ln/>
+        </p:spPr>
+        <p:txBody>
+          <a:bodyPr wrap="square" lIns="0" tIns="0" rIns="0" bIns="0" rtlCol="0" anchor="ctr"/>
+          <a:lstStyle/>
+          <a:p>
+            <a:pPr algn="ctr" indent="0" marL="0">
+              <a:buNone/>
+            </a:pPr>
+            <a:r>
+              <a:rPr lang="en-US" sz="800" b="1" dirty="0">
+                <a:solidFill>
+                  <a:srgbClr val="081F5C"/>
+                </a:solidFill>
+                <a:latin typeface="Arial" pitchFamily="34" charset="0"/>
+                <a:ea typeface="Arial" pitchFamily="34" charset="-122"/>
+                <a:cs typeface="Arial" pitchFamily="34" charset="-120"/>
+              </a:rPr>
+              <a:t>Rationalization Agents</a:t>
+            </a:r>
+            <a:endParaRPr lang="en-US" sz="800" dirty="0"/>
+          </a:p>
+        </p:txBody>
+      </p:sp>
+      <p:sp>
+        <p:nvSpPr>
+          <p:cNvPr id="11" name="Shape 9"/>
+          <p:cNvSpPr/>
+          <p:nvPr/>
+        </p:nvSpPr>
+        <p:spPr>
+          <a:xfrm>
+            <a:off x="1105510" y="1645920"/>
+            <a:ext cx="0" cy="402336"/>
+          </a:xfrm>
+          <a:prstGeom prst="line">
+            <a:avLst/>
+          </a:prstGeom>
+          <a:noFill/>
+          <a:ln w="12700">
+            <a:solidFill>
+              <a:srgbClr val="3E6DA8"/>
+            </a:solidFill>
+            <a:prstDash val="dash"/>
+          </a:ln>
+        </p:spPr>
+      </p:sp>
+      <p:sp>
+        <p:nvSpPr>
+          <p:cNvPr id="12" name="Shape 10"/>
+          <p:cNvSpPr/>
+          <p:nvPr/>
+        </p:nvSpPr>
+        <p:spPr>
+          <a:xfrm>
+            <a:off x="1105510" y="2048256"/>
+            <a:ext cx="0" cy="0"/>
+          </a:xfrm>
+          <a:prstGeom prst="line">
+            <a:avLst/>
+          </a:prstGeom>
+          <a:noFill/>
+          <a:ln w="12700">
+            <a:solidFill>
+              <a:srgbClr val="3E6DA8"/>
+            </a:solidFill>
+            <a:prstDash val="dash"/>
+          </a:ln>
+        </p:spPr>
+      </p:sp>
+      <p:sp>
+        <p:nvSpPr>
+          <p:cNvPr id="13" name="Shape 11"/>
+          <p:cNvSpPr/>
+          <p:nvPr/>
+        </p:nvSpPr>
+        <p:spPr>
+          <a:xfrm>
+            <a:off x="1105510" y="2048256"/>
+            <a:ext cx="0" cy="347472"/>
+          </a:xfrm>
+          <a:prstGeom prst="line">
+            <a:avLst/>
+          </a:prstGeom>
+          <a:noFill/>
+          <a:ln w="12700">
+            <a:solidFill>
+              <a:srgbClr val="3E6DA8"/>
+            </a:solidFill>
+            <a:prstDash val="dash"/>
+          </a:ln>
+        </p:spPr>
+      </p:sp>
+      <p:sp>
+        <p:nvSpPr>
+          <p:cNvPr id="14" name="Shape 12"/>
+          <p:cNvSpPr/>
+          <p:nvPr/>
+        </p:nvSpPr>
+        <p:spPr>
+          <a:xfrm>
+            <a:off x="1909267" y="1335024"/>
+            <a:ext cx="4200754" cy="310896"/>
+          </a:xfrm>
+          <a:prstGeom prst="roundRect">
+            <a:avLst>
+              <a:gd name="adj" fmla="val 73529"/>
+            </a:avLst>
+          </a:prstGeom>
+          <a:solidFill>
+            <a:srgbClr val="ADDAFB"/>
+          </a:solidFill>
+          <a:ln w="12700">
+            <a:solidFill>
+              <a:srgbClr val="3E6DA8"/>
+            </a:solidFill>
+            <a:prstDash val="solid"/>
+          </a:ln>
+        </p:spPr>
+      </p:sp>
+      <p:sp>
+        <p:nvSpPr>
+          <p:cNvPr id="15" name="Text 13"/>
+          <p:cNvSpPr/>
+          <p:nvPr/>
+        </p:nvSpPr>
+        <p:spPr>
+          <a:xfrm>
+            <a:off x="1909267" y="1335024"/>
+            <a:ext cx="4200754" cy="310896"/>
+          </a:xfrm>
+          <a:prstGeom prst="rect">
+            <a:avLst/>
+          </a:prstGeom>
+          <a:noFill/>
+          <a:ln/>
+        </p:spPr>
+        <p:txBody>
+          <a:bodyPr wrap="square" lIns="0" tIns="0" rIns="0" bIns="0" rtlCol="0" anchor="ctr"/>
+          <a:lstStyle/>
+          <a:p>
+            <a:pPr algn="ctr" indent="0" marL="0">
+              <a:buNone/>
+            </a:pPr>
+            <a:r>
+              <a:rPr lang="en-US" sz="800" b="1" dirty="0">
+                <a:solidFill>
+                  <a:srgbClr val="081F5C"/>
+                </a:solidFill>
+                <a:latin typeface="Arial" pitchFamily="34" charset="0"/>
+                <a:ea typeface="Arial" pitchFamily="34" charset="-122"/>
+                <a:cs typeface="Arial" pitchFamily="34" charset="-120"/>
+              </a:rPr>
+              <a:t>Migration Agents</a:t>
+            </a:r>
+            <a:endParaRPr lang="en-US" sz="800" dirty="0"/>
+          </a:p>
+        </p:txBody>
+      </p:sp>
+      <p:sp>
+        <p:nvSpPr>
+          <p:cNvPr id="16" name="Shape 14"/>
+          <p:cNvSpPr/>
+          <p:nvPr/>
+        </p:nvSpPr>
+        <p:spPr>
+          <a:xfrm>
+            <a:off x="4009644" y="1645920"/>
+            <a:ext cx="0" cy="402336"/>
+          </a:xfrm>
+          <a:prstGeom prst="line">
+            <a:avLst/>
+          </a:prstGeom>
+          <a:noFill/>
+          <a:ln w="12700">
+            <a:solidFill>
+              <a:srgbClr val="3E6DA8"/>
+            </a:solidFill>
+            <a:prstDash val="dash"/>
+          </a:ln>
+        </p:spPr>
+      </p:sp>
+      <p:sp>
+        <p:nvSpPr>
+          <p:cNvPr id="17" name="Shape 15"/>
+          <p:cNvSpPr/>
+          <p:nvPr/>
+        </p:nvSpPr>
+        <p:spPr>
+          <a:xfrm>
+            <a:off x="2557577" y="2048256"/>
+            <a:ext cx="2904134" cy="0"/>
+          </a:xfrm>
+          <a:prstGeom prst="line">
+            <a:avLst/>
+          </a:prstGeom>
+          <a:noFill/>
+          <a:ln w="12700">
+            <a:solidFill>
+              <a:srgbClr val="3E6DA8"/>
+            </a:solidFill>
+            <a:prstDash val="dash"/>
+          </a:ln>
+        </p:spPr>
+      </p:sp>
+      <p:sp>
+        <p:nvSpPr>
+          <p:cNvPr id="18" name="Shape 16"/>
+          <p:cNvSpPr/>
+          <p:nvPr/>
+        </p:nvSpPr>
+        <p:spPr>
+          <a:xfrm>
+            <a:off x="2557577" y="2048256"/>
+            <a:ext cx="0" cy="347472"/>
+          </a:xfrm>
+          <a:prstGeom prst="line">
+            <a:avLst/>
+          </a:prstGeom>
+          <a:noFill/>
+          <a:ln w="12700">
+            <a:solidFill>
+              <a:srgbClr val="3E6DA8"/>
+            </a:solidFill>
+            <a:prstDash val="dash"/>
+          </a:ln>
+        </p:spPr>
+      </p:sp>
+      <p:sp>
+        <p:nvSpPr>
+          <p:cNvPr id="19" name="Shape 17"/>
+          <p:cNvSpPr/>
+          <p:nvPr/>
+        </p:nvSpPr>
+        <p:spPr>
+          <a:xfrm>
+            <a:off x="4009644" y="2048256"/>
+            <a:ext cx="0" cy="347472"/>
+          </a:xfrm>
+          <a:prstGeom prst="line">
+            <a:avLst/>
+          </a:prstGeom>
+          <a:noFill/>
+          <a:ln w="12700">
+            <a:solidFill>
+              <a:srgbClr val="3E6DA8"/>
+            </a:solidFill>
+            <a:prstDash val="dash"/>
+          </a:ln>
+        </p:spPr>
+      </p:sp>
+      <p:sp>
+        <p:nvSpPr>
+          <p:cNvPr id="20" name="Shape 18"/>
+          <p:cNvSpPr/>
+          <p:nvPr/>
+        </p:nvSpPr>
+        <p:spPr>
+          <a:xfrm>
+            <a:off x="5461711" y="2048256"/>
+            <a:ext cx="0" cy="347472"/>
+          </a:xfrm>
+          <a:prstGeom prst="line">
+            <a:avLst/>
+          </a:prstGeom>
+          <a:noFill/>
+          <a:ln w="12700">
+            <a:solidFill>
+              <a:srgbClr val="3E6DA8"/>
+            </a:solidFill>
+            <a:prstDash val="dash"/>
+          </a:ln>
+        </p:spPr>
+      </p:sp>
+      <p:sp>
+        <p:nvSpPr>
+          <p:cNvPr id="21" name="Shape 19"/>
+          <p:cNvSpPr/>
+          <p:nvPr/>
+        </p:nvSpPr>
+        <p:spPr>
+          <a:xfrm>
+            <a:off x="6451092" y="1335024"/>
+            <a:ext cx="2563063" cy="310896"/>
+          </a:xfrm>
+          <a:prstGeom prst="roundRect">
+            <a:avLst>
+              <a:gd name="adj" fmla="val 73529"/>
+            </a:avLst>
+          </a:prstGeom>
+          <a:solidFill>
+            <a:srgbClr val="ADDAFB"/>
+          </a:solidFill>
+          <a:ln w="12700">
+            <a:solidFill>
+              <a:srgbClr val="3E6DA8"/>
+            </a:solidFill>
+            <a:prstDash val="solid"/>
+          </a:ln>
+        </p:spPr>
+      </p:sp>
+      <p:sp>
+        <p:nvSpPr>
+          <p:cNvPr id="22" name="Text 20"/>
+          <p:cNvSpPr/>
+          <p:nvPr/>
+        </p:nvSpPr>
+        <p:spPr>
+          <a:xfrm>
+            <a:off x="6451092" y="1335024"/>
+            <a:ext cx="2563063" cy="310896"/>
+          </a:xfrm>
+          <a:prstGeom prst="rect">
+            <a:avLst/>
+          </a:prstGeom>
+          <a:noFill/>
+          <a:ln/>
+        </p:spPr>
+        <p:txBody>
+          <a:bodyPr wrap="square" lIns="0" tIns="0" rIns="0" bIns="0" rtlCol="0" anchor="ctr"/>
+          <a:lstStyle/>
+          <a:p>
+            <a:pPr algn="ctr" indent="0" marL="0">
+              <a:buNone/>
+            </a:pPr>
+            <a:r>
+              <a:rPr lang="en-US" sz="800" b="1" dirty="0">
+                <a:solidFill>
+                  <a:srgbClr val="081F5C"/>
+                </a:solidFill>
+                <a:latin typeface="Arial" pitchFamily="34" charset="0"/>
+                <a:ea typeface="Arial" pitchFamily="34" charset="-122"/>
+                <a:cs typeface="Arial" pitchFamily="34" charset="-120"/>
+              </a:rPr>
+              <a:t>Validation &amp; Tuning Agents</a:t>
+            </a:r>
+            <a:endParaRPr lang="en-US" sz="800" dirty="0"/>
+          </a:p>
+        </p:txBody>
+      </p:sp>
+      <p:sp>
+        <p:nvSpPr>
+          <p:cNvPr id="23" name="Shape 21"/>
+          <p:cNvSpPr/>
+          <p:nvPr/>
+        </p:nvSpPr>
+        <p:spPr>
+          <a:xfrm>
+            <a:off x="7732624" y="1645920"/>
+            <a:ext cx="0" cy="402336"/>
+          </a:xfrm>
+          <a:prstGeom prst="line">
+            <a:avLst/>
+          </a:prstGeom>
+          <a:noFill/>
+          <a:ln w="12700">
+            <a:solidFill>
+              <a:srgbClr val="3E6DA8"/>
+            </a:solidFill>
+            <a:prstDash val="dash"/>
+          </a:ln>
+        </p:spPr>
+      </p:sp>
+      <p:sp>
+        <p:nvSpPr>
+          <p:cNvPr id="24" name="Shape 22"/>
+          <p:cNvSpPr/>
+          <p:nvPr/>
+        </p:nvSpPr>
+        <p:spPr>
+          <a:xfrm>
+            <a:off x="6913778" y="2048256"/>
+            <a:ext cx="1452067" cy="0"/>
+          </a:xfrm>
+          <a:prstGeom prst="line">
+            <a:avLst/>
+          </a:prstGeom>
+          <a:noFill/>
+          <a:ln w="12700">
+            <a:solidFill>
+              <a:srgbClr val="3E6DA8"/>
+            </a:solidFill>
+            <a:prstDash val="dash"/>
+          </a:ln>
+        </p:spPr>
+      </p:sp>
+      <p:sp>
+        <p:nvSpPr>
+          <p:cNvPr id="25" name="Shape 23"/>
+          <p:cNvSpPr/>
+          <p:nvPr/>
+        </p:nvSpPr>
+        <p:spPr>
+          <a:xfrm>
+            <a:off x="6913778" y="2048256"/>
+            <a:ext cx="0" cy="347472"/>
+          </a:xfrm>
+          <a:prstGeom prst="line">
+            <a:avLst/>
+          </a:prstGeom>
+          <a:noFill/>
+          <a:ln w="12700">
+            <a:solidFill>
+              <a:srgbClr val="3E6DA8"/>
+            </a:solidFill>
+            <a:prstDash val="dash"/>
+          </a:ln>
+        </p:spPr>
+      </p:sp>
+      <p:sp>
+        <p:nvSpPr>
+          <p:cNvPr id="26" name="Shape 24"/>
+          <p:cNvSpPr/>
+          <p:nvPr/>
+        </p:nvSpPr>
+        <p:spPr>
+          <a:xfrm>
+            <a:off x="8365846" y="2048256"/>
+            <a:ext cx="0" cy="347472"/>
+          </a:xfrm>
+          <a:prstGeom prst="line">
+            <a:avLst/>
+          </a:prstGeom>
+          <a:noFill/>
+          <a:ln w="12700">
+            <a:solidFill>
+              <a:srgbClr val="3E6DA8"/>
+            </a:solidFill>
+            <a:prstDash val="dash"/>
+          </a:ln>
+        </p:spPr>
+      </p:sp>
+      <p:sp>
+        <p:nvSpPr>
+          <p:cNvPr id="27" name="Shape 25"/>
+          <p:cNvSpPr/>
+          <p:nvPr/>
+        </p:nvSpPr>
+        <p:spPr>
+          <a:xfrm>
+            <a:off x="457200" y="2395728"/>
+            <a:ext cx="1296619" cy="749808"/>
+          </a:xfrm>
+          <a:prstGeom prst="roundRect">
+            <a:avLst>
+              <a:gd name="adj" fmla="val 14634"/>
+            </a:avLst>
+          </a:prstGeom>
+          <a:solidFill>
+            <a:srgbClr val="FFFFFF"/>
+          </a:solidFill>
+          <a:ln w="15875">
+            <a:solidFill>
+              <a:srgbClr val="3E6DA8"/>
+            </a:solidFill>
+            <a:prstDash val="solid"/>
+          </a:ln>
+        </p:spPr>
+      </p:sp>
+      <p:sp>
+        <p:nvSpPr>
+          <p:cNvPr id="28" name="Shape 26"/>
+          <p:cNvSpPr/>
+          <p:nvPr/>
+        </p:nvSpPr>
+        <p:spPr>
+          <a:xfrm>
+            <a:off x="374904" y="2331720"/>
+            <a:ext cx="182880" cy="182880"/>
+          </a:xfrm>
+          <a:prstGeom prst="ellipse">
+            <a:avLst/>
+          </a:prstGeom>
+          <a:solidFill>
+            <a:srgbClr val="081F5C"/>
+          </a:solidFill>
+          <a:ln w="6350">
+            <a:solidFill>
+              <a:srgbClr val="081F5C"/>
+            </a:solidFill>
+            <a:prstDash val="solid"/>
+          </a:ln>
+        </p:spPr>
+      </p:sp>
+      <p:sp>
+        <p:nvSpPr>
+          <p:cNvPr id="29" name="Text 27"/>
+          <p:cNvSpPr/>
+          <p:nvPr/>
+        </p:nvSpPr>
+        <p:spPr>
+          <a:xfrm>
+            <a:off x="374904" y="2331720"/>
+            <a:ext cx="182880" cy="182880"/>
+          </a:xfrm>
+          <a:prstGeom prst="rect">
+            <a:avLst/>
+          </a:prstGeom>
+          <a:noFill/>
+          <a:ln/>
+        </p:spPr>
+        <p:txBody>
+          <a:bodyPr wrap="square" lIns="0" tIns="0" rIns="0" bIns="0" rtlCol="0" anchor="ctr"/>
+          <a:lstStyle/>
+          <a:p>
+            <a:pPr algn="ctr" indent="0" marL="0">
+              <a:buNone/>
+            </a:pPr>
+            <a:r>
+              <a:rPr lang="en-US" sz="700" b="1" dirty="0">
+                <a:solidFill>
+                  <a:srgbClr val="FFFFFF"/>
+                </a:solidFill>
+                <a:latin typeface="Arial" pitchFamily="34" charset="0"/>
+                <a:ea typeface="Arial" pitchFamily="34" charset="-122"/>
+                <a:cs typeface="Arial" pitchFamily="34" charset="-120"/>
+              </a:rPr>
+              <a:t>1</a:t>
+            </a:r>
+            <a:endParaRPr lang="en-US" sz="700" dirty="0"/>
+          </a:p>
+        </p:txBody>
+      </p:sp>
+      <p:sp>
+        <p:nvSpPr>
+          <p:cNvPr id="30" name="Text 28"/>
+          <p:cNvSpPr/>
+          <p:nvPr/>
+        </p:nvSpPr>
+        <p:spPr>
+          <a:xfrm>
+            <a:off x="457200" y="2395728"/>
+            <a:ext cx="1296619" cy="749808"/>
+          </a:xfrm>
+          <a:prstGeom prst="rect">
+            <a:avLst/>
+          </a:prstGeom>
+          <a:noFill/>
+          <a:ln/>
+        </p:spPr>
+        <p:txBody>
+          <a:bodyPr wrap="square" lIns="381" tIns="762" rIns="762" bIns="381" rtlCol="0" anchor="ctr"/>
+          <a:lstStyle/>
+          <a:p>
+            <a:pPr algn="ctr" indent="0" marL="0">
+              <a:lnSpc>
+                <a:spcPct val="92000"/>
+              </a:lnSpc>
+              <a:spcAft>
+                <a:spcPts val="300"/>
+              </a:spcAft>
+              <a:buNone/>
+            </a:pPr>
+            <a:r>
+              <a:rPr lang="en-US" sz="740" b="1" dirty="0">
+                <a:solidFill>
+                  <a:srgbClr val="081F5C"/>
+                </a:solidFill>
+                <a:latin typeface="Arial" pitchFamily="34" charset="0"/>
+                <a:ea typeface="Arial" pitchFamily="34" charset="-122"/>
+                <a:cs typeface="Arial" pitchFamily="34" charset="-120"/>
+              </a:rPr>
+              <a:t>Report Rationalization &amp; Disposition</a:t>
+            </a:r>
+            <a:endParaRPr lang="en-US" sz="740" dirty="0"/>
+          </a:p>
+          <a:p>
+            <a:pPr algn="ctr" indent="0" marL="0">
+              <a:lnSpc>
+                <a:spcPct val="92000"/>
+              </a:lnSpc>
+              <a:buNone/>
+            </a:pPr>
+            <a:r>
+              <a:rPr lang="en-US" sz="620" i="1" dirty="0">
+                <a:solidFill>
+                  <a:srgbClr val="2E4A85"/>
+                </a:solidFill>
+                <a:latin typeface="Arial" pitchFamily="34" charset="0"/>
+                <a:ea typeface="Arial" pitchFamily="34" charset="-122"/>
+                <a:cs typeface="Arial" pitchFamily="34" charset="-120"/>
+              </a:rPr>
+              <a:t>DRECT · Rationalizer · ★ Fit Scorer</a:t>
+            </a:r>
+            <a:endParaRPr lang="en-US" sz="740" dirty="0"/>
+          </a:p>
+        </p:txBody>
+      </p:sp>
+      <p:sp>
+        <p:nvSpPr>
+          <p:cNvPr id="31" name="Shape 29"/>
+          <p:cNvSpPr/>
+          <p:nvPr/>
+        </p:nvSpPr>
+        <p:spPr>
+          <a:xfrm>
+            <a:off x="1105510" y="3145536"/>
+            <a:ext cx="0" cy="164592"/>
+          </a:xfrm>
+          <a:prstGeom prst="line">
+            <a:avLst/>
+          </a:prstGeom>
+          <a:noFill/>
+          <a:ln w="12700">
+            <a:solidFill>
+              <a:srgbClr val="3E6DA8"/>
+            </a:solidFill>
+            <a:prstDash val="dash"/>
+          </a:ln>
+        </p:spPr>
+      </p:sp>
+      <p:sp>
+        <p:nvSpPr>
+          <p:cNvPr id="32" name="Shape 30"/>
+          <p:cNvSpPr/>
+          <p:nvPr/>
+        </p:nvSpPr>
+        <p:spPr>
+          <a:xfrm>
+            <a:off x="1909267" y="2395728"/>
+            <a:ext cx="1296619" cy="749808"/>
+          </a:xfrm>
+          <a:prstGeom prst="roundRect">
+            <a:avLst>
+              <a:gd name="adj" fmla="val 14634"/>
+            </a:avLst>
+          </a:prstGeom>
+          <a:solidFill>
+            <a:srgbClr val="FFFFFF"/>
+          </a:solidFill>
+          <a:ln w="15875">
+            <a:solidFill>
+              <a:srgbClr val="3E6DA8"/>
+            </a:solidFill>
+            <a:prstDash val="solid"/>
+          </a:ln>
+        </p:spPr>
+      </p:sp>
+      <p:sp>
+        <p:nvSpPr>
+          <p:cNvPr id="33" name="Shape 31"/>
+          <p:cNvSpPr/>
+          <p:nvPr/>
+        </p:nvSpPr>
+        <p:spPr>
+          <a:xfrm>
+            <a:off x="1826971" y="2331720"/>
+            <a:ext cx="182880" cy="182880"/>
+          </a:xfrm>
+          <a:prstGeom prst="ellipse">
+            <a:avLst/>
+          </a:prstGeom>
+          <a:solidFill>
+            <a:srgbClr val="081F5C"/>
+          </a:solidFill>
+          <a:ln w="6350">
+            <a:solidFill>
+              <a:srgbClr val="081F5C"/>
+            </a:solidFill>
+            <a:prstDash val="solid"/>
+          </a:ln>
+        </p:spPr>
+      </p:sp>
+      <p:sp>
+        <p:nvSpPr>
+          <p:cNvPr id="34" name="Text 32"/>
+          <p:cNvSpPr/>
+          <p:nvPr/>
+        </p:nvSpPr>
+        <p:spPr>
+          <a:xfrm>
+            <a:off x="1826971" y="2331720"/>
+            <a:ext cx="182880" cy="182880"/>
+          </a:xfrm>
+          <a:prstGeom prst="rect">
+            <a:avLst/>
+          </a:prstGeom>
+          <a:noFill/>
+          <a:ln/>
+        </p:spPr>
+        <p:txBody>
+          <a:bodyPr wrap="square" lIns="0" tIns="0" rIns="0" bIns="0" rtlCol="0" anchor="ctr"/>
+          <a:lstStyle/>
+          <a:p>
+            <a:pPr algn="ctr" indent="0" marL="0">
+              <a:buNone/>
+            </a:pPr>
+            <a:r>
+              <a:rPr lang="en-US" sz="700" b="1" dirty="0">
+                <a:solidFill>
+                  <a:srgbClr val="FFFFFF"/>
+                </a:solidFill>
+                <a:latin typeface="Arial" pitchFamily="34" charset="0"/>
+                <a:ea typeface="Arial" pitchFamily="34" charset="-122"/>
+                <a:cs typeface="Arial" pitchFamily="34" charset="-120"/>
+              </a:rPr>
+              <a:t>2</a:t>
+            </a:r>
+            <a:endParaRPr lang="en-US" sz="700" dirty="0"/>
+          </a:p>
+        </p:txBody>
+      </p:sp>
+      <p:sp>
+        <p:nvSpPr>
+          <p:cNvPr id="35" name="Text 33"/>
+          <p:cNvSpPr/>
+          <p:nvPr/>
+        </p:nvSpPr>
+        <p:spPr>
+          <a:xfrm>
+            <a:off x="1909267" y="2395728"/>
+            <a:ext cx="1296619" cy="749808"/>
+          </a:xfrm>
+          <a:prstGeom prst="rect">
+            <a:avLst/>
+          </a:prstGeom>
+          <a:noFill/>
+          <a:ln/>
+        </p:spPr>
+        <p:txBody>
+          <a:bodyPr wrap="square" lIns="381" tIns="762" rIns="762" bIns="381" rtlCol="0" anchor="ctr"/>
+          <a:lstStyle/>
+          <a:p>
+            <a:pPr algn="ctr" indent="0" marL="0">
+              <a:lnSpc>
+                <a:spcPct val="92000"/>
+              </a:lnSpc>
+              <a:spcAft>
+                <a:spcPts val="300"/>
+              </a:spcAft>
+              <a:buNone/>
+            </a:pPr>
+            <a:r>
+              <a:rPr lang="en-US" sz="740" b="1" dirty="0">
+                <a:solidFill>
+                  <a:srgbClr val="081F5C"/>
+                </a:solidFill>
+                <a:latin typeface="Arial" pitchFamily="34" charset="0"/>
+                <a:ea typeface="Arial" pitchFamily="34" charset="-122"/>
+                <a:cs typeface="Arial" pitchFamily="34" charset="-120"/>
+              </a:rPr>
+              <a:t>★ Schema Mapper</a:t>
+            </a:r>
+            <a:endParaRPr lang="en-US" sz="740" dirty="0"/>
+          </a:p>
+          <a:p>
+            <a:pPr algn="ctr" indent="0" marL="0">
+              <a:lnSpc>
+                <a:spcPct val="92000"/>
+              </a:lnSpc>
+              <a:buNone/>
+            </a:pPr>
+            <a:r>
+              <a:rPr lang="en-US" sz="620" i="1" dirty="0">
+                <a:solidFill>
+                  <a:srgbClr val="2E4A85"/>
+                </a:solidFill>
+                <a:latin typeface="Arial" pitchFamily="34" charset="0"/>
+                <a:ea typeface="Arial" pitchFamily="34" charset="-122"/>
+                <a:cs typeface="Arial" pitchFamily="34" charset="-120"/>
+              </a:rPr>
+              <a:t>classify · map · size the effort</a:t>
+            </a:r>
+            <a:endParaRPr lang="en-US" sz="740" dirty="0"/>
+          </a:p>
+        </p:txBody>
+      </p:sp>
+      <p:sp>
+        <p:nvSpPr>
+          <p:cNvPr id="36" name="Shape 34"/>
+          <p:cNvSpPr/>
+          <p:nvPr/>
+        </p:nvSpPr>
+        <p:spPr>
+          <a:xfrm>
+            <a:off x="2557577" y="3145536"/>
+            <a:ext cx="0" cy="164592"/>
+          </a:xfrm>
+          <a:prstGeom prst="line">
+            <a:avLst/>
+          </a:prstGeom>
+          <a:noFill/>
+          <a:ln w="12700">
+            <a:solidFill>
+              <a:srgbClr val="3E6DA8"/>
+            </a:solidFill>
+            <a:prstDash val="dash"/>
+          </a:ln>
+        </p:spPr>
+      </p:sp>
+      <p:sp>
+        <p:nvSpPr>
+          <p:cNvPr id="37" name="Shape 35"/>
+          <p:cNvSpPr/>
+          <p:nvPr/>
+        </p:nvSpPr>
+        <p:spPr>
+          <a:xfrm>
+            <a:off x="3361334" y="2395728"/>
+            <a:ext cx="1296619" cy="749808"/>
+          </a:xfrm>
+          <a:prstGeom prst="roundRect">
+            <a:avLst>
+              <a:gd name="adj" fmla="val 14634"/>
+            </a:avLst>
+          </a:prstGeom>
+          <a:solidFill>
+            <a:srgbClr val="FFFFFF"/>
+          </a:solidFill>
+          <a:ln w="15875">
+            <a:solidFill>
+              <a:srgbClr val="3E6DA8"/>
+            </a:solidFill>
+            <a:prstDash val="solid"/>
+          </a:ln>
+        </p:spPr>
+      </p:sp>
+      <p:sp>
+        <p:nvSpPr>
+          <p:cNvPr id="38" name="Shape 36"/>
+          <p:cNvSpPr/>
+          <p:nvPr/>
+        </p:nvSpPr>
+        <p:spPr>
+          <a:xfrm>
+            <a:off x="3279038" y="2331720"/>
+            <a:ext cx="182880" cy="182880"/>
+          </a:xfrm>
+          <a:prstGeom prst="ellipse">
+            <a:avLst/>
+          </a:prstGeom>
+          <a:solidFill>
+            <a:srgbClr val="081F5C"/>
+          </a:solidFill>
+          <a:ln w="6350">
+            <a:solidFill>
+              <a:srgbClr val="081F5C"/>
+            </a:solidFill>
+            <a:prstDash val="solid"/>
+          </a:ln>
+        </p:spPr>
+      </p:sp>
+      <p:sp>
+        <p:nvSpPr>
+          <p:cNvPr id="39" name="Text 37"/>
+          <p:cNvSpPr/>
+          <p:nvPr/>
+        </p:nvSpPr>
+        <p:spPr>
+          <a:xfrm>
+            <a:off x="3279038" y="2331720"/>
+            <a:ext cx="182880" cy="182880"/>
+          </a:xfrm>
+          <a:prstGeom prst="rect">
+            <a:avLst/>
+          </a:prstGeom>
+          <a:noFill/>
+          <a:ln/>
+        </p:spPr>
+        <p:txBody>
+          <a:bodyPr wrap="square" lIns="0" tIns="0" rIns="0" bIns="0" rtlCol="0" anchor="ctr"/>
+          <a:lstStyle/>
+          <a:p>
+            <a:pPr algn="ctr" indent="0" marL="0">
+              <a:buNone/>
+            </a:pPr>
+            <a:r>
+              <a:rPr lang="en-US" sz="700" b="1" dirty="0">
+                <a:solidFill>
+                  <a:srgbClr val="FFFFFF"/>
+                </a:solidFill>
+                <a:latin typeface="Arial" pitchFamily="34" charset="0"/>
+                <a:ea typeface="Arial" pitchFamily="34" charset="-122"/>
+                <a:cs typeface="Arial" pitchFamily="34" charset="-120"/>
+              </a:rPr>
+              <a:t>3</a:t>
+            </a:r>
+            <a:endParaRPr lang="en-US" sz="700" dirty="0"/>
+          </a:p>
+        </p:txBody>
+      </p:sp>
+      <p:sp>
+        <p:nvSpPr>
+          <p:cNvPr id="40" name="Text 38"/>
+          <p:cNvSpPr/>
+          <p:nvPr/>
+        </p:nvSpPr>
+        <p:spPr>
+          <a:xfrm>
+            <a:off x="3361334" y="2395728"/>
+            <a:ext cx="1296619" cy="749808"/>
+          </a:xfrm>
+          <a:prstGeom prst="rect">
+            <a:avLst/>
+          </a:prstGeom>
+          <a:noFill/>
+          <a:ln/>
+        </p:spPr>
+        <p:txBody>
+          <a:bodyPr wrap="square" lIns="381" tIns="762" rIns="762" bIns="381" rtlCol="0" anchor="ctr"/>
+          <a:lstStyle/>
+          <a:p>
+            <a:pPr algn="ctr" indent="0" marL="0">
+              <a:lnSpc>
+                <a:spcPct val="92000"/>
+              </a:lnSpc>
+              <a:spcAft>
+                <a:spcPts val="300"/>
+              </a:spcAft>
+              <a:buNone/>
+            </a:pPr>
+            <a:r>
+              <a:rPr lang="en-US" sz="740" b="1" dirty="0">
+                <a:solidFill>
+                  <a:srgbClr val="081F5C"/>
+                </a:solidFill>
+                <a:latin typeface="Arial" pitchFamily="34" charset="0"/>
+                <a:ea typeface="Arial" pitchFamily="34" charset="-122"/>
+                <a:cs typeface="Arial" pitchFamily="34" charset="-120"/>
+              </a:rPr>
+              <a:t>DDL &amp; Object Converter</a:t>
+            </a:r>
+            <a:endParaRPr lang="en-US" sz="740" dirty="0"/>
+          </a:p>
+          <a:p>
+            <a:pPr algn="ctr" indent="0" marL="0">
+              <a:lnSpc>
+                <a:spcPct val="92000"/>
+              </a:lnSpc>
+              <a:buNone/>
+            </a:pPr>
+            <a:r>
+              <a:rPr lang="en-US" sz="620" i="1" dirty="0">
+                <a:solidFill>
+                  <a:srgbClr val="2E4A85"/>
+                </a:solidFill>
+                <a:latin typeface="Arial" pitchFamily="34" charset="0"/>
+                <a:ea typeface="Arial" pitchFamily="34" charset="-122"/>
+                <a:cs typeface="Arial" pitchFamily="34" charset="-120"/>
+              </a:rPr>
+              <a:t>Code Converter · Data Migration Agent</a:t>
+            </a:r>
+            <a:endParaRPr lang="en-US" sz="740" dirty="0"/>
+          </a:p>
+        </p:txBody>
+      </p:sp>
+      <p:sp>
+        <p:nvSpPr>
+          <p:cNvPr id="41" name="Shape 39"/>
+          <p:cNvSpPr/>
+          <p:nvPr/>
+        </p:nvSpPr>
+        <p:spPr>
+          <a:xfrm>
+            <a:off x="4009644" y="3145536"/>
+            <a:ext cx="0" cy="164592"/>
+          </a:xfrm>
+          <a:prstGeom prst="line">
+            <a:avLst/>
+          </a:prstGeom>
+          <a:noFill/>
+          <a:ln w="12700">
+            <a:solidFill>
+              <a:srgbClr val="3E6DA8"/>
+            </a:solidFill>
+            <a:prstDash val="dash"/>
+          </a:ln>
+        </p:spPr>
+      </p:sp>
+      <p:sp>
+        <p:nvSpPr>
+          <p:cNvPr id="42" name="Shape 40"/>
+          <p:cNvSpPr/>
+          <p:nvPr/>
+        </p:nvSpPr>
+        <p:spPr>
+          <a:xfrm>
+            <a:off x="4813402" y="2395728"/>
+            <a:ext cx="1296619" cy="749808"/>
+          </a:xfrm>
+          <a:prstGeom prst="roundRect">
+            <a:avLst>
+              <a:gd name="adj" fmla="val 14634"/>
+            </a:avLst>
+          </a:prstGeom>
+          <a:solidFill>
+            <a:srgbClr val="FFFFFF"/>
+          </a:solidFill>
+          <a:ln w="15875">
+            <a:solidFill>
+              <a:srgbClr val="3E6DA8"/>
+            </a:solidFill>
+            <a:prstDash val="solid"/>
+          </a:ln>
+        </p:spPr>
+      </p:sp>
+      <p:sp>
+        <p:nvSpPr>
+          <p:cNvPr id="43" name="Shape 41"/>
+          <p:cNvSpPr/>
+          <p:nvPr/>
+        </p:nvSpPr>
+        <p:spPr>
+          <a:xfrm>
+            <a:off x="4731106" y="2331720"/>
+            <a:ext cx="182880" cy="182880"/>
+          </a:xfrm>
+          <a:prstGeom prst="ellipse">
+            <a:avLst/>
+          </a:prstGeom>
+          <a:solidFill>
+            <a:srgbClr val="081F5C"/>
+          </a:solidFill>
+          <a:ln w="6350">
+            <a:solidFill>
+              <a:srgbClr val="081F5C"/>
+            </a:solidFill>
+            <a:prstDash val="solid"/>
+          </a:ln>
+        </p:spPr>
+      </p:sp>
+      <p:sp>
+        <p:nvSpPr>
+          <p:cNvPr id="44" name="Text 42"/>
+          <p:cNvSpPr/>
+          <p:nvPr/>
+        </p:nvSpPr>
+        <p:spPr>
+          <a:xfrm>
+            <a:off x="4731106" y="2331720"/>
+            <a:ext cx="182880" cy="182880"/>
+          </a:xfrm>
+          <a:prstGeom prst="rect">
+            <a:avLst/>
+          </a:prstGeom>
+          <a:noFill/>
+          <a:ln/>
+        </p:spPr>
+        <p:txBody>
+          <a:bodyPr wrap="square" lIns="0" tIns="0" rIns="0" bIns="0" rtlCol="0" anchor="ctr"/>
+          <a:lstStyle/>
+          <a:p>
+            <a:pPr algn="ctr" indent="0" marL="0">
+              <a:buNone/>
+            </a:pPr>
+            <a:r>
+              <a:rPr lang="en-US" sz="700" b="1" dirty="0">
+                <a:solidFill>
+                  <a:srgbClr val="FFFFFF"/>
+                </a:solidFill>
+                <a:latin typeface="Arial" pitchFamily="34" charset="0"/>
+                <a:ea typeface="Arial" pitchFamily="34" charset="-122"/>
+                <a:cs typeface="Arial" pitchFamily="34" charset="-120"/>
+              </a:rPr>
+              <a:t>4</a:t>
+            </a:r>
+            <a:endParaRPr lang="en-US" sz="700" dirty="0"/>
+          </a:p>
+        </p:txBody>
+      </p:sp>
+      <p:sp>
+        <p:nvSpPr>
+          <p:cNvPr id="45" name="Text 43"/>
+          <p:cNvSpPr/>
+          <p:nvPr/>
+        </p:nvSpPr>
+        <p:spPr>
+          <a:xfrm>
+            <a:off x="4813402" y="2395728"/>
+            <a:ext cx="1296619" cy="749808"/>
+          </a:xfrm>
+          <a:prstGeom prst="rect">
+            <a:avLst/>
+          </a:prstGeom>
+          <a:noFill/>
+          <a:ln/>
+        </p:spPr>
+        <p:txBody>
+          <a:bodyPr wrap="square" lIns="381" tIns="762" rIns="762" bIns="381" rtlCol="0" anchor="ctr"/>
+          <a:lstStyle/>
+          <a:p>
+            <a:pPr algn="ctr" indent="0" marL="0">
+              <a:lnSpc>
+                <a:spcPct val="92000"/>
+              </a:lnSpc>
+              <a:spcAft>
+                <a:spcPts val="300"/>
+              </a:spcAft>
+              <a:buNone/>
+            </a:pPr>
+            <a:r>
+              <a:rPr lang="en-US" sz="740" b="1" dirty="0">
+                <a:solidFill>
+                  <a:srgbClr val="081F5C"/>
+                </a:solidFill>
+                <a:latin typeface="Arial" pitchFamily="34" charset="0"/>
+                <a:ea typeface="Arial" pitchFamily="34" charset="-122"/>
+                <a:cs typeface="Arial" pitchFamily="34" charset="-120"/>
+              </a:rPr>
+              <a:t>Report Migration Agents</a:t>
+            </a:r>
+            <a:endParaRPr lang="en-US" sz="740" dirty="0"/>
+          </a:p>
+          <a:p>
+            <a:pPr algn="ctr" indent="0" marL="0">
+              <a:lnSpc>
+                <a:spcPct val="92000"/>
+              </a:lnSpc>
+              <a:buNone/>
+            </a:pPr>
+            <a:r>
+              <a:rPr lang="en-US" sz="620" i="1" dirty="0">
+                <a:solidFill>
+                  <a:srgbClr val="2E4A85"/>
+                </a:solidFill>
+                <a:latin typeface="Arial" pitchFamily="34" charset="0"/>
+                <a:ea typeface="Arial" pitchFamily="34" charset="-122"/>
+                <a:cs typeface="Arial" pitchFamily="34" charset="-120"/>
+              </a:rPr>
+              <a:t>Automator · Transpiler · ★ AI/BI Gen</a:t>
+            </a:r>
+            <a:endParaRPr lang="en-US" sz="740" dirty="0"/>
+          </a:p>
+        </p:txBody>
+      </p:sp>
+      <p:sp>
+        <p:nvSpPr>
+          <p:cNvPr id="46" name="Shape 44"/>
+          <p:cNvSpPr/>
+          <p:nvPr/>
+        </p:nvSpPr>
+        <p:spPr>
+          <a:xfrm>
+            <a:off x="5461711" y="3145536"/>
+            <a:ext cx="0" cy="164592"/>
+          </a:xfrm>
+          <a:prstGeom prst="line">
+            <a:avLst/>
+          </a:prstGeom>
+          <a:noFill/>
+          <a:ln w="12700">
+            <a:solidFill>
+              <a:srgbClr val="3E6DA8"/>
+            </a:solidFill>
+            <a:prstDash val="dash"/>
+          </a:ln>
+        </p:spPr>
+      </p:sp>
+      <p:sp>
+        <p:nvSpPr>
+          <p:cNvPr id="47" name="Shape 45"/>
+          <p:cNvSpPr/>
+          <p:nvPr/>
+        </p:nvSpPr>
+        <p:spPr>
+          <a:xfrm>
+            <a:off x="6265469" y="2395728"/>
+            <a:ext cx="1296619" cy="749808"/>
+          </a:xfrm>
+          <a:prstGeom prst="roundRect">
+            <a:avLst>
+              <a:gd name="adj" fmla="val 14634"/>
+            </a:avLst>
+          </a:prstGeom>
+          <a:solidFill>
+            <a:srgbClr val="FFFFFF"/>
+          </a:solidFill>
+          <a:ln w="15875">
+            <a:solidFill>
+              <a:srgbClr val="3E6DA8"/>
+            </a:solidFill>
+            <a:prstDash val="solid"/>
+          </a:ln>
+        </p:spPr>
+      </p:sp>
+      <p:sp>
+        <p:nvSpPr>
+          <p:cNvPr id="48" name="Shape 46"/>
+          <p:cNvSpPr/>
+          <p:nvPr/>
+        </p:nvSpPr>
+        <p:spPr>
+          <a:xfrm>
+            <a:off x="6183173" y="2331720"/>
+            <a:ext cx="182880" cy="182880"/>
+          </a:xfrm>
+          <a:prstGeom prst="ellipse">
+            <a:avLst/>
+          </a:prstGeom>
+          <a:solidFill>
+            <a:srgbClr val="081F5C"/>
+          </a:solidFill>
+          <a:ln w="6350">
+            <a:solidFill>
+              <a:srgbClr val="081F5C"/>
+            </a:solidFill>
+            <a:prstDash val="solid"/>
+          </a:ln>
+        </p:spPr>
+      </p:sp>
+      <p:sp>
+        <p:nvSpPr>
+          <p:cNvPr id="49" name="Text 47"/>
+          <p:cNvSpPr/>
+          <p:nvPr/>
+        </p:nvSpPr>
+        <p:spPr>
+          <a:xfrm>
+            <a:off x="6183173" y="2331720"/>
+            <a:ext cx="182880" cy="182880"/>
+          </a:xfrm>
+          <a:prstGeom prst="rect">
+            <a:avLst/>
+          </a:prstGeom>
+          <a:noFill/>
+          <a:ln/>
+        </p:spPr>
+        <p:txBody>
+          <a:bodyPr wrap="square" lIns="0" tIns="0" rIns="0" bIns="0" rtlCol="0" anchor="ctr"/>
+          <a:lstStyle/>
+          <a:p>
+            <a:pPr algn="ctr" indent="0" marL="0">
+              <a:buNone/>
+            </a:pPr>
+            <a:r>
+              <a:rPr lang="en-US" sz="700" b="1" dirty="0">
+                <a:solidFill>
+                  <a:srgbClr val="FFFFFF"/>
+                </a:solidFill>
+                <a:latin typeface="Arial" pitchFamily="34" charset="0"/>
+                <a:ea typeface="Arial" pitchFamily="34" charset="-122"/>
+                <a:cs typeface="Arial" pitchFamily="34" charset="-120"/>
+              </a:rPr>
+              <a:t>5</a:t>
+            </a:r>
+            <a:endParaRPr lang="en-US" sz="700" dirty="0"/>
+          </a:p>
+        </p:txBody>
+      </p:sp>
+      <p:sp>
+        <p:nvSpPr>
+          <p:cNvPr id="50" name="Text 48"/>
+          <p:cNvSpPr/>
+          <p:nvPr/>
+        </p:nvSpPr>
+        <p:spPr>
+          <a:xfrm>
+            <a:off x="6265469" y="2395728"/>
+            <a:ext cx="1296619" cy="749808"/>
+          </a:xfrm>
+          <a:prstGeom prst="rect">
+            <a:avLst/>
+          </a:prstGeom>
+          <a:noFill/>
+          <a:ln/>
+        </p:spPr>
+        <p:txBody>
+          <a:bodyPr wrap="square" lIns="381" tIns="762" rIns="762" bIns="381" rtlCol="0" anchor="ctr"/>
+          <a:lstStyle/>
+          <a:p>
+            <a:pPr algn="ctr" indent="0" marL="0">
+              <a:lnSpc>
+                <a:spcPct val="92000"/>
+              </a:lnSpc>
+              <a:spcAft>
+                <a:spcPts val="300"/>
+              </a:spcAft>
+              <a:buNone/>
+            </a:pPr>
+            <a:r>
+              <a:rPr lang="en-US" sz="740" b="1" dirty="0">
+                <a:solidFill>
+                  <a:srgbClr val="081F5C"/>
+                </a:solidFill>
+                <a:latin typeface="Arial" pitchFamily="34" charset="0"/>
+                <a:ea typeface="Arial" pitchFamily="34" charset="-122"/>
+                <a:cs typeface="Arial" pitchFamily="34" charset="-120"/>
+              </a:rPr>
+              <a:t>Testing Agents: Data &amp; Reports</a:t>
+            </a:r>
+            <a:endParaRPr lang="en-US" sz="740" dirty="0"/>
+          </a:p>
+          <a:p>
+            <a:pPr algn="ctr" indent="0" marL="0">
+              <a:lnSpc>
+                <a:spcPct val="92000"/>
+              </a:lnSpc>
+              <a:buNone/>
+            </a:pPr>
+            <a:r>
+              <a:rPr lang="en-US" sz="620" i="1" dirty="0">
+                <a:solidFill>
+                  <a:srgbClr val="2E4A85"/>
+                </a:solidFill>
+                <a:latin typeface="Arial" pitchFamily="34" charset="0"/>
+                <a:ea typeface="Arial" pitchFamily="34" charset="-122"/>
+                <a:cs typeface="Arial" pitchFamily="34" charset="-120"/>
+              </a:rPr>
+              <a:t>CATE · Automated Report Tester</a:t>
+            </a:r>
+            <a:endParaRPr lang="en-US" sz="740" dirty="0"/>
+          </a:p>
+        </p:txBody>
+      </p:sp>
+      <p:sp>
+        <p:nvSpPr>
+          <p:cNvPr id="51" name="Shape 49"/>
+          <p:cNvSpPr/>
+          <p:nvPr/>
+        </p:nvSpPr>
+        <p:spPr>
+          <a:xfrm>
+            <a:off x="6913778" y="3145536"/>
+            <a:ext cx="0" cy="164592"/>
+          </a:xfrm>
+          <a:prstGeom prst="line">
+            <a:avLst/>
+          </a:prstGeom>
+          <a:noFill/>
+          <a:ln w="12700">
+            <a:solidFill>
+              <a:srgbClr val="3E6DA8"/>
+            </a:solidFill>
+            <a:prstDash val="dash"/>
+          </a:ln>
+        </p:spPr>
+      </p:sp>
+      <p:sp>
+        <p:nvSpPr>
+          <p:cNvPr id="52" name="Shape 50"/>
+          <p:cNvSpPr/>
+          <p:nvPr/>
+        </p:nvSpPr>
+        <p:spPr>
+          <a:xfrm>
+            <a:off x="7717536" y="2395728"/>
+            <a:ext cx="1296619" cy="749808"/>
+          </a:xfrm>
+          <a:prstGeom prst="roundRect">
+            <a:avLst>
+              <a:gd name="adj" fmla="val 14634"/>
+            </a:avLst>
+          </a:prstGeom>
+          <a:solidFill>
+            <a:srgbClr val="FFFFFF"/>
+          </a:solidFill>
+          <a:ln w="15875">
+            <a:solidFill>
+              <a:srgbClr val="3E6DA8"/>
+            </a:solidFill>
+            <a:prstDash val="solid"/>
+          </a:ln>
+        </p:spPr>
+      </p:sp>
+      <p:sp>
+        <p:nvSpPr>
+          <p:cNvPr id="53" name="Shape 51"/>
+          <p:cNvSpPr/>
+          <p:nvPr/>
+        </p:nvSpPr>
+        <p:spPr>
+          <a:xfrm>
+            <a:off x="7635240" y="2331720"/>
+            <a:ext cx="182880" cy="182880"/>
+          </a:xfrm>
+          <a:prstGeom prst="ellipse">
+            <a:avLst/>
+          </a:prstGeom>
+          <a:solidFill>
+            <a:srgbClr val="081F5C"/>
+          </a:solidFill>
+          <a:ln w="6350">
+            <a:solidFill>
+              <a:srgbClr val="081F5C"/>
+            </a:solidFill>
+            <a:prstDash val="solid"/>
+          </a:ln>
+        </p:spPr>
+      </p:sp>
+      <p:sp>
+        <p:nvSpPr>
+          <p:cNvPr id="54" name="Text 52"/>
+          <p:cNvSpPr/>
+          <p:nvPr/>
+        </p:nvSpPr>
+        <p:spPr>
+          <a:xfrm>
+            <a:off x="7635240" y="2331720"/>
+            <a:ext cx="182880" cy="182880"/>
+          </a:xfrm>
+          <a:prstGeom prst="rect">
+            <a:avLst/>
+          </a:prstGeom>
+          <a:noFill/>
+          <a:ln/>
+        </p:spPr>
+        <p:txBody>
+          <a:bodyPr wrap="square" lIns="0" tIns="0" rIns="0" bIns="0" rtlCol="0" anchor="ctr"/>
+          <a:lstStyle/>
+          <a:p>
+            <a:pPr algn="ctr" indent="0" marL="0">
+              <a:buNone/>
+            </a:pPr>
+            <a:r>
+              <a:rPr lang="en-US" sz="700" b="1" dirty="0">
+                <a:solidFill>
+                  <a:srgbClr val="FFFFFF"/>
+                </a:solidFill>
+                <a:latin typeface="Arial" pitchFamily="34" charset="0"/>
+                <a:ea typeface="Arial" pitchFamily="34" charset="-122"/>
+                <a:cs typeface="Arial" pitchFamily="34" charset="-120"/>
+              </a:rPr>
+              <a:t>6</a:t>
+            </a:r>
+            <a:endParaRPr lang="en-US" sz="700" dirty="0"/>
+          </a:p>
+        </p:txBody>
+      </p:sp>
+      <p:sp>
+        <p:nvSpPr>
+          <p:cNvPr id="55" name="Text 53"/>
+          <p:cNvSpPr/>
+          <p:nvPr/>
+        </p:nvSpPr>
+        <p:spPr>
+          <a:xfrm>
+            <a:off x="7717536" y="2395728"/>
+            <a:ext cx="1296619" cy="749808"/>
+          </a:xfrm>
+          <a:prstGeom prst="rect">
+            <a:avLst/>
+          </a:prstGeom>
+          <a:noFill/>
+          <a:ln/>
+        </p:spPr>
+        <p:txBody>
+          <a:bodyPr wrap="square" lIns="381" tIns="762" rIns="762" bIns="381" rtlCol="0" anchor="ctr"/>
+          <a:lstStyle/>
+          <a:p>
+            <a:pPr algn="ctr" indent="0" marL="0">
+              <a:lnSpc>
+                <a:spcPct val="92000"/>
+              </a:lnSpc>
+              <a:spcAft>
+                <a:spcPts val="300"/>
+              </a:spcAft>
+              <a:buNone/>
+            </a:pPr>
+            <a:r>
+              <a:rPr lang="en-US" sz="740" b="1" dirty="0">
+                <a:solidFill>
+                  <a:srgbClr val="081F5C"/>
+                </a:solidFill>
+                <a:latin typeface="Arial" pitchFamily="34" charset="0"/>
+                <a:ea typeface="Arial" pitchFamily="34" charset="-122"/>
+                <a:cs typeface="Arial" pitchFamily="34" charset="-120"/>
+              </a:rPr>
+              <a:t>Code Optimization Agent</a:t>
+            </a:r>
+            <a:endParaRPr lang="en-US" sz="740" dirty="0"/>
+          </a:p>
+          <a:p>
+            <a:pPr algn="ctr" indent="0" marL="0">
+              <a:lnSpc>
+                <a:spcPct val="92000"/>
+              </a:lnSpc>
+              <a:buNone/>
+            </a:pPr>
+            <a:r>
+              <a:rPr lang="en-US" sz="620" i="1" dirty="0">
+                <a:solidFill>
+                  <a:srgbClr val="2E4A85"/>
+                </a:solidFill>
+                <a:latin typeface="Arial" pitchFamily="34" charset="0"/>
+                <a:ea typeface="Arial" pitchFamily="34" charset="-122"/>
+                <a:cs typeface="Arial" pitchFamily="34" charset="-120"/>
+              </a:rPr>
+              <a:t>post-migration query tuning</a:t>
+            </a:r>
+            <a:endParaRPr lang="en-US" sz="740" dirty="0"/>
+          </a:p>
+        </p:txBody>
+      </p:sp>
+      <p:sp>
+        <p:nvSpPr>
+          <p:cNvPr id="56" name="Shape 54"/>
+          <p:cNvSpPr/>
+          <p:nvPr/>
+        </p:nvSpPr>
+        <p:spPr>
+          <a:xfrm>
+            <a:off x="8365846" y="3145536"/>
+            <a:ext cx="0" cy="164592"/>
+          </a:xfrm>
+          <a:prstGeom prst="line">
+            <a:avLst/>
+          </a:prstGeom>
+          <a:noFill/>
+          <a:ln w="12700">
+            <a:solidFill>
+              <a:srgbClr val="3E6DA8"/>
+            </a:solidFill>
+            <a:prstDash val="dash"/>
+          </a:ln>
+        </p:spPr>
+      </p:sp>
+      <p:sp>
+        <p:nvSpPr>
+          <p:cNvPr id="57" name="Shape 55"/>
+          <p:cNvSpPr/>
+          <p:nvPr/>
+        </p:nvSpPr>
+        <p:spPr>
+          <a:xfrm>
+            <a:off x="548640" y="3310128"/>
+            <a:ext cx="8412480" cy="384048"/>
+          </a:xfrm>
+          <a:prstGeom prst="roundRect">
+            <a:avLst>
+              <a:gd name="adj" fmla="val 23810"/>
+            </a:avLst>
+          </a:prstGeom>
+          <a:solidFill>
+            <a:srgbClr val="CEF8FC"/>
+          </a:solidFill>
+          <a:ln w="12700">
+            <a:solidFill>
+              <a:srgbClr val="3E6DA8"/>
+            </a:solidFill>
+            <a:prstDash val="solid"/>
+          </a:ln>
+        </p:spPr>
+      </p:sp>
+      <p:sp>
+        <p:nvSpPr>
+          <p:cNvPr id="58" name="Text 56"/>
+          <p:cNvSpPr/>
+          <p:nvPr/>
+        </p:nvSpPr>
+        <p:spPr>
+          <a:xfrm>
+            <a:off x="548640" y="3310128"/>
+            <a:ext cx="8412480" cy="384048"/>
+          </a:xfrm>
+          <a:prstGeom prst="rect">
+            <a:avLst/>
+          </a:prstGeom>
+          <a:noFill/>
+          <a:ln/>
+        </p:spPr>
+        <p:txBody>
+          <a:bodyPr wrap="square" lIns="254" tIns="1270" rIns="1270" bIns="254" rtlCol="0" anchor="ctr"/>
+          <a:lstStyle/>
+          <a:p>
+            <a:pPr algn="ctr" indent="0" marL="0">
+              <a:lnSpc>
+                <a:spcPct val="94000"/>
+              </a:lnSpc>
+              <a:buNone/>
+            </a:pPr>
+            <a:r>
+              <a:rPr lang="en-US" sz="850" b="1" dirty="0">
+                <a:solidFill>
+                  <a:srgbClr val="081F5C"/>
+                </a:solidFill>
+                <a:latin typeface="Arial" pitchFamily="34" charset="0"/>
+                <a:ea typeface="Arial" pitchFamily="34" charset="-122"/>
+                <a:cs typeface="Arial" pitchFamily="34" charset="-120"/>
+              </a:rPr>
+              <a:t>Data Assist  </a:t>
+            </a:r>
+            <a:pPr algn="ctr" indent="0" marL="0">
+              <a:lnSpc>
+                <a:spcPct val="94000"/>
+              </a:lnSpc>
+              <a:buNone/>
+            </a:pPr>
+            <a:r>
+              <a:rPr lang="en-US" sz="700" i="1" dirty="0">
+                <a:solidFill>
+                  <a:srgbClr val="1A1A1A"/>
+                </a:solidFill>
+                <a:latin typeface="Arial" pitchFamily="34" charset="0"/>
+                <a:ea typeface="Arial" pitchFamily="34" charset="-122"/>
+                <a:cs typeface="Arial" pitchFamily="34" charset="-120"/>
+              </a:rPr>
+              <a:t>DRECT · Report Rationalizer · ★ Platform Fit Scorer · ★ Schema Mapper · Deloitte Code Converter · Data Migration Agent · Report Automator · Epic Oracle-to-SQL Transpiler · ★ AI/BI Dashboard Generator · CATE Test Engine · Automated Report Tester · Code Optimizer</a:t>
+            </a:r>
+            <a:endParaRPr lang="en-US" sz="850" dirty="0"/>
+          </a:p>
+        </p:txBody>
+      </p:sp>
+      <p:sp>
+        <p:nvSpPr>
+          <p:cNvPr id="59" name="Shape 57"/>
+          <p:cNvSpPr/>
+          <p:nvPr/>
+        </p:nvSpPr>
+        <p:spPr>
+          <a:xfrm>
+            <a:off x="2557577" y="3694176"/>
+            <a:ext cx="0" cy="182880"/>
+          </a:xfrm>
+          <a:prstGeom prst="line">
+            <a:avLst/>
+          </a:prstGeom>
+          <a:noFill/>
+          <a:ln w="12700">
+            <a:solidFill>
+              <a:srgbClr val="3E6DA8"/>
+            </a:solidFill>
+            <a:prstDash val="dash"/>
+          </a:ln>
+        </p:spPr>
+      </p:sp>
+      <p:sp>
+        <p:nvSpPr>
+          <p:cNvPr id="60" name="Text 58"/>
+          <p:cNvSpPr/>
+          <p:nvPr/>
+        </p:nvSpPr>
+        <p:spPr>
+          <a:xfrm>
+            <a:off x="1862633" y="3877056"/>
+            <a:ext cx="1389888" cy="566928"/>
+          </a:xfrm>
+          <a:prstGeom prst="rect">
+            <a:avLst/>
+          </a:prstGeom>
+          <a:noFill/>
+          <a:ln/>
+        </p:spPr>
+        <p:txBody>
+          <a:bodyPr wrap="square" lIns="0" tIns="0" rIns="0" bIns="0" rtlCol="0" anchor="t"/>
+          <a:lstStyle/>
+          <a:p>
+            <a:pPr algn="ctr" indent="0" marL="0">
+              <a:lnSpc>
+                <a:spcPct val="93000"/>
+              </a:lnSpc>
+              <a:buNone/>
+            </a:pPr>
+            <a:r>
+              <a:rPr lang="en-US" sz="680" dirty="0">
+                <a:solidFill>
+                  <a:srgbClr val="1A1A1A"/>
+                </a:solidFill>
+                <a:latin typeface="Arial" pitchFamily="34" charset="0"/>
+                <a:ea typeface="Arial" pitchFamily="34" charset="-122"/>
+                <a:cs typeface="Arial" pitchFamily="34" charset="-120"/>
+              </a:rPr>
+              <a:t>Classify every Oracle object the surviving reports read and map it to its MS SQL Server or Delta target.</a:t>
+            </a:r>
+            <a:endParaRPr lang="en-US" sz="680" dirty="0"/>
+          </a:p>
+        </p:txBody>
+      </p:sp>
+      <p:sp>
+        <p:nvSpPr>
+          <p:cNvPr id="61" name="Shape 59"/>
+          <p:cNvSpPr/>
+          <p:nvPr/>
+        </p:nvSpPr>
+        <p:spPr>
+          <a:xfrm>
+            <a:off x="4009644" y="3694176"/>
+            <a:ext cx="0" cy="182880"/>
+          </a:xfrm>
+          <a:prstGeom prst="line">
+            <a:avLst/>
+          </a:prstGeom>
+          <a:noFill/>
+          <a:ln w="12700">
+            <a:solidFill>
+              <a:srgbClr val="3E6DA8"/>
+            </a:solidFill>
+            <a:prstDash val="dash"/>
+          </a:ln>
+        </p:spPr>
+      </p:sp>
+      <p:sp>
+        <p:nvSpPr>
+          <p:cNvPr id="62" name="Text 60"/>
+          <p:cNvSpPr/>
+          <p:nvPr/>
+        </p:nvSpPr>
+        <p:spPr>
+          <a:xfrm>
+            <a:off x="3314700" y="3877056"/>
+            <a:ext cx="1389888" cy="566928"/>
+          </a:xfrm>
+          <a:prstGeom prst="rect">
+            <a:avLst/>
+          </a:prstGeom>
+          <a:noFill/>
+          <a:ln/>
+        </p:spPr>
+        <p:txBody>
+          <a:bodyPr wrap="square" lIns="0" tIns="0" rIns="0" bIns="0" rtlCol="0" anchor="t"/>
+          <a:lstStyle/>
+          <a:p>
+            <a:pPr algn="ctr" indent="0" marL="0">
+              <a:lnSpc>
+                <a:spcPct val="93000"/>
+              </a:lnSpc>
+              <a:buNone/>
+            </a:pPr>
+            <a:r>
+              <a:rPr lang="en-US" sz="680" dirty="0">
+                <a:solidFill>
+                  <a:srgbClr val="1A1A1A"/>
+                </a:solidFill>
+                <a:latin typeface="Arial" pitchFamily="34" charset="0"/>
+                <a:ea typeface="Arial" pitchFamily="34" charset="-122"/>
+                <a:cs typeface="Arial" pitchFamily="34" charset="-120"/>
+              </a:rPr>
+              <a:t>Convert table and view DDL, materialized views, packages and stored procedures, then move history and incremental data.</a:t>
+            </a:r>
+            <a:endParaRPr lang="en-US" sz="680" dirty="0"/>
+          </a:p>
+        </p:txBody>
+      </p:sp>
+      <p:sp>
+        <p:nvSpPr>
+          <p:cNvPr id="63" name="Shape 61"/>
+          <p:cNvSpPr/>
+          <p:nvPr/>
+        </p:nvSpPr>
+        <p:spPr>
+          <a:xfrm>
+            <a:off x="5461711" y="3694176"/>
+            <a:ext cx="0" cy="182880"/>
+          </a:xfrm>
+          <a:prstGeom prst="line">
+            <a:avLst/>
+          </a:prstGeom>
+          <a:noFill/>
+          <a:ln w="12700">
+            <a:solidFill>
+              <a:srgbClr val="3E6DA8"/>
+            </a:solidFill>
+            <a:prstDash val="dash"/>
+          </a:ln>
+        </p:spPr>
+      </p:sp>
+      <p:sp>
+        <p:nvSpPr>
+          <p:cNvPr id="64" name="Text 62"/>
+          <p:cNvSpPr/>
+          <p:nvPr/>
+        </p:nvSpPr>
+        <p:spPr>
+          <a:xfrm>
+            <a:off x="4766767" y="3877056"/>
+            <a:ext cx="1389888" cy="566928"/>
+          </a:xfrm>
+          <a:prstGeom prst="rect">
+            <a:avLst/>
+          </a:prstGeom>
+          <a:noFill/>
+          <a:ln/>
+        </p:spPr>
+        <p:txBody>
+          <a:bodyPr wrap="square" lIns="0" tIns="0" rIns="0" bIns="0" rtlCol="0" anchor="t"/>
+          <a:lstStyle/>
+          <a:p>
+            <a:pPr algn="ctr" indent="0" marL="0">
+              <a:lnSpc>
+                <a:spcPct val="93000"/>
+              </a:lnSpc>
+              <a:buNone/>
+            </a:pPr>
+            <a:r>
+              <a:rPr lang="en-US" sz="680" dirty="0">
+                <a:solidFill>
+                  <a:srgbClr val="1A1A1A"/>
+                </a:solidFill>
+                <a:latin typeface="Arial" pitchFamily="34" charset="0"/>
+                <a:ea typeface="Arial" pitchFamily="34" charset="-122"/>
+                <a:cs typeface="Arial" pitchFamily="34" charset="-120"/>
+              </a:rPr>
+              <a:t>Rebuild each report on the platform its disposition assigned — Power BI, Cogito, or Databricks AI/BI with a scoped Genie space.</a:t>
+            </a:r>
+            <a:endParaRPr lang="en-US" sz="680" dirty="0"/>
+          </a:p>
+        </p:txBody>
+      </p:sp>
+      <p:sp>
+        <p:nvSpPr>
+          <p:cNvPr id="65" name="Shape 63"/>
+          <p:cNvSpPr/>
+          <p:nvPr/>
+        </p:nvSpPr>
+        <p:spPr>
+          <a:xfrm>
+            <a:off x="6913778" y="3694176"/>
+            <a:ext cx="0" cy="182880"/>
+          </a:xfrm>
+          <a:prstGeom prst="line">
+            <a:avLst/>
+          </a:prstGeom>
+          <a:noFill/>
+          <a:ln w="12700">
+            <a:solidFill>
+              <a:srgbClr val="3E6DA8"/>
+            </a:solidFill>
+            <a:prstDash val="dash"/>
+          </a:ln>
+        </p:spPr>
+      </p:sp>
+      <p:sp>
+        <p:nvSpPr>
+          <p:cNvPr id="66" name="Text 64"/>
+          <p:cNvSpPr/>
+          <p:nvPr/>
+        </p:nvSpPr>
+        <p:spPr>
+          <a:xfrm>
+            <a:off x="6218834" y="3877056"/>
+            <a:ext cx="1389888" cy="566928"/>
+          </a:xfrm>
+          <a:prstGeom prst="rect">
+            <a:avLst/>
+          </a:prstGeom>
+          <a:noFill/>
+          <a:ln/>
+        </p:spPr>
+        <p:txBody>
+          <a:bodyPr wrap="square" lIns="0" tIns="0" rIns="0" bIns="0" rtlCol="0" anchor="t"/>
+          <a:lstStyle/>
+          <a:p>
+            <a:pPr algn="ctr" indent="0" marL="0">
+              <a:lnSpc>
+                <a:spcPct val="93000"/>
+              </a:lnSpc>
+              <a:buNone/>
+            </a:pPr>
+            <a:r>
+              <a:rPr lang="en-US" sz="680" dirty="0">
+                <a:solidFill>
+                  <a:srgbClr val="1A1A1A"/>
+                </a:solidFill>
+                <a:latin typeface="Arial" pitchFamily="34" charset="0"/>
+                <a:ea typeface="Arial" pitchFamily="34" charset="-122"/>
+                <a:cs typeface="Arial" pitchFamily="34" charset="-120"/>
+              </a:rPr>
+              <a:t>Reconcile migrated objects for row count, checksums and keys, then validate rebuilt reports against the BOBJ baseline.</a:t>
+            </a:r>
+            <a:endParaRPr lang="en-US" sz="680" dirty="0"/>
+          </a:p>
+        </p:txBody>
+      </p:sp>
+      <p:sp>
+        <p:nvSpPr>
+          <p:cNvPr id="67" name="Text 65"/>
+          <p:cNvSpPr/>
+          <p:nvPr/>
+        </p:nvSpPr>
+        <p:spPr>
+          <a:xfrm>
+            <a:off x="384048" y="4572000"/>
+            <a:ext cx="8686800" cy="164592"/>
+          </a:xfrm>
+          <a:prstGeom prst="rect">
+            <a:avLst/>
+          </a:prstGeom>
+          <a:noFill/>
+          <a:ln/>
+        </p:spPr>
+        <p:txBody>
+          <a:bodyPr wrap="square" lIns="0" tIns="0" rIns="0" bIns="0" rtlCol="0" anchor="ctr"/>
+          <a:lstStyle/>
+          <a:p>
+            <a:pPr indent="0" marL="0">
+              <a:buNone/>
+            </a:pPr>
+            <a:r>
+              <a:rPr lang="en-US" sz="800" b="1" dirty="0">
+                <a:solidFill>
+                  <a:srgbClr val="081F5C"/>
+                </a:solidFill>
+                <a:latin typeface="Arial" pitchFamily="34" charset="0"/>
+                <a:ea typeface="Arial" pitchFamily="34" charset="-122"/>
+                <a:cs typeface="Arial" pitchFamily="34" charset="-120"/>
+              </a:rPr>
+              <a:t>Lifecycle coverage in this view</a:t>
+            </a:r>
+            <a:endParaRPr lang="en-US" sz="800" dirty="0"/>
+          </a:p>
+        </p:txBody>
+      </p:sp>
+      <p:sp>
+        <p:nvSpPr>
+          <p:cNvPr id="68" name="Shape 66"/>
+          <p:cNvSpPr/>
+          <p:nvPr/>
+        </p:nvSpPr>
+        <p:spPr>
+          <a:xfrm>
+            <a:off x="384048" y="4773168"/>
+            <a:ext cx="1341120" cy="274320"/>
+          </a:xfrm>
+          <a:prstGeom prst="rect">
+            <a:avLst/>
+          </a:prstGeom>
+          <a:solidFill>
+            <a:srgbClr val="081F5C"/>
+          </a:solidFill>
+          <a:ln w="9525">
+            <a:solidFill>
+              <a:srgbClr val="081F5C"/>
+            </a:solidFill>
+            <a:prstDash val="solid"/>
+          </a:ln>
+        </p:spPr>
+      </p:sp>
+      <p:sp>
+        <p:nvSpPr>
+          <p:cNvPr id="69" name="Text 67"/>
+          <p:cNvSpPr/>
+          <p:nvPr/>
+        </p:nvSpPr>
+        <p:spPr>
+          <a:xfrm>
+            <a:off x="384048" y="4773168"/>
+            <a:ext cx="1341120" cy="274320"/>
+          </a:xfrm>
+          <a:prstGeom prst="rect">
+            <a:avLst/>
+          </a:prstGeom>
+          <a:noFill/>
+          <a:ln/>
+        </p:spPr>
+        <p:txBody>
+          <a:bodyPr wrap="square" lIns="0" tIns="0" rIns="0" bIns="0" rtlCol="0" anchor="ctr"/>
+          <a:lstStyle/>
+          <a:p>
+            <a:pPr algn="ctr" indent="0" marL="0">
+              <a:buNone/>
+            </a:pPr>
+            <a:r>
+              <a:rPr lang="en-US" sz="800" b="1" spc="40" kern="0" dirty="0">
+                <a:solidFill>
+                  <a:srgbClr val="FFFFFF"/>
+                </a:solidFill>
+                <a:latin typeface="Arial" pitchFamily="34" charset="0"/>
+                <a:ea typeface="Arial" pitchFamily="34" charset="-122"/>
+                <a:cs typeface="Arial" pitchFamily="34" charset="-120"/>
+              </a:rPr>
+              <a:t>ASSESS</a:t>
+            </a:r>
+            <a:endParaRPr lang="en-US" sz="800" dirty="0"/>
+          </a:p>
+        </p:txBody>
+      </p:sp>
+      <p:sp>
+        <p:nvSpPr>
+          <p:cNvPr id="70" name="Text 68"/>
+          <p:cNvSpPr/>
+          <p:nvPr/>
+        </p:nvSpPr>
+        <p:spPr>
+          <a:xfrm>
+            <a:off x="384048" y="5074920"/>
+            <a:ext cx="1341120" cy="237744"/>
+          </a:xfrm>
+          <a:prstGeom prst="rect">
+            <a:avLst/>
+          </a:prstGeom>
+          <a:noFill/>
+          <a:ln/>
+        </p:spPr>
+        <p:txBody>
+          <a:bodyPr wrap="square" lIns="0" tIns="0" rIns="0" bIns="0" rtlCol="0" anchor="t"/>
+          <a:lstStyle/>
+          <a:p>
+            <a:pPr algn="ctr" indent="0" marL="0">
+              <a:lnSpc>
+                <a:spcPct val="92000"/>
+              </a:lnSpc>
+              <a:buNone/>
+            </a:pPr>
+            <a:r>
+              <a:rPr lang="en-US" sz="650" i="1" dirty="0">
+                <a:solidFill>
+                  <a:srgbClr val="2E4A85"/>
+                </a:solidFill>
+                <a:latin typeface="Arial" pitchFamily="34" charset="0"/>
+                <a:ea typeface="Arial" pitchFamily="34" charset="-122"/>
+                <a:cs typeface="Arial" pitchFamily="34" charset="-120"/>
+              </a:rPr>
+              <a:t>Rationalization &amp; Disposition</a:t>
+            </a:r>
+            <a:endParaRPr lang="en-US" sz="650" dirty="0"/>
+          </a:p>
+        </p:txBody>
+      </p:sp>
+      <p:sp>
+        <p:nvSpPr>
+          <p:cNvPr id="71" name="Shape 69"/>
+          <p:cNvSpPr/>
+          <p:nvPr/>
+        </p:nvSpPr>
+        <p:spPr>
+          <a:xfrm>
+            <a:off x="1853184" y="4773168"/>
+            <a:ext cx="1341120" cy="274320"/>
+          </a:xfrm>
+          <a:prstGeom prst="rect">
+            <a:avLst/>
+          </a:prstGeom>
+          <a:solidFill>
+            <a:srgbClr val="081F5C"/>
+          </a:solidFill>
+          <a:ln w="9525">
+            <a:solidFill>
+              <a:srgbClr val="081F5C"/>
+            </a:solidFill>
+            <a:prstDash val="solid"/>
+          </a:ln>
+        </p:spPr>
+      </p:sp>
+      <p:sp>
+        <p:nvSpPr>
+          <p:cNvPr id="72" name="Text 70"/>
+          <p:cNvSpPr/>
+          <p:nvPr/>
+        </p:nvSpPr>
+        <p:spPr>
+          <a:xfrm>
+            <a:off x="1853184" y="4773168"/>
+            <a:ext cx="1341120" cy="274320"/>
+          </a:xfrm>
+          <a:prstGeom prst="rect">
+            <a:avLst/>
+          </a:prstGeom>
+          <a:noFill/>
+          <a:ln/>
+        </p:spPr>
+        <p:txBody>
+          <a:bodyPr wrap="square" lIns="0" tIns="0" rIns="0" bIns="0" rtlCol="0" anchor="ctr"/>
+          <a:lstStyle/>
+          <a:p>
+            <a:pPr algn="ctr" indent="0" marL="0">
+              <a:buNone/>
+            </a:pPr>
+            <a:r>
+              <a:rPr lang="en-US" sz="800" b="1" spc="40" kern="0" dirty="0">
+                <a:solidFill>
+                  <a:srgbClr val="FFFFFF"/>
+                </a:solidFill>
+                <a:latin typeface="Arial" pitchFamily="34" charset="0"/>
+                <a:ea typeface="Arial" pitchFamily="34" charset="-122"/>
+                <a:cs typeface="Arial" pitchFamily="34" charset="-120"/>
+              </a:rPr>
+              <a:t>DESIGN</a:t>
+            </a:r>
+            <a:endParaRPr lang="en-US" sz="800" dirty="0"/>
+          </a:p>
+        </p:txBody>
+      </p:sp>
+      <p:sp>
+        <p:nvSpPr>
+          <p:cNvPr id="73" name="Text 71"/>
+          <p:cNvSpPr/>
+          <p:nvPr/>
+        </p:nvSpPr>
+        <p:spPr>
+          <a:xfrm>
+            <a:off x="1853184" y="5074920"/>
+            <a:ext cx="1341120" cy="237744"/>
+          </a:xfrm>
+          <a:prstGeom prst="rect">
+            <a:avLst/>
+          </a:prstGeom>
+          <a:noFill/>
+          <a:ln/>
+        </p:spPr>
+        <p:txBody>
+          <a:bodyPr wrap="square" lIns="0" tIns="0" rIns="0" bIns="0" rtlCol="0" anchor="t"/>
+          <a:lstStyle/>
+          <a:p>
+            <a:pPr algn="ctr" indent="0" marL="0">
+              <a:lnSpc>
+                <a:spcPct val="92000"/>
+              </a:lnSpc>
+              <a:buNone/>
+            </a:pPr>
+            <a:r>
+              <a:rPr lang="en-US" sz="650" i="1" dirty="0">
+                <a:solidFill>
+                  <a:srgbClr val="2E4A85"/>
+                </a:solidFill>
+                <a:latin typeface="Arial" pitchFamily="34" charset="0"/>
+                <a:ea typeface="Arial" pitchFamily="34" charset="-122"/>
+                <a:cs typeface="Arial" pitchFamily="34" charset="-120"/>
+              </a:rPr>
+              <a:t>Schema Mapper · Fit Scorer</a:t>
+            </a:r>
+            <a:endParaRPr lang="en-US" sz="650" dirty="0"/>
+          </a:p>
+        </p:txBody>
+      </p:sp>
+      <p:sp>
+        <p:nvSpPr>
+          <p:cNvPr id="74" name="Shape 72"/>
+          <p:cNvSpPr/>
+          <p:nvPr/>
+        </p:nvSpPr>
+        <p:spPr>
+          <a:xfrm>
+            <a:off x="3322320" y="4773168"/>
+            <a:ext cx="1341120" cy="274320"/>
+          </a:xfrm>
+          <a:prstGeom prst="rect">
+            <a:avLst/>
+          </a:prstGeom>
+          <a:solidFill>
+            <a:srgbClr val="081F5C"/>
+          </a:solidFill>
+          <a:ln w="9525">
+            <a:solidFill>
+              <a:srgbClr val="081F5C"/>
+            </a:solidFill>
+            <a:prstDash val="solid"/>
+          </a:ln>
+        </p:spPr>
+      </p:sp>
+      <p:sp>
+        <p:nvSpPr>
+          <p:cNvPr id="75" name="Text 73"/>
+          <p:cNvSpPr/>
+          <p:nvPr/>
+        </p:nvSpPr>
+        <p:spPr>
+          <a:xfrm>
+            <a:off x="3322320" y="4773168"/>
+            <a:ext cx="1341120" cy="274320"/>
+          </a:xfrm>
+          <a:prstGeom prst="rect">
+            <a:avLst/>
+          </a:prstGeom>
+          <a:noFill/>
+          <a:ln/>
+        </p:spPr>
+        <p:txBody>
+          <a:bodyPr wrap="square" lIns="0" tIns="0" rIns="0" bIns="0" rtlCol="0" anchor="ctr"/>
+          <a:lstStyle/>
+          <a:p>
+            <a:pPr algn="ctr" indent="0" marL="0">
+              <a:buNone/>
+            </a:pPr>
+            <a:r>
+              <a:rPr lang="en-US" sz="800" b="1" spc="40" kern="0" dirty="0">
+                <a:solidFill>
+                  <a:srgbClr val="FFFFFF"/>
+                </a:solidFill>
+                <a:latin typeface="Arial" pitchFamily="34" charset="0"/>
+                <a:ea typeface="Arial" pitchFamily="34" charset="-122"/>
+                <a:cs typeface="Arial" pitchFamily="34" charset="-120"/>
+              </a:rPr>
+              <a:t>BUILD</a:t>
+            </a:r>
+            <a:endParaRPr lang="en-US" sz="800" dirty="0"/>
+          </a:p>
+        </p:txBody>
+      </p:sp>
+      <p:sp>
+        <p:nvSpPr>
+          <p:cNvPr id="76" name="Text 74"/>
+          <p:cNvSpPr/>
+          <p:nvPr/>
+        </p:nvSpPr>
+        <p:spPr>
+          <a:xfrm>
+            <a:off x="3322320" y="5074920"/>
+            <a:ext cx="1341120" cy="237744"/>
+          </a:xfrm>
+          <a:prstGeom prst="rect">
+            <a:avLst/>
+          </a:prstGeom>
+          <a:noFill/>
+          <a:ln/>
+        </p:spPr>
+        <p:txBody>
+          <a:bodyPr wrap="square" lIns="0" tIns="0" rIns="0" bIns="0" rtlCol="0" anchor="t"/>
+          <a:lstStyle/>
+          <a:p>
+            <a:pPr algn="ctr" indent="0" marL="0">
+              <a:lnSpc>
+                <a:spcPct val="92000"/>
+              </a:lnSpc>
+              <a:buNone/>
+            </a:pPr>
+            <a:r>
+              <a:rPr lang="en-US" sz="650" i="1" dirty="0">
+                <a:solidFill>
+                  <a:srgbClr val="2E4A85"/>
+                </a:solidFill>
+                <a:latin typeface="Arial" pitchFamily="34" charset="0"/>
+                <a:ea typeface="Arial" pitchFamily="34" charset="-122"/>
+                <a:cs typeface="Arial" pitchFamily="34" charset="-120"/>
+              </a:rPr>
+              <a:t>Converters · Migration Agents</a:t>
+            </a:r>
+            <a:endParaRPr lang="en-US" sz="650" dirty="0"/>
+          </a:p>
+        </p:txBody>
+      </p:sp>
+      <p:sp>
+        <p:nvSpPr>
+          <p:cNvPr id="77" name="Shape 75"/>
+          <p:cNvSpPr/>
+          <p:nvPr/>
+        </p:nvSpPr>
+        <p:spPr>
+          <a:xfrm>
+            <a:off x="4791456" y="4773168"/>
+            <a:ext cx="1341120" cy="274320"/>
+          </a:xfrm>
+          <a:prstGeom prst="rect">
+            <a:avLst/>
+          </a:prstGeom>
+          <a:solidFill>
+            <a:srgbClr val="E8E8E8"/>
+          </a:solidFill>
+          <a:ln w="9525">
+            <a:solidFill>
+              <a:srgbClr val="9A9A9A"/>
+            </a:solidFill>
+            <a:prstDash val="solid"/>
+          </a:ln>
+        </p:spPr>
+      </p:sp>
+      <p:sp>
+        <p:nvSpPr>
+          <p:cNvPr id="78" name="Text 76"/>
+          <p:cNvSpPr/>
+          <p:nvPr/>
+        </p:nvSpPr>
+        <p:spPr>
+          <a:xfrm>
+            <a:off x="4791456" y="4773168"/>
+            <a:ext cx="1341120" cy="274320"/>
+          </a:xfrm>
+          <a:prstGeom prst="rect">
+            <a:avLst/>
+          </a:prstGeom>
+          <a:noFill/>
+          <a:ln/>
+        </p:spPr>
+        <p:txBody>
+          <a:bodyPr wrap="square" lIns="0" tIns="0" rIns="0" bIns="0" rtlCol="0" anchor="ctr"/>
+          <a:lstStyle/>
+          <a:p>
+            <a:pPr algn="ctr" indent="0" marL="0">
+              <a:buNone/>
+            </a:pPr>
+            <a:r>
+              <a:rPr lang="en-US" sz="800" b="1" spc="40" kern="0" dirty="0">
+                <a:solidFill>
+                  <a:srgbClr val="9A9A9A"/>
+                </a:solidFill>
+                <a:latin typeface="Arial" pitchFamily="34" charset="0"/>
+                <a:ea typeface="Arial" pitchFamily="34" charset="-122"/>
+                <a:cs typeface="Arial" pitchFamily="34" charset="-120"/>
+              </a:rPr>
+              <a:t>SECURE</a:t>
+            </a:r>
+            <a:endParaRPr lang="en-US" sz="800" dirty="0"/>
+          </a:p>
+        </p:txBody>
+      </p:sp>
+      <p:sp>
+        <p:nvSpPr>
+          <p:cNvPr id="79" name="Text 77"/>
+          <p:cNvSpPr/>
+          <p:nvPr/>
+        </p:nvSpPr>
+        <p:spPr>
+          <a:xfrm>
+            <a:off x="4791456" y="5074920"/>
+            <a:ext cx="1341120" cy="237744"/>
+          </a:xfrm>
+          <a:prstGeom prst="rect">
+            <a:avLst/>
+          </a:prstGeom>
+          <a:noFill/>
+          <a:ln/>
+        </p:spPr>
+        <p:txBody>
+          <a:bodyPr wrap="square" lIns="0" tIns="0" rIns="0" bIns="0" rtlCol="0" anchor="t"/>
+          <a:lstStyle/>
+          <a:p>
+            <a:pPr algn="ctr" indent="0" marL="0">
+              <a:lnSpc>
+                <a:spcPct val="92000"/>
+              </a:lnSpc>
+              <a:buNone/>
+            </a:pPr>
+            <a:r>
+              <a:rPr lang="en-US" sz="650" i="1" dirty="0">
+                <a:solidFill>
+                  <a:srgbClr val="9A9A9A"/>
+                </a:solidFill>
+                <a:latin typeface="Arial" pitchFamily="34" charset="0"/>
+                <a:ea typeface="Arial" pitchFamily="34" charset="-122"/>
+                <a:cs typeface="Arial" pitchFamily="34" charset="-120"/>
+              </a:rPr>
+              <a:t>out of scope — manual</a:t>
+            </a:r>
+            <a:endParaRPr lang="en-US" sz="650" dirty="0"/>
+          </a:p>
+        </p:txBody>
+      </p:sp>
+      <p:sp>
+        <p:nvSpPr>
+          <p:cNvPr id="80" name="Shape 78"/>
+          <p:cNvSpPr/>
+          <p:nvPr/>
+        </p:nvSpPr>
+        <p:spPr>
+          <a:xfrm>
+            <a:off x="6260592" y="4773168"/>
+            <a:ext cx="1341120" cy="274320"/>
+          </a:xfrm>
+          <a:prstGeom prst="rect">
+            <a:avLst/>
+          </a:prstGeom>
+          <a:solidFill>
+            <a:srgbClr val="081F5C"/>
+          </a:solidFill>
+          <a:ln w="9525">
+            <a:solidFill>
+              <a:srgbClr val="081F5C"/>
+            </a:solidFill>
+            <a:prstDash val="solid"/>
+          </a:ln>
+        </p:spPr>
+      </p:sp>
+      <p:sp>
+        <p:nvSpPr>
+          <p:cNvPr id="81" name="Text 79"/>
+          <p:cNvSpPr/>
+          <p:nvPr/>
+        </p:nvSpPr>
+        <p:spPr>
+          <a:xfrm>
+            <a:off x="6260592" y="4773168"/>
+            <a:ext cx="1341120" cy="274320"/>
+          </a:xfrm>
+          <a:prstGeom prst="rect">
+            <a:avLst/>
+          </a:prstGeom>
+          <a:noFill/>
+          <a:ln/>
+        </p:spPr>
+        <p:txBody>
+          <a:bodyPr wrap="square" lIns="0" tIns="0" rIns="0" bIns="0" rtlCol="0" anchor="ctr"/>
+          <a:lstStyle/>
+          <a:p>
+            <a:pPr algn="ctr" indent="0" marL="0">
+              <a:buNone/>
+            </a:pPr>
+            <a:r>
+              <a:rPr lang="en-US" sz="800" b="1" spc="40" kern="0" dirty="0">
+                <a:solidFill>
+                  <a:srgbClr val="FFFFFF"/>
+                </a:solidFill>
+                <a:latin typeface="Arial" pitchFamily="34" charset="0"/>
+                <a:ea typeface="Arial" pitchFamily="34" charset="-122"/>
+                <a:cs typeface="Arial" pitchFamily="34" charset="-120"/>
+              </a:rPr>
+              <a:t>VALIDATE</a:t>
+            </a:r>
+            <a:endParaRPr lang="en-US" sz="800" dirty="0"/>
+          </a:p>
+        </p:txBody>
+      </p:sp>
+      <p:sp>
+        <p:nvSpPr>
+          <p:cNvPr id="82" name="Text 80"/>
+          <p:cNvSpPr/>
+          <p:nvPr/>
+        </p:nvSpPr>
+        <p:spPr>
+          <a:xfrm>
+            <a:off x="6260592" y="5074920"/>
+            <a:ext cx="1341120" cy="237744"/>
+          </a:xfrm>
+          <a:prstGeom prst="rect">
+            <a:avLst/>
+          </a:prstGeom>
+          <a:noFill/>
+          <a:ln/>
+        </p:spPr>
+        <p:txBody>
+          <a:bodyPr wrap="square" lIns="0" tIns="0" rIns="0" bIns="0" rtlCol="0" anchor="t"/>
+          <a:lstStyle/>
+          <a:p>
+            <a:pPr algn="ctr" indent="0" marL="0">
+              <a:lnSpc>
+                <a:spcPct val="92000"/>
+              </a:lnSpc>
+              <a:buNone/>
+            </a:pPr>
+            <a:r>
+              <a:rPr lang="en-US" sz="650" i="1" dirty="0">
+                <a:solidFill>
+                  <a:srgbClr val="2E4A85"/>
+                </a:solidFill>
+                <a:latin typeface="Arial" pitchFamily="34" charset="0"/>
+                <a:ea typeface="Arial" pitchFamily="34" charset="-122"/>
+                <a:cs typeface="Arial" pitchFamily="34" charset="-120"/>
+              </a:rPr>
+              <a:t>Testing Agents · CATE</a:t>
+            </a:r>
+            <a:endParaRPr lang="en-US" sz="650" dirty="0"/>
+          </a:p>
+        </p:txBody>
+      </p:sp>
+      <p:sp>
+        <p:nvSpPr>
+          <p:cNvPr id="83" name="Shape 81"/>
+          <p:cNvSpPr/>
+          <p:nvPr/>
+        </p:nvSpPr>
+        <p:spPr>
+          <a:xfrm>
+            <a:off x="7729728" y="4773168"/>
+            <a:ext cx="1341120" cy="274320"/>
+          </a:xfrm>
+          <a:prstGeom prst="rect">
+            <a:avLst/>
+          </a:prstGeom>
+          <a:solidFill>
+            <a:srgbClr val="E8E8E8"/>
+          </a:solidFill>
+          <a:ln w="9525">
+            <a:solidFill>
+              <a:srgbClr val="9A9A9A"/>
+            </a:solidFill>
+            <a:prstDash val="solid"/>
+          </a:ln>
+        </p:spPr>
+      </p:sp>
+      <p:sp>
+        <p:nvSpPr>
+          <p:cNvPr id="84" name="Text 82"/>
+          <p:cNvSpPr/>
+          <p:nvPr/>
+        </p:nvSpPr>
+        <p:spPr>
+          <a:xfrm>
+            <a:off x="7729728" y="4773168"/>
+            <a:ext cx="1341120" cy="274320"/>
+          </a:xfrm>
+          <a:prstGeom prst="rect">
+            <a:avLst/>
+          </a:prstGeom>
+          <a:noFill/>
+          <a:ln/>
+        </p:spPr>
+        <p:txBody>
+          <a:bodyPr wrap="square" lIns="0" tIns="0" rIns="0" bIns="0" rtlCol="0" anchor="ctr"/>
+          <a:lstStyle/>
+          <a:p>
+            <a:pPr algn="ctr" indent="0" marL="0">
+              <a:buNone/>
+            </a:pPr>
+            <a:r>
+              <a:rPr lang="en-US" sz="800" b="1" spc="40" kern="0" dirty="0">
+                <a:solidFill>
+                  <a:srgbClr val="9A9A9A"/>
+                </a:solidFill>
+                <a:latin typeface="Arial" pitchFamily="34" charset="0"/>
+                <a:ea typeface="Arial" pitchFamily="34" charset="-122"/>
+                <a:cs typeface="Arial" pitchFamily="34" charset="-120"/>
+              </a:rPr>
+              <a:t>CUT OVER</a:t>
+            </a:r>
+            <a:endParaRPr lang="en-US" sz="800" dirty="0"/>
+          </a:p>
+        </p:txBody>
+      </p:sp>
+      <p:sp>
+        <p:nvSpPr>
+          <p:cNvPr id="85" name="Text 83"/>
+          <p:cNvSpPr/>
+          <p:nvPr/>
+        </p:nvSpPr>
+        <p:spPr>
+          <a:xfrm>
+            <a:off x="7729728" y="5074920"/>
+            <a:ext cx="1341120" cy="237744"/>
+          </a:xfrm>
+          <a:prstGeom prst="rect">
+            <a:avLst/>
+          </a:prstGeom>
+          <a:noFill/>
+          <a:ln/>
+        </p:spPr>
+        <p:txBody>
+          <a:bodyPr wrap="square" lIns="0" tIns="0" rIns="0" bIns="0" rtlCol="0" anchor="t"/>
+          <a:lstStyle/>
+          <a:p>
+            <a:pPr algn="ctr" indent="0" marL="0">
+              <a:lnSpc>
+                <a:spcPct val="92000"/>
+              </a:lnSpc>
+              <a:buNone/>
+            </a:pPr>
+            <a:r>
+              <a:rPr lang="en-US" sz="650" i="1" dirty="0">
+                <a:solidFill>
+                  <a:srgbClr val="9A9A9A"/>
+                </a:solidFill>
+                <a:latin typeface="Arial" pitchFamily="34" charset="0"/>
+                <a:ea typeface="Arial" pitchFamily="34" charset="-122"/>
+                <a:cs typeface="Arial" pitchFamily="34" charset="-120"/>
+              </a:rPr>
+              <a:t>out of scope — manual</a:t>
+            </a:r>
+            <a:endParaRPr lang="en-US" sz="650" dirty="0"/>
+          </a:p>
+        </p:txBody>
+      </p:sp>
+      <p:sp>
+        <p:nvSpPr>
+          <p:cNvPr id="86" name="Shape 84"/>
+          <p:cNvSpPr/>
+          <p:nvPr/>
+        </p:nvSpPr>
+        <p:spPr>
+          <a:xfrm>
+            <a:off x="384048" y="5449824"/>
+            <a:ext cx="8686800" cy="402336"/>
+          </a:xfrm>
+          <a:prstGeom prst="rect">
+            <a:avLst/>
+          </a:prstGeom>
+          <a:solidFill>
+            <a:srgbClr val="F2F2F2"/>
+          </a:solidFill>
+          <a:ln w="9525">
+            <a:solidFill>
+              <a:srgbClr val="E2E2E2"/>
+            </a:solidFill>
+            <a:prstDash val="solid"/>
+          </a:ln>
+        </p:spPr>
+      </p:sp>
+      <p:sp>
+        <p:nvSpPr>
+          <p:cNvPr id="87" name="Text 85"/>
+          <p:cNvSpPr/>
+          <p:nvPr/>
+        </p:nvSpPr>
+        <p:spPr>
+          <a:xfrm>
+            <a:off x="384048" y="5449824"/>
+            <a:ext cx="8686800" cy="402336"/>
+          </a:xfrm>
+          <a:prstGeom prst="rect">
+            <a:avLst/>
+          </a:prstGeom>
+          <a:noFill/>
+          <a:ln/>
+        </p:spPr>
+        <p:txBody>
+          <a:bodyPr wrap="square" lIns="254" tIns="1270" rIns="1270" bIns="254" rtlCol="0" anchor="ctr"/>
+          <a:lstStyle/>
+          <a:p>
+            <a:pPr indent="0" marL="0">
+              <a:lnSpc>
+                <a:spcPct val="94000"/>
+              </a:lnSpc>
+              <a:buNone/>
+            </a:pPr>
+            <a:r>
+              <a:rPr lang="en-US" sz="700" b="1" dirty="0">
+                <a:solidFill>
+                  <a:srgbClr val="081F5C"/>
+                </a:solidFill>
+                <a:latin typeface="Arial" pitchFamily="34" charset="0"/>
+                <a:ea typeface="Arial" pitchFamily="34" charset="-122"/>
+                <a:cs typeface="Arial" pitchFamily="34" charset="-120"/>
+              </a:rPr>
+              <a:t>Scope of this view.  </a:t>
+            </a:r>
+            <a:pPr indent="0" marL="0">
+              <a:lnSpc>
+                <a:spcPct val="94000"/>
+              </a:lnSpc>
+              <a:buNone/>
+            </a:pPr>
+            <a:r>
+              <a:rPr lang="en-US" sz="700" dirty="0">
+                <a:solidFill>
+                  <a:srgbClr val="1A1A1A"/>
+                </a:solidFill>
+                <a:latin typeface="Arial" pitchFamily="34" charset="0"/>
+                <a:ea typeface="Arial" pitchFamily="34" charset="-122"/>
+                <a:cs typeface="Arial" pitchFamily="34" charset="-120"/>
+              </a:rPr>
+              <a:t>Secure and Cut over are deliberately excluded here, but they are not optional work — the earlier coverage audit found zero of six activities automated in each. Secure carries the HIPAA exposure on every path, and Cut over is the step that actually removes the BOBJ estate, so a programme that automates only the four steps above will build faster than it reduces.</a:t>
+            </a:r>
+            <a:endParaRPr lang="en-US" sz="700" dirty="0"/>
+          </a:p>
+        </p:txBody>
+      </p:sp>
+      <p:sp>
+        <p:nvSpPr>
+          <p:cNvPr id="88" name="Shape 86"/>
+          <p:cNvSpPr/>
+          <p:nvPr/>
+        </p:nvSpPr>
+        <p:spPr>
+          <a:xfrm>
+            <a:off x="384048" y="5943600"/>
+            <a:ext cx="8686800" cy="402336"/>
+          </a:xfrm>
+          <a:prstGeom prst="rect">
+            <a:avLst/>
+          </a:prstGeom>
+          <a:solidFill>
+            <a:srgbClr val="EAF5FD"/>
+          </a:solidFill>
+          <a:ln w="9525">
+            <a:solidFill>
+              <a:srgbClr val="C9E3F7"/>
+            </a:solidFill>
+            <a:prstDash val="solid"/>
+          </a:ln>
+        </p:spPr>
+      </p:sp>
+      <p:sp>
+        <p:nvSpPr>
+          <p:cNvPr id="89" name="Text 87"/>
+          <p:cNvSpPr/>
+          <p:nvPr/>
+        </p:nvSpPr>
+        <p:spPr>
+          <a:xfrm>
+            <a:off x="384048" y="5943600"/>
+            <a:ext cx="8686800" cy="402336"/>
+          </a:xfrm>
+          <a:prstGeom prst="rect">
+            <a:avLst/>
+          </a:prstGeom>
+          <a:noFill/>
+          <a:ln/>
+        </p:spPr>
+        <p:txBody>
+          <a:bodyPr wrap="square" lIns="254" tIns="1270" rIns="1270" bIns="254" rtlCol="0" anchor="ctr"/>
+          <a:lstStyle/>
+          <a:p>
+            <a:pPr indent="0" marL="0">
+              <a:lnSpc>
+                <a:spcPct val="94000"/>
+              </a:lnSpc>
+              <a:buNone/>
+            </a:pPr>
+            <a:r>
+              <a:rPr lang="en-US" sz="700" b="1" dirty="0">
+                <a:solidFill>
+                  <a:srgbClr val="081F5C"/>
+                </a:solidFill>
+                <a:latin typeface="Arial" pitchFamily="34" charset="0"/>
+                <a:ea typeface="Arial" pitchFamily="34" charset="-122"/>
+                <a:cs typeface="Arial" pitchFamily="34" charset="-120"/>
+              </a:rPr>
+              <a:t>HIPAA checkpoint.  </a:t>
+            </a:r>
+            <a:pPr indent="0" marL="0">
+              <a:lnSpc>
+                <a:spcPct val="94000"/>
+              </a:lnSpc>
+              <a:buNone/>
+            </a:pPr>
+            <a:r>
+              <a:rPr lang="en-US" sz="700" dirty="0">
+                <a:solidFill>
+                  <a:srgbClr val="1A1A1A"/>
+                </a:solidFill>
+                <a:latin typeface="Arial" pitchFamily="34" charset="0"/>
+                <a:ea typeface="Arial" pitchFamily="34" charset="-122"/>
+                <a:cs typeface="Arial" pitchFamily="34" charset="-120"/>
+              </a:rPr>
+              <a:t>Every agent runs inside the secured environment on the same PHI boundary as the pipeline — no report output, universe extract or reconciliation sample leaves it. Reconciliation samples drawn by CATE and the Automated Report Tester contain PHI and are treated as production data, not test data. Agents propose; the data owner still approves.</a:t>
+            </a:r>
+            <a:endParaRPr lang="en-US" sz="700" dirty="0"/>
+          </a:p>
+        </p:txBody>
+      </p:sp>
+      <p:sp>
+        <p:nvSpPr>
+          <p:cNvPr id="90" name="Shape 88"/>
+          <p:cNvSpPr/>
+          <p:nvPr/>
+        </p:nvSpPr>
+        <p:spPr>
+          <a:xfrm>
+            <a:off x="9326880" y="548640"/>
+            <a:ext cx="192024" cy="192024"/>
+          </a:xfrm>
+          <a:prstGeom prst="roundRect">
+            <a:avLst>
+              <a:gd name="adj" fmla="val 95238"/>
+            </a:avLst>
+          </a:prstGeom>
+          <a:solidFill>
+            <a:srgbClr val="ADDAFB"/>
+          </a:solidFill>
+          <a:ln w="6350">
+            <a:solidFill>
+              <a:srgbClr val="ADDAFB"/>
+            </a:solidFill>
+            <a:prstDash val="solid"/>
+          </a:ln>
+        </p:spPr>
+      </p:sp>
+      <p:sp>
+        <p:nvSpPr>
+          <p:cNvPr id="91" name="Text 89"/>
+          <p:cNvSpPr/>
+          <p:nvPr/>
+        </p:nvSpPr>
+        <p:spPr>
+          <a:xfrm>
+            <a:off x="9326880" y="548640"/>
+            <a:ext cx="192024" cy="192024"/>
+          </a:xfrm>
+          <a:prstGeom prst="rect">
+            <a:avLst/>
+          </a:prstGeom>
+          <a:noFill/>
+          <a:ln/>
+        </p:spPr>
+        <p:txBody>
+          <a:bodyPr wrap="square" lIns="0" tIns="0" rIns="0" bIns="0" rtlCol="0" anchor="ctr"/>
+          <a:lstStyle/>
+          <a:p>
+            <a:pPr algn="ctr" indent="0" marL="0">
+              <a:buNone/>
+            </a:pPr>
+            <a:r>
+              <a:rPr lang="en-US" sz="660" b="1" dirty="0">
+                <a:solidFill>
+                  <a:srgbClr val="081F5C"/>
+                </a:solidFill>
+                <a:latin typeface="Arial" pitchFamily="34" charset="0"/>
+                <a:ea typeface="Arial" pitchFamily="34" charset="-122"/>
+                <a:cs typeface="Arial" pitchFamily="34" charset="-120"/>
+              </a:rPr>
+              <a:t>1</a:t>
+            </a:r>
+            <a:endParaRPr lang="en-US" sz="660" dirty="0"/>
+          </a:p>
+        </p:txBody>
+      </p:sp>
+      <p:sp>
+        <p:nvSpPr>
+          <p:cNvPr id="92" name="Text 90"/>
+          <p:cNvSpPr/>
+          <p:nvPr/>
+        </p:nvSpPr>
+        <p:spPr>
+          <a:xfrm>
+            <a:off x="9601200" y="521208"/>
+            <a:ext cx="2121408" cy="1097280"/>
+          </a:xfrm>
+          <a:prstGeom prst="rect">
+            <a:avLst/>
+          </a:prstGeom>
+          <a:noFill/>
+          <a:ln/>
+        </p:spPr>
+        <p:txBody>
+          <a:bodyPr wrap="square" lIns="0" tIns="0" rIns="0" bIns="0" rtlCol="0" anchor="t"/>
+          <a:lstStyle/>
+          <a:p>
+            <a:pPr indent="0" marL="0">
+              <a:lnSpc>
+                <a:spcPct val="93000"/>
+              </a:lnSpc>
+              <a:spcAft>
+                <a:spcPts val="200"/>
+              </a:spcAft>
+              <a:buNone/>
+            </a:pPr>
+            <a:r>
+              <a:rPr lang="en-US" sz="760" b="1" dirty="0">
+                <a:solidFill>
+                  <a:srgbClr val="FFFFFF"/>
+                </a:solidFill>
+                <a:latin typeface="Arial" pitchFamily="34" charset="0"/>
+                <a:ea typeface="Arial" pitchFamily="34" charset="-122"/>
+                <a:cs typeface="Arial" pitchFamily="34" charset="-120"/>
+              </a:rPr>
+              <a:t>Report Rationalization &amp; Disposition</a:t>
+            </a:r>
+            <a:endParaRPr lang="en-US" sz="760" dirty="0"/>
+          </a:p>
+          <a:p>
+            <a:pPr indent="0" marL="0">
+              <a:lnSpc>
+                <a:spcPct val="93000"/>
+              </a:lnSpc>
+              <a:spcAft>
+                <a:spcPts val="300"/>
+              </a:spcAft>
+              <a:buNone/>
+            </a:pPr>
+            <a:r>
+              <a:rPr lang="en-US" sz="660" i="1" dirty="0">
+                <a:solidFill>
+                  <a:srgbClr val="9FD4EC"/>
+                </a:solidFill>
+                <a:latin typeface="Arial" pitchFamily="34" charset="0"/>
+                <a:ea typeface="Arial" pitchFamily="34" charset="-122"/>
+                <a:cs typeface="Arial" pitchFamily="34" charset="-120"/>
+              </a:rPr>
+              <a:t>DRECT · Report Rationalizer · ★ Platform Fit Scorer</a:t>
+            </a:r>
+            <a:endParaRPr lang="en-US" sz="760" dirty="0"/>
+          </a:p>
+          <a:p>
+            <a:pPr indent="0" marL="0">
+              <a:lnSpc>
+                <a:spcPct val="93000"/>
+              </a:lnSpc>
+              <a:buNone/>
+            </a:pPr>
+            <a:r>
+              <a:rPr lang="en-US" sz="710" dirty="0">
+                <a:solidFill>
+                  <a:srgbClr val="E3E9F5"/>
+                </a:solidFill>
+                <a:latin typeface="Arial" pitchFamily="34" charset="0"/>
+                <a:ea typeface="Arial" pitchFamily="34" charset="-122"/>
+                <a:cs typeface="Arial" pitchFamily="34" charset="-120"/>
+              </a:rPr>
+              <a:t>Reverse-engineers universe SQL and report queries into an object dependency graph and lineage. Mines 18 months of CMS run history and Report DNA signatures for dormancy and duplicate classes. Scores each surviving report against the rubric and publishes the disposition register.</a:t>
+            </a:r>
+            <a:endParaRPr lang="en-US" sz="760" dirty="0"/>
+          </a:p>
+        </p:txBody>
+      </p:sp>
+      <p:sp>
+        <p:nvSpPr>
+          <p:cNvPr id="93" name="Shape 91"/>
+          <p:cNvSpPr/>
+          <p:nvPr/>
+        </p:nvSpPr>
+        <p:spPr>
+          <a:xfrm>
+            <a:off x="9326880" y="1700784"/>
+            <a:ext cx="192024" cy="192024"/>
+          </a:xfrm>
+          <a:prstGeom prst="roundRect">
+            <a:avLst>
+              <a:gd name="adj" fmla="val 95238"/>
+            </a:avLst>
+          </a:prstGeom>
+          <a:solidFill>
+            <a:srgbClr val="ADDAFB"/>
+          </a:solidFill>
+          <a:ln w="6350">
+            <a:solidFill>
+              <a:srgbClr val="ADDAFB"/>
+            </a:solidFill>
+            <a:prstDash val="solid"/>
+          </a:ln>
+        </p:spPr>
+      </p:sp>
+      <p:sp>
+        <p:nvSpPr>
+          <p:cNvPr id="94" name="Text 92"/>
+          <p:cNvSpPr/>
+          <p:nvPr/>
+        </p:nvSpPr>
+        <p:spPr>
+          <a:xfrm>
+            <a:off x="9326880" y="1700784"/>
+            <a:ext cx="192024" cy="192024"/>
+          </a:xfrm>
+          <a:prstGeom prst="rect">
+            <a:avLst/>
+          </a:prstGeom>
+          <a:noFill/>
+          <a:ln/>
+        </p:spPr>
+        <p:txBody>
+          <a:bodyPr wrap="square" lIns="0" tIns="0" rIns="0" bIns="0" rtlCol="0" anchor="ctr"/>
+          <a:lstStyle/>
+          <a:p>
+            <a:pPr algn="ctr" indent="0" marL="0">
+              <a:buNone/>
+            </a:pPr>
+            <a:r>
+              <a:rPr lang="en-US" sz="660" b="1" dirty="0">
+                <a:solidFill>
+                  <a:srgbClr val="081F5C"/>
+                </a:solidFill>
+                <a:latin typeface="Arial" pitchFamily="34" charset="0"/>
+                <a:ea typeface="Arial" pitchFamily="34" charset="-122"/>
+                <a:cs typeface="Arial" pitchFamily="34" charset="-120"/>
+              </a:rPr>
+              <a:t>2</a:t>
+            </a:r>
+            <a:endParaRPr lang="en-US" sz="660" dirty="0"/>
+          </a:p>
+        </p:txBody>
+      </p:sp>
+      <p:sp>
+        <p:nvSpPr>
+          <p:cNvPr id="95" name="Text 93"/>
+          <p:cNvSpPr/>
+          <p:nvPr/>
+        </p:nvSpPr>
+        <p:spPr>
+          <a:xfrm>
+            <a:off x="9601200" y="1673352"/>
+            <a:ext cx="2121408" cy="1097280"/>
+          </a:xfrm>
+          <a:prstGeom prst="rect">
+            <a:avLst/>
+          </a:prstGeom>
+          <a:noFill/>
+          <a:ln/>
+        </p:spPr>
+        <p:txBody>
+          <a:bodyPr wrap="square" lIns="0" tIns="0" rIns="0" bIns="0" rtlCol="0" anchor="t"/>
+          <a:lstStyle/>
+          <a:p>
+            <a:pPr indent="0" marL="0">
+              <a:lnSpc>
+                <a:spcPct val="93000"/>
+              </a:lnSpc>
+              <a:spcAft>
+                <a:spcPts val="200"/>
+              </a:spcAft>
+              <a:buNone/>
+            </a:pPr>
+            <a:r>
+              <a:rPr lang="en-US" sz="760" b="1" dirty="0">
+                <a:solidFill>
+                  <a:srgbClr val="FFFFFF"/>
+                </a:solidFill>
+                <a:latin typeface="Arial" pitchFamily="34" charset="0"/>
+                <a:ea typeface="Arial" pitchFamily="34" charset="-122"/>
+                <a:cs typeface="Arial" pitchFamily="34" charset="-120"/>
+              </a:rPr>
+              <a:t>★ Schema Mapper</a:t>
+            </a:r>
+            <a:endParaRPr lang="en-US" sz="760" dirty="0"/>
+          </a:p>
+          <a:p>
+            <a:pPr indent="0" marL="0">
+              <a:lnSpc>
+                <a:spcPct val="93000"/>
+              </a:lnSpc>
+              <a:buNone/>
+            </a:pPr>
+            <a:r>
+              <a:rPr lang="en-US" sz="710" dirty="0">
+                <a:solidFill>
+                  <a:srgbClr val="E3E9F5"/>
+                </a:solidFill>
+                <a:latin typeface="Arial" pitchFamily="34" charset="0"/>
+                <a:ea typeface="Arial" pitchFamily="34" charset="-122"/>
+                <a:cs typeface="Arial" pitchFamily="34" charset="-120"/>
+              </a:rPr>
+              <a:t>Classifies every Oracle custom-schema object a surviving report reads — table, view, materialized view, stored procedure, package — maps each to its MS SQL Server or Delta and Unity Catalog target, and sizes the conversion effort per object.</a:t>
+            </a:r>
+            <a:endParaRPr lang="en-US" sz="760" dirty="0"/>
+          </a:p>
+        </p:txBody>
+      </p:sp>
+      <p:sp>
+        <p:nvSpPr>
+          <p:cNvPr id="96" name="Shape 94"/>
+          <p:cNvSpPr/>
+          <p:nvPr/>
+        </p:nvSpPr>
+        <p:spPr>
+          <a:xfrm>
+            <a:off x="9326880" y="2688336"/>
+            <a:ext cx="192024" cy="192024"/>
+          </a:xfrm>
+          <a:prstGeom prst="roundRect">
+            <a:avLst>
+              <a:gd name="adj" fmla="val 95238"/>
+            </a:avLst>
+          </a:prstGeom>
+          <a:solidFill>
+            <a:srgbClr val="ADDAFB"/>
+          </a:solidFill>
+          <a:ln w="6350">
+            <a:solidFill>
+              <a:srgbClr val="ADDAFB"/>
+            </a:solidFill>
+            <a:prstDash val="solid"/>
+          </a:ln>
+        </p:spPr>
+      </p:sp>
+      <p:sp>
+        <p:nvSpPr>
+          <p:cNvPr id="97" name="Text 95"/>
+          <p:cNvSpPr/>
+          <p:nvPr/>
+        </p:nvSpPr>
+        <p:spPr>
+          <a:xfrm>
+            <a:off x="9326880" y="2688336"/>
+            <a:ext cx="192024" cy="192024"/>
+          </a:xfrm>
+          <a:prstGeom prst="rect">
+            <a:avLst/>
+          </a:prstGeom>
+          <a:noFill/>
+          <a:ln/>
+        </p:spPr>
+        <p:txBody>
+          <a:bodyPr wrap="square" lIns="0" tIns="0" rIns="0" bIns="0" rtlCol="0" anchor="ctr"/>
+          <a:lstStyle/>
+          <a:p>
+            <a:pPr algn="ctr" indent="0" marL="0">
+              <a:buNone/>
+            </a:pPr>
+            <a:r>
+              <a:rPr lang="en-US" sz="660" b="1" dirty="0">
+                <a:solidFill>
+                  <a:srgbClr val="081F5C"/>
+                </a:solidFill>
+                <a:latin typeface="Arial" pitchFamily="34" charset="0"/>
+                <a:ea typeface="Arial" pitchFamily="34" charset="-122"/>
+                <a:cs typeface="Arial" pitchFamily="34" charset="-120"/>
+              </a:rPr>
+              <a:t>3</a:t>
+            </a:r>
+            <a:endParaRPr lang="en-US" sz="660" dirty="0"/>
+          </a:p>
+        </p:txBody>
+      </p:sp>
+      <p:sp>
+        <p:nvSpPr>
+          <p:cNvPr id="98" name="Text 96"/>
+          <p:cNvSpPr/>
+          <p:nvPr/>
+        </p:nvSpPr>
+        <p:spPr>
+          <a:xfrm>
+            <a:off x="9601200" y="2660904"/>
+            <a:ext cx="2121408" cy="1097280"/>
+          </a:xfrm>
+          <a:prstGeom prst="rect">
+            <a:avLst/>
+          </a:prstGeom>
+          <a:noFill/>
+          <a:ln/>
+        </p:spPr>
+        <p:txBody>
+          <a:bodyPr wrap="square" lIns="0" tIns="0" rIns="0" bIns="0" rtlCol="0" anchor="t"/>
+          <a:lstStyle/>
+          <a:p>
+            <a:pPr indent="0" marL="0">
+              <a:lnSpc>
+                <a:spcPct val="93000"/>
+              </a:lnSpc>
+              <a:spcAft>
+                <a:spcPts val="200"/>
+              </a:spcAft>
+              <a:buNone/>
+            </a:pPr>
+            <a:r>
+              <a:rPr lang="en-US" sz="760" b="1" dirty="0">
+                <a:solidFill>
+                  <a:srgbClr val="FFFFFF"/>
+                </a:solidFill>
+                <a:latin typeface="Arial" pitchFamily="34" charset="0"/>
+                <a:ea typeface="Arial" pitchFamily="34" charset="-122"/>
+                <a:cs typeface="Arial" pitchFamily="34" charset="-120"/>
+              </a:rPr>
+              <a:t>DDL &amp; Object Converter</a:t>
+            </a:r>
+            <a:endParaRPr lang="en-US" sz="760" dirty="0"/>
+          </a:p>
+          <a:p>
+            <a:pPr indent="0" marL="0">
+              <a:lnSpc>
+                <a:spcPct val="93000"/>
+              </a:lnSpc>
+              <a:spcAft>
+                <a:spcPts val="300"/>
+              </a:spcAft>
+              <a:buNone/>
+            </a:pPr>
+            <a:r>
+              <a:rPr lang="en-US" sz="660" i="1" dirty="0">
+                <a:solidFill>
+                  <a:srgbClr val="9FD4EC"/>
+                </a:solidFill>
+                <a:latin typeface="Arial" pitchFamily="34" charset="0"/>
+                <a:ea typeface="Arial" pitchFamily="34" charset="-122"/>
+                <a:cs typeface="Arial" pitchFamily="34" charset="-120"/>
+              </a:rPr>
+              <a:t>Deloitte Code Converter · Data Migration Agent</a:t>
+            </a:r>
+            <a:endParaRPr lang="en-US" sz="760" dirty="0"/>
+          </a:p>
+          <a:p>
+            <a:pPr indent="0" marL="0">
+              <a:lnSpc>
+                <a:spcPct val="93000"/>
+              </a:lnSpc>
+              <a:buNone/>
+            </a:pPr>
+            <a:r>
+              <a:rPr lang="en-US" sz="710" dirty="0">
+                <a:solidFill>
+                  <a:srgbClr val="E3E9F5"/>
+                </a:solidFill>
+                <a:latin typeface="Arial" pitchFamily="34" charset="0"/>
+                <a:ea typeface="Arial" pitchFamily="34" charset="-122"/>
+                <a:cs typeface="Arial" pitchFamily="34" charset="-120"/>
+              </a:rPr>
+              <a:t>Converts table and view DDL, materialized views, packages and stored procedures into T-SQL or Delta and Unity Catalog constructs, then generates the history and incremental load configuration to move the data.</a:t>
+            </a:r>
+            <a:endParaRPr lang="en-US" sz="760" dirty="0"/>
+          </a:p>
+        </p:txBody>
+      </p:sp>
+      <p:sp>
+        <p:nvSpPr>
+          <p:cNvPr id="99" name="Shape 97"/>
+          <p:cNvSpPr/>
+          <p:nvPr/>
+        </p:nvSpPr>
+        <p:spPr>
+          <a:xfrm>
+            <a:off x="9326880" y="3675888"/>
+            <a:ext cx="192024" cy="192024"/>
+          </a:xfrm>
+          <a:prstGeom prst="roundRect">
+            <a:avLst>
+              <a:gd name="adj" fmla="val 95238"/>
+            </a:avLst>
+          </a:prstGeom>
+          <a:solidFill>
+            <a:srgbClr val="ADDAFB"/>
+          </a:solidFill>
+          <a:ln w="6350">
+            <a:solidFill>
+              <a:srgbClr val="ADDAFB"/>
+            </a:solidFill>
+            <a:prstDash val="solid"/>
+          </a:ln>
+        </p:spPr>
+      </p:sp>
+      <p:sp>
+        <p:nvSpPr>
+          <p:cNvPr id="100" name="Text 98"/>
+          <p:cNvSpPr/>
+          <p:nvPr/>
+        </p:nvSpPr>
+        <p:spPr>
+          <a:xfrm>
+            <a:off x="9326880" y="3675888"/>
+            <a:ext cx="192024" cy="192024"/>
+          </a:xfrm>
+          <a:prstGeom prst="rect">
+            <a:avLst/>
+          </a:prstGeom>
+          <a:noFill/>
+          <a:ln/>
+        </p:spPr>
+        <p:txBody>
+          <a:bodyPr wrap="square" lIns="0" tIns="0" rIns="0" bIns="0" rtlCol="0" anchor="ctr"/>
+          <a:lstStyle/>
+          <a:p>
+            <a:pPr algn="ctr" indent="0" marL="0">
+              <a:buNone/>
+            </a:pPr>
+            <a:r>
+              <a:rPr lang="en-US" sz="660" b="1" dirty="0">
+                <a:solidFill>
+                  <a:srgbClr val="081F5C"/>
+                </a:solidFill>
+                <a:latin typeface="Arial" pitchFamily="34" charset="0"/>
+                <a:ea typeface="Arial" pitchFamily="34" charset="-122"/>
+                <a:cs typeface="Arial" pitchFamily="34" charset="-120"/>
+              </a:rPr>
+              <a:t>4</a:t>
+            </a:r>
+            <a:endParaRPr lang="en-US" sz="660" dirty="0"/>
+          </a:p>
+        </p:txBody>
+      </p:sp>
+      <p:sp>
+        <p:nvSpPr>
+          <p:cNvPr id="101" name="Text 99"/>
+          <p:cNvSpPr/>
+          <p:nvPr/>
+        </p:nvSpPr>
+        <p:spPr>
+          <a:xfrm>
+            <a:off x="9601200" y="3648456"/>
+            <a:ext cx="2121408" cy="1097280"/>
+          </a:xfrm>
+          <a:prstGeom prst="rect">
+            <a:avLst/>
+          </a:prstGeom>
+          <a:noFill/>
+          <a:ln/>
+        </p:spPr>
+        <p:txBody>
+          <a:bodyPr wrap="square" lIns="0" tIns="0" rIns="0" bIns="0" rtlCol="0" anchor="t"/>
+          <a:lstStyle/>
+          <a:p>
+            <a:pPr indent="0" marL="0">
+              <a:lnSpc>
+                <a:spcPct val="93000"/>
+              </a:lnSpc>
+              <a:spcAft>
+                <a:spcPts val="200"/>
+              </a:spcAft>
+              <a:buNone/>
+            </a:pPr>
+            <a:r>
+              <a:rPr lang="en-US" sz="760" b="1" dirty="0">
+                <a:solidFill>
+                  <a:srgbClr val="FFFFFF"/>
+                </a:solidFill>
+                <a:latin typeface="Arial" pitchFamily="34" charset="0"/>
+                <a:ea typeface="Arial" pitchFamily="34" charset="-122"/>
+                <a:cs typeface="Arial" pitchFamily="34" charset="-120"/>
+              </a:rPr>
+              <a:t>Report Migration Agents</a:t>
+            </a:r>
+            <a:endParaRPr lang="en-US" sz="760" dirty="0"/>
+          </a:p>
+          <a:p>
+            <a:pPr indent="0" marL="0">
+              <a:lnSpc>
+                <a:spcPct val="93000"/>
+              </a:lnSpc>
+              <a:spcAft>
+                <a:spcPts val="300"/>
+              </a:spcAft>
+              <a:buNone/>
+            </a:pPr>
+            <a:r>
+              <a:rPr lang="en-US" sz="660" i="1" dirty="0">
+                <a:solidFill>
+                  <a:srgbClr val="9FD4EC"/>
+                </a:solidFill>
+                <a:latin typeface="Arial" pitchFamily="34" charset="0"/>
+                <a:ea typeface="Arial" pitchFamily="34" charset="-122"/>
+                <a:cs typeface="Arial" pitchFamily="34" charset="-120"/>
+              </a:rPr>
+              <a:t>Report Automator · Epic Oracle-to-SQL Transpiler · ★ AI/BI Dashboard Generator</a:t>
+            </a:r>
+            <a:endParaRPr lang="en-US" sz="760" dirty="0"/>
+          </a:p>
+          <a:p>
+            <a:pPr indent="0" marL="0">
+              <a:lnSpc>
+                <a:spcPct val="93000"/>
+              </a:lnSpc>
+              <a:buNone/>
+            </a:pPr>
+            <a:r>
+              <a:rPr lang="en-US" sz="710" dirty="0">
+                <a:solidFill>
+                  <a:srgbClr val="E3E9F5"/>
+                </a:solidFill>
+                <a:latin typeface="Arial" pitchFamily="34" charset="0"/>
+                <a:ea typeface="Arial" pitchFamily="34" charset="-122"/>
+                <a:cs typeface="Arial" pitchFamily="34" charset="-120"/>
+              </a:rPr>
+              <a:t>Rebuilds each BO report on the platform its disposition assigned: a Power BI semantic model or paginated layout, a Cogito Reporting Workbench template or SQL view, or a Databricks AI/BI dashboard with a Genie space scoped to governed gold tables.</a:t>
+            </a:r>
+            <a:endParaRPr lang="en-US" sz="760" dirty="0"/>
+          </a:p>
+        </p:txBody>
+      </p:sp>
+      <p:sp>
+        <p:nvSpPr>
+          <p:cNvPr id="102" name="Shape 100"/>
+          <p:cNvSpPr/>
+          <p:nvPr/>
+        </p:nvSpPr>
+        <p:spPr>
+          <a:xfrm>
+            <a:off x="9326880" y="4800600"/>
+            <a:ext cx="192024" cy="192024"/>
+          </a:xfrm>
+          <a:prstGeom prst="roundRect">
+            <a:avLst>
+              <a:gd name="adj" fmla="val 95238"/>
+            </a:avLst>
+          </a:prstGeom>
+          <a:solidFill>
+            <a:srgbClr val="ADDAFB"/>
+          </a:solidFill>
+          <a:ln w="6350">
+            <a:solidFill>
+              <a:srgbClr val="ADDAFB"/>
+            </a:solidFill>
+            <a:prstDash val="solid"/>
+          </a:ln>
+        </p:spPr>
+      </p:sp>
+      <p:sp>
+        <p:nvSpPr>
+          <p:cNvPr id="103" name="Text 101"/>
+          <p:cNvSpPr/>
+          <p:nvPr/>
+        </p:nvSpPr>
+        <p:spPr>
+          <a:xfrm>
+            <a:off x="9326880" y="4800600"/>
+            <a:ext cx="192024" cy="192024"/>
+          </a:xfrm>
+          <a:prstGeom prst="rect">
+            <a:avLst/>
+          </a:prstGeom>
+          <a:noFill/>
+          <a:ln/>
+        </p:spPr>
+        <p:txBody>
+          <a:bodyPr wrap="square" lIns="0" tIns="0" rIns="0" bIns="0" rtlCol="0" anchor="ctr"/>
+          <a:lstStyle/>
+          <a:p>
+            <a:pPr algn="ctr" indent="0" marL="0">
+              <a:buNone/>
+            </a:pPr>
+            <a:r>
+              <a:rPr lang="en-US" sz="660" b="1" dirty="0">
+                <a:solidFill>
+                  <a:srgbClr val="081F5C"/>
+                </a:solidFill>
+                <a:latin typeface="Arial" pitchFamily="34" charset="0"/>
+                <a:ea typeface="Arial" pitchFamily="34" charset="-122"/>
+                <a:cs typeface="Arial" pitchFamily="34" charset="-120"/>
+              </a:rPr>
+              <a:t>5</a:t>
+            </a:r>
+            <a:endParaRPr lang="en-US" sz="660" dirty="0"/>
+          </a:p>
+        </p:txBody>
+      </p:sp>
+      <p:sp>
+        <p:nvSpPr>
+          <p:cNvPr id="104" name="Text 102"/>
+          <p:cNvSpPr/>
+          <p:nvPr/>
+        </p:nvSpPr>
+        <p:spPr>
+          <a:xfrm>
+            <a:off x="9601200" y="4773168"/>
+            <a:ext cx="2121408" cy="1097280"/>
+          </a:xfrm>
+          <a:prstGeom prst="rect">
+            <a:avLst/>
+          </a:prstGeom>
+          <a:noFill/>
+          <a:ln/>
+        </p:spPr>
+        <p:txBody>
+          <a:bodyPr wrap="square" lIns="0" tIns="0" rIns="0" bIns="0" rtlCol="0" anchor="t"/>
+          <a:lstStyle/>
+          <a:p>
+            <a:pPr indent="0" marL="0">
+              <a:lnSpc>
+                <a:spcPct val="93000"/>
+              </a:lnSpc>
+              <a:spcAft>
+                <a:spcPts val="200"/>
+              </a:spcAft>
+              <a:buNone/>
+            </a:pPr>
+            <a:r>
+              <a:rPr lang="en-US" sz="760" b="1" dirty="0">
+                <a:solidFill>
+                  <a:srgbClr val="FFFFFF"/>
+                </a:solidFill>
+                <a:latin typeface="Arial" pitchFamily="34" charset="0"/>
+                <a:ea typeface="Arial" pitchFamily="34" charset="-122"/>
+                <a:cs typeface="Arial" pitchFamily="34" charset="-120"/>
+              </a:rPr>
+              <a:t>Testing Agents: Data &amp; Reports</a:t>
+            </a:r>
+            <a:endParaRPr lang="en-US" sz="760" dirty="0"/>
+          </a:p>
+          <a:p>
+            <a:pPr indent="0" marL="0">
+              <a:lnSpc>
+                <a:spcPct val="93000"/>
+              </a:lnSpc>
+              <a:spcAft>
+                <a:spcPts val="300"/>
+              </a:spcAft>
+              <a:buNone/>
+            </a:pPr>
+            <a:r>
+              <a:rPr lang="en-US" sz="660" i="1" dirty="0">
+                <a:solidFill>
+                  <a:srgbClr val="9FD4EC"/>
+                </a:solidFill>
+                <a:latin typeface="Arial" pitchFamily="34" charset="0"/>
+                <a:ea typeface="Arial" pitchFamily="34" charset="-122"/>
+                <a:cs typeface="Arial" pitchFamily="34" charset="-120"/>
+              </a:rPr>
+              <a:t>CATE Test Engine · Automated Report Tester</a:t>
+            </a:r>
+            <a:endParaRPr lang="en-US" sz="760" dirty="0"/>
+          </a:p>
+          <a:p>
+            <a:pPr indent="0" marL="0">
+              <a:lnSpc>
+                <a:spcPct val="93000"/>
+              </a:lnSpc>
+              <a:buNone/>
+            </a:pPr>
+            <a:r>
+              <a:rPr lang="en-US" sz="710" dirty="0">
+                <a:solidFill>
+                  <a:srgbClr val="E3E9F5"/>
+                </a:solidFill>
+                <a:latin typeface="Arial" pitchFamily="34" charset="0"/>
+                <a:ea typeface="Arial" pitchFamily="34" charset="-122"/>
+                <a:cs typeface="Arial" pitchFamily="34" charset="-120"/>
+              </a:rPr>
+              <a:t>Reconciles row counts, checksums, business keys and re-run procedure output against Oracle, then compares report output, layout fidelity, burst delivery and Genie answers against the BOBJ baseline.</a:t>
+            </a:r>
+            <a:endParaRPr lang="en-US" sz="760" dirty="0"/>
+          </a:p>
+        </p:txBody>
+      </p:sp>
+      <p:sp>
+        <p:nvSpPr>
+          <p:cNvPr id="105" name="Shape 103"/>
+          <p:cNvSpPr/>
+          <p:nvPr/>
+        </p:nvSpPr>
+        <p:spPr>
+          <a:xfrm>
+            <a:off x="9326880" y="5788152"/>
+            <a:ext cx="192024" cy="192024"/>
+          </a:xfrm>
+          <a:prstGeom prst="roundRect">
+            <a:avLst>
+              <a:gd name="adj" fmla="val 95238"/>
+            </a:avLst>
+          </a:prstGeom>
+          <a:solidFill>
+            <a:srgbClr val="ADDAFB"/>
+          </a:solidFill>
+          <a:ln w="6350">
+            <a:solidFill>
+              <a:srgbClr val="ADDAFB"/>
+            </a:solidFill>
+            <a:prstDash val="solid"/>
+          </a:ln>
+        </p:spPr>
+      </p:sp>
+      <p:sp>
+        <p:nvSpPr>
+          <p:cNvPr id="106" name="Text 104"/>
+          <p:cNvSpPr/>
+          <p:nvPr/>
+        </p:nvSpPr>
+        <p:spPr>
+          <a:xfrm>
+            <a:off x="9326880" y="5788152"/>
+            <a:ext cx="192024" cy="192024"/>
+          </a:xfrm>
+          <a:prstGeom prst="rect">
+            <a:avLst/>
+          </a:prstGeom>
+          <a:noFill/>
+          <a:ln/>
+        </p:spPr>
+        <p:txBody>
+          <a:bodyPr wrap="square" lIns="0" tIns="0" rIns="0" bIns="0" rtlCol="0" anchor="ctr"/>
+          <a:lstStyle/>
+          <a:p>
+            <a:pPr algn="ctr" indent="0" marL="0">
+              <a:buNone/>
+            </a:pPr>
+            <a:r>
+              <a:rPr lang="en-US" sz="660" b="1" dirty="0">
+                <a:solidFill>
+                  <a:srgbClr val="081F5C"/>
+                </a:solidFill>
+                <a:latin typeface="Arial" pitchFamily="34" charset="0"/>
+                <a:ea typeface="Arial" pitchFamily="34" charset="-122"/>
+                <a:cs typeface="Arial" pitchFamily="34" charset="-120"/>
+              </a:rPr>
+              <a:t>6</a:t>
+            </a:r>
+            <a:endParaRPr lang="en-US" sz="660" dirty="0"/>
+          </a:p>
+        </p:txBody>
+      </p:sp>
+      <p:sp>
+        <p:nvSpPr>
+          <p:cNvPr id="107" name="Text 105"/>
+          <p:cNvSpPr/>
+          <p:nvPr/>
+        </p:nvSpPr>
+        <p:spPr>
+          <a:xfrm>
+            <a:off x="9601200" y="5760720"/>
+            <a:ext cx="2121408" cy="1097280"/>
+          </a:xfrm>
+          <a:prstGeom prst="rect">
+            <a:avLst/>
+          </a:prstGeom>
+          <a:noFill/>
+          <a:ln/>
+        </p:spPr>
+        <p:txBody>
+          <a:bodyPr wrap="square" lIns="0" tIns="0" rIns="0" bIns="0" rtlCol="0" anchor="t"/>
+          <a:lstStyle/>
+          <a:p>
+            <a:pPr indent="0" marL="0">
+              <a:lnSpc>
+                <a:spcPct val="93000"/>
+              </a:lnSpc>
+              <a:spcAft>
+                <a:spcPts val="200"/>
+              </a:spcAft>
+              <a:buNone/>
+            </a:pPr>
+            <a:r>
+              <a:rPr lang="en-US" sz="760" b="1" dirty="0">
+                <a:solidFill>
+                  <a:srgbClr val="FFFFFF"/>
+                </a:solidFill>
+                <a:latin typeface="Arial" pitchFamily="34" charset="0"/>
+                <a:ea typeface="Arial" pitchFamily="34" charset="-122"/>
+                <a:cs typeface="Arial" pitchFamily="34" charset="-120"/>
+              </a:rPr>
+              <a:t>Code Optimization Agent</a:t>
+            </a:r>
+            <a:endParaRPr lang="en-US" sz="760" dirty="0"/>
+          </a:p>
+          <a:p>
+            <a:pPr indent="0" marL="0">
+              <a:lnSpc>
+                <a:spcPct val="93000"/>
+              </a:lnSpc>
+              <a:buNone/>
+            </a:pPr>
+            <a:r>
+              <a:rPr lang="en-US" sz="710" dirty="0">
+                <a:solidFill>
+                  <a:srgbClr val="E3E9F5"/>
+                </a:solidFill>
+                <a:latin typeface="Arial" pitchFamily="34" charset="0"/>
+                <a:ea typeface="Arial" pitchFamily="34" charset="-122"/>
+                <a:cs typeface="Arial" pitchFamily="34" charset="-120"/>
+              </a:rPr>
+              <a:t>Monitors query behaviour on SQL Server and Databricks after migration and recommends tuning for performance and cost, including partitioning, clustering and refresh strategy.</a:t>
+            </a:r>
+            <a:endParaRPr lang="en-US" sz="760" dirty="0"/>
+          </a:p>
+        </p:txBody>
+      </p:sp>
+    </p:spTree>
+  </p:cSld>
+  <p:clrMapOvr>
+    <a:masterClrMapping/>
+  </p:clrMapOvr>
+</p:sld>
+</file>
+
+<file path=ppt/slides/slide7.xml><?xml version="1.0" encoding="utf-8"?>
+<p:sld xmlns:a="http://schemas.openxmlformats.org/drawingml/2006/main" xmlns:r="http://schemas.openxmlformats.org/officeDocument/2006/relationships" xmlns:p="http://schemas.openxmlformats.org/presentationml/2006/main">
+  <p:cSld name="Slide 7">
+    <p:spTree>
+      <p:nvGrpSpPr>
+        <p:cNvPr id="1" name=""/>
+        <p:cNvGrpSpPr/>
+        <p:nvPr/>
+      </p:nvGrpSpPr>
+      <p:grpSpPr>
+        <a:xfrm>
+          <a:off x="0" y="0"/>
+          <a:ext cx="0" cy="0"/>
+          <a:chOff x="0" y="0"/>
+          <a:chExt cx="0" cy="0"/>
+        </a:xfrm>
+      </p:grpSpPr>
+      <p:sp>
+        <p:nvSpPr>
+          <p:cNvPr id="2" name="Text 0"/>
+          <p:cNvSpPr/>
+          <p:nvPr/>
+        </p:nvSpPr>
+        <p:spPr>
+          <a:xfrm>
+            <a:off x="384048" y="146304"/>
+            <a:ext cx="10058400" cy="310896"/>
+          </a:xfrm>
+          <a:prstGeom prst="rect">
+            <a:avLst/>
+          </a:prstGeom>
+          <a:noFill/>
+          <a:ln/>
+        </p:spPr>
+        <p:txBody>
+          <a:bodyPr wrap="square" lIns="0" tIns="0" rIns="0" bIns="0" rtlCol="0" anchor="ctr"/>
+          <a:lstStyle/>
+          <a:p>
+            <a:pPr indent="0" marL="0">
+              <a:buNone/>
+            </a:pPr>
+            <a:r>
+              <a:rPr lang="en-US" sz="2100" dirty="0">
+                <a:solidFill>
+                  <a:srgbClr val="1A1A1A"/>
+                </a:solidFill>
+                <a:latin typeface="Arial" pitchFamily="34" charset="0"/>
+                <a:ea typeface="Arial" pitchFamily="34" charset="-122"/>
+                <a:cs typeface="Arial" pitchFamily="34" charset="-120"/>
+              </a:rPr>
+              <a:t>Migration Test Automation  —  Validation at Every Hop</a:t>
+            </a:r>
+            <a:endParaRPr lang="en-US" sz="2100" dirty="0"/>
+          </a:p>
+        </p:txBody>
+      </p:sp>
+      <p:sp>
+        <p:nvSpPr>
+          <p:cNvPr id="3" name="Text 1"/>
+          <p:cNvSpPr/>
+          <p:nvPr/>
+        </p:nvSpPr>
+        <p:spPr>
+          <a:xfrm>
+            <a:off x="384048" y="475488"/>
+            <a:ext cx="11420856" cy="274320"/>
+          </a:xfrm>
+          <a:prstGeom prst="rect">
+            <a:avLst/>
+          </a:prstGeom>
+          <a:noFill/>
+          <a:ln/>
+        </p:spPr>
+        <p:txBody>
+          <a:bodyPr wrap="square" lIns="0" tIns="0" rIns="0" bIns="0" rtlCol="0" anchor="ctr"/>
+          <a:lstStyle/>
+          <a:p>
+            <a:pPr indent="0" marL="0">
+              <a:lnSpc>
+                <a:spcPct val="95000"/>
+              </a:lnSpc>
+              <a:buNone/>
+            </a:pPr>
+            <a:r>
+              <a:rPr lang="en-US" sz="900" dirty="0">
+                <a:solidFill>
+                  <a:srgbClr val="1A1A1A"/>
+                </a:solidFill>
+                <a:latin typeface="Arial" pitchFamily="34" charset="0"/>
+                <a:ea typeface="Arial" pitchFamily="34" charset="-122"/>
+                <a:cs typeface="Arial" pitchFamily="34" charset="-120"/>
+              </a:rPr>
+              <a:t>Table-level validation runs automatically at each hop of the data path, then report-level validation runs on each disposition. Checks are chosen for the conversion hazards that actually bite on Oracle 19c — precision, collation, timezone and NULL ordering — not a generic count-and-checksum pass.</a:t>
+            </a:r>
+            <a:endParaRPr lang="en-US" sz="900" dirty="0"/>
+          </a:p>
+        </p:txBody>
+      </p:sp>
+      <p:sp>
+        <p:nvSpPr>
+          <p:cNvPr id="4" name="Shape 2"/>
+          <p:cNvSpPr/>
+          <p:nvPr/>
+        </p:nvSpPr>
+        <p:spPr>
+          <a:xfrm>
+            <a:off x="384048" y="914400"/>
+            <a:ext cx="9464040" cy="219456"/>
+          </a:xfrm>
+          <a:prstGeom prst="rect">
+            <a:avLst/>
+          </a:prstGeom>
+          <a:solidFill>
+            <a:srgbClr val="1596B0"/>
+          </a:solidFill>
+          <a:ln w="6350">
+            <a:solidFill>
+              <a:srgbClr val="1596B0"/>
+            </a:solidFill>
+            <a:prstDash val="solid"/>
+          </a:ln>
+        </p:spPr>
+      </p:sp>
+      <p:sp>
+        <p:nvSpPr>
+          <p:cNvPr id="5" name="Text 3"/>
+          <p:cNvSpPr/>
+          <p:nvPr/>
+        </p:nvSpPr>
+        <p:spPr>
+          <a:xfrm>
+            <a:off x="475488" y="914400"/>
+            <a:ext cx="7360920" cy="219456"/>
+          </a:xfrm>
+          <a:prstGeom prst="rect">
+            <a:avLst/>
+          </a:prstGeom>
+          <a:noFill/>
+          <a:ln/>
+        </p:spPr>
+        <p:txBody>
+          <a:bodyPr wrap="square" lIns="0" tIns="0" rIns="0" bIns="0" rtlCol="0" anchor="ctr"/>
+          <a:lstStyle/>
+          <a:p>
+            <a:pPr indent="0" marL="0">
+              <a:buNone/>
+            </a:pPr>
+            <a:r>
+              <a:rPr lang="en-US" sz="850" b="1" dirty="0">
+                <a:solidFill>
+                  <a:srgbClr val="FFFFFF"/>
+                </a:solidFill>
+                <a:latin typeface="Arial" pitchFamily="34" charset="0"/>
+                <a:ea typeface="Arial" pitchFamily="34" charset="-122"/>
+                <a:cs typeface="Arial" pitchFamily="34" charset="-120"/>
+              </a:rPr>
+              <a:t>1 · Database objects   Oracle 19c  →  MS SQL Server        feeds Power BI reports</a:t>
+            </a:r>
+            <a:endParaRPr lang="en-US" sz="850" dirty="0"/>
+          </a:p>
+        </p:txBody>
+      </p:sp>
+      <p:sp>
+        <p:nvSpPr>
+          <p:cNvPr id="6" name="Text 4"/>
+          <p:cNvSpPr/>
+          <p:nvPr/>
+        </p:nvSpPr>
+        <p:spPr>
+          <a:xfrm>
+            <a:off x="7744968" y="914400"/>
+            <a:ext cx="2011680" cy="219456"/>
+          </a:xfrm>
+          <a:prstGeom prst="rect">
+            <a:avLst/>
+          </a:prstGeom>
+          <a:noFill/>
+          <a:ln/>
+        </p:spPr>
+        <p:txBody>
+          <a:bodyPr wrap="square" lIns="0" tIns="0" rIns="0" bIns="0" rtlCol="0" anchor="ctr"/>
+          <a:lstStyle/>
+          <a:p>
+            <a:pPr algn="r" indent="0" marL="0">
+              <a:buNone/>
+            </a:pPr>
+            <a:r>
+              <a:rPr lang="en-US" sz="700" i="1" dirty="0">
+                <a:solidFill>
+                  <a:srgbClr val="E3E9F5"/>
+                </a:solidFill>
+                <a:latin typeface="Arial" pitchFamily="34" charset="0"/>
+                <a:ea typeface="Arial" pitchFamily="34" charset="-122"/>
+                <a:cs typeface="Arial" pitchFamily="34" charset="-120"/>
+              </a:rPr>
+              <a:t>CATE Test Engine</a:t>
+            </a:r>
+            <a:endParaRPr lang="en-US" sz="700" dirty="0"/>
+          </a:p>
+        </p:txBody>
+      </p:sp>
+      <p:sp>
+        <p:nvSpPr>
+          <p:cNvPr id="7" name="Shape 5"/>
+          <p:cNvSpPr/>
+          <p:nvPr/>
+        </p:nvSpPr>
+        <p:spPr>
+          <a:xfrm>
+            <a:off x="384048" y="1133856"/>
+            <a:ext cx="9464040" cy="1353312"/>
+          </a:xfrm>
+          <a:prstGeom prst="rect">
+            <a:avLst/>
+          </a:prstGeom>
+          <a:solidFill>
+            <a:srgbClr val="FCFDFE"/>
+          </a:solidFill>
+          <a:ln w="9525">
+            <a:solidFill>
+              <a:srgbClr val="DCE6F0"/>
+            </a:solidFill>
+            <a:prstDash val="solid"/>
+          </a:ln>
+        </p:spPr>
+      </p:sp>
+      <p:sp>
+        <p:nvSpPr>
+          <p:cNvPr id="8" name="Shape 6"/>
+          <p:cNvSpPr/>
+          <p:nvPr/>
+        </p:nvSpPr>
+        <p:spPr>
+          <a:xfrm>
+            <a:off x="530352" y="1207008"/>
+            <a:ext cx="1207008" cy="420624"/>
+          </a:xfrm>
+          <a:prstGeom prst="roundRect">
+            <a:avLst>
+              <a:gd name="adj" fmla="val 21739"/>
+            </a:avLst>
+          </a:prstGeom>
+          <a:solidFill>
+            <a:srgbClr val="FFFFFF"/>
+          </a:solidFill>
+          <a:ln w="15875">
+            <a:solidFill>
+              <a:srgbClr val="1596B0"/>
+            </a:solidFill>
+            <a:prstDash val="solid"/>
+          </a:ln>
+        </p:spPr>
+      </p:sp>
+      <p:sp>
+        <p:nvSpPr>
+          <p:cNvPr id="9" name="Text 7"/>
+          <p:cNvSpPr/>
+          <p:nvPr/>
+        </p:nvSpPr>
+        <p:spPr>
+          <a:xfrm>
+            <a:off x="530352" y="1207008"/>
+            <a:ext cx="1207008" cy="420624"/>
+          </a:xfrm>
+          <a:prstGeom prst="rect">
+            <a:avLst/>
+          </a:prstGeom>
+          <a:noFill/>
+          <a:ln/>
+        </p:spPr>
+        <p:txBody>
+          <a:bodyPr wrap="square" lIns="254" tIns="508" rIns="508" bIns="254" rtlCol="0" anchor="ctr"/>
+          <a:lstStyle/>
+          <a:p>
+            <a:pPr algn="ctr" indent="0" marL="0">
+              <a:lnSpc>
+                <a:spcPct val="92000"/>
+              </a:lnSpc>
+              <a:buNone/>
+            </a:pPr>
+            <a:r>
+              <a:rPr lang="en-US" sz="690" b="1" dirty="0">
+                <a:solidFill>
+                  <a:srgbClr val="081F5C"/>
+                </a:solidFill>
+                <a:latin typeface="Arial" pitchFamily="34" charset="0"/>
+                <a:ea typeface="Arial" pitchFamily="34" charset="-122"/>
+                <a:cs typeface="Arial" pitchFamily="34" charset="-120"/>
+              </a:rPr>
+              <a:t>Oracle 19c custom schema</a:t>
+            </a:r>
+            <a:endParaRPr lang="en-US" sz="690" dirty="0"/>
+          </a:p>
+        </p:txBody>
+      </p:sp>
+      <p:sp>
+        <p:nvSpPr>
+          <p:cNvPr id="10" name="Shape 8"/>
+          <p:cNvSpPr/>
+          <p:nvPr/>
+        </p:nvSpPr>
+        <p:spPr>
+          <a:xfrm>
+            <a:off x="1755648" y="1344168"/>
+            <a:ext cx="365760" cy="146304"/>
+          </a:xfrm>
+          <a:prstGeom prst="rightArrow">
+            <a:avLst/>
+          </a:prstGeom>
+          <a:solidFill>
+            <a:srgbClr val="1596B0"/>
+          </a:solidFill>
+          <a:ln w="6350">
+            <a:solidFill>
+              <a:srgbClr val="1596B0"/>
+            </a:solidFill>
+            <a:prstDash val="solid"/>
+          </a:ln>
+        </p:spPr>
+      </p:sp>
+      <p:sp>
+        <p:nvSpPr>
+          <p:cNvPr id="11" name="Shape 9"/>
+          <p:cNvSpPr/>
+          <p:nvPr/>
+        </p:nvSpPr>
+        <p:spPr>
+          <a:xfrm>
+            <a:off x="2176272" y="1207008"/>
+            <a:ext cx="1207008" cy="420624"/>
+          </a:xfrm>
+          <a:prstGeom prst="roundRect">
+            <a:avLst>
+              <a:gd name="adj" fmla="val 21739"/>
+            </a:avLst>
+          </a:prstGeom>
+          <a:solidFill>
+            <a:srgbClr val="FFFFFF"/>
+          </a:solidFill>
+          <a:ln w="15875">
+            <a:solidFill>
+              <a:srgbClr val="1596B0"/>
+            </a:solidFill>
+            <a:prstDash val="solid"/>
+          </a:ln>
+        </p:spPr>
+      </p:sp>
+      <p:sp>
+        <p:nvSpPr>
+          <p:cNvPr id="12" name="Text 10"/>
+          <p:cNvSpPr/>
+          <p:nvPr/>
+        </p:nvSpPr>
+        <p:spPr>
+          <a:xfrm>
+            <a:off x="2176272" y="1207008"/>
+            <a:ext cx="1207008" cy="420624"/>
+          </a:xfrm>
+          <a:prstGeom prst="rect">
+            <a:avLst/>
+          </a:prstGeom>
+          <a:noFill/>
+          <a:ln/>
+        </p:spPr>
+        <p:txBody>
+          <a:bodyPr wrap="square" lIns="254" tIns="508" rIns="508" bIns="254" rtlCol="0" anchor="ctr"/>
+          <a:lstStyle/>
+          <a:p>
+            <a:pPr algn="ctr" indent="0" marL="0">
+              <a:lnSpc>
+                <a:spcPct val="92000"/>
+              </a:lnSpc>
+              <a:buNone/>
+            </a:pPr>
+            <a:r>
+              <a:rPr lang="en-US" sz="690" b="1" dirty="0">
+                <a:solidFill>
+                  <a:srgbClr val="081F5C"/>
+                </a:solidFill>
+                <a:latin typeface="Arial" pitchFamily="34" charset="0"/>
+                <a:ea typeface="Arial" pitchFamily="34" charset="-122"/>
+                <a:cs typeface="Arial" pitchFamily="34" charset="-120"/>
+              </a:rPr>
+              <a:t>Extract &amp; stage</a:t>
+            </a:r>
+            <a:endParaRPr lang="en-US" sz="690" dirty="0"/>
+          </a:p>
+        </p:txBody>
+      </p:sp>
+      <p:sp>
+        <p:nvSpPr>
+          <p:cNvPr id="13" name="Shape 11"/>
+          <p:cNvSpPr/>
+          <p:nvPr/>
+        </p:nvSpPr>
+        <p:spPr>
+          <a:xfrm>
+            <a:off x="3401568" y="1344168"/>
+            <a:ext cx="365760" cy="146304"/>
+          </a:xfrm>
+          <a:prstGeom prst="rightArrow">
+            <a:avLst/>
+          </a:prstGeom>
+          <a:solidFill>
+            <a:srgbClr val="1596B0"/>
+          </a:solidFill>
+          <a:ln w="6350">
+            <a:solidFill>
+              <a:srgbClr val="1596B0"/>
+            </a:solidFill>
+            <a:prstDash val="solid"/>
+          </a:ln>
+        </p:spPr>
+      </p:sp>
+      <p:sp>
+        <p:nvSpPr>
+          <p:cNvPr id="14" name="Shape 12"/>
+          <p:cNvSpPr/>
+          <p:nvPr/>
+        </p:nvSpPr>
+        <p:spPr>
+          <a:xfrm>
+            <a:off x="3822192" y="1207008"/>
+            <a:ext cx="1207008" cy="420624"/>
+          </a:xfrm>
+          <a:prstGeom prst="roundRect">
+            <a:avLst>
+              <a:gd name="adj" fmla="val 21739"/>
+            </a:avLst>
+          </a:prstGeom>
+          <a:solidFill>
+            <a:srgbClr val="FFFFFF"/>
+          </a:solidFill>
+          <a:ln w="15875">
+            <a:solidFill>
+              <a:srgbClr val="1596B0"/>
+            </a:solidFill>
+            <a:prstDash val="solid"/>
+          </a:ln>
+        </p:spPr>
+      </p:sp>
+      <p:sp>
+        <p:nvSpPr>
+          <p:cNvPr id="15" name="Text 13"/>
+          <p:cNvSpPr/>
+          <p:nvPr/>
+        </p:nvSpPr>
+        <p:spPr>
+          <a:xfrm>
+            <a:off x="3822192" y="1207008"/>
+            <a:ext cx="1207008" cy="420624"/>
+          </a:xfrm>
+          <a:prstGeom prst="rect">
+            <a:avLst/>
+          </a:prstGeom>
+          <a:noFill/>
+          <a:ln/>
+        </p:spPr>
+        <p:txBody>
+          <a:bodyPr wrap="square" lIns="254" tIns="508" rIns="508" bIns="254" rtlCol="0" anchor="ctr"/>
+          <a:lstStyle/>
+          <a:p>
+            <a:pPr algn="ctr" indent="0" marL="0">
+              <a:lnSpc>
+                <a:spcPct val="92000"/>
+              </a:lnSpc>
+              <a:buNone/>
+            </a:pPr>
+            <a:r>
+              <a:rPr lang="en-US" sz="690" b="1" dirty="0">
+                <a:solidFill>
+                  <a:srgbClr val="081F5C"/>
+                </a:solidFill>
+                <a:latin typeface="Arial" pitchFamily="34" charset="0"/>
+                <a:ea typeface="Arial" pitchFamily="34" charset="-122"/>
+                <a:cs typeface="Arial" pitchFamily="34" charset="-120"/>
+              </a:rPr>
+              <a:t>SQL Server gold schema</a:t>
+            </a:r>
+            <a:endParaRPr lang="en-US" sz="690" dirty="0"/>
+          </a:p>
+        </p:txBody>
+      </p:sp>
+      <p:sp>
+        <p:nvSpPr>
+          <p:cNvPr id="16" name="Shape 14"/>
+          <p:cNvSpPr/>
+          <p:nvPr/>
+        </p:nvSpPr>
+        <p:spPr>
+          <a:xfrm>
+            <a:off x="5047488" y="1344168"/>
+            <a:ext cx="365760" cy="146304"/>
+          </a:xfrm>
+          <a:prstGeom prst="rightArrow">
+            <a:avLst/>
+          </a:prstGeom>
+          <a:solidFill>
+            <a:srgbClr val="1596B0"/>
+          </a:solidFill>
+          <a:ln w="6350">
+            <a:solidFill>
+              <a:srgbClr val="1596B0"/>
+            </a:solidFill>
+            <a:prstDash val="solid"/>
+          </a:ln>
+        </p:spPr>
+      </p:sp>
+      <p:sp>
+        <p:nvSpPr>
+          <p:cNvPr id="17" name="Shape 15"/>
+          <p:cNvSpPr/>
+          <p:nvPr/>
+        </p:nvSpPr>
+        <p:spPr>
+          <a:xfrm>
+            <a:off x="5468112" y="1207008"/>
+            <a:ext cx="1207008" cy="420624"/>
+          </a:xfrm>
+          <a:prstGeom prst="roundRect">
+            <a:avLst>
+              <a:gd name="adj" fmla="val 21739"/>
+            </a:avLst>
+          </a:prstGeom>
+          <a:solidFill>
+            <a:srgbClr val="FFFFFF"/>
+          </a:solidFill>
+          <a:ln w="15875">
+            <a:solidFill>
+              <a:srgbClr val="1596B0"/>
+            </a:solidFill>
+            <a:prstDash val="solid"/>
+          </a:ln>
+        </p:spPr>
+      </p:sp>
+      <p:sp>
+        <p:nvSpPr>
+          <p:cNvPr id="18" name="Text 16"/>
+          <p:cNvSpPr/>
+          <p:nvPr/>
+        </p:nvSpPr>
+        <p:spPr>
+          <a:xfrm>
+            <a:off x="5468112" y="1207008"/>
+            <a:ext cx="1207008" cy="420624"/>
+          </a:xfrm>
+          <a:prstGeom prst="rect">
+            <a:avLst/>
+          </a:prstGeom>
+          <a:noFill/>
+          <a:ln/>
+        </p:spPr>
+        <p:txBody>
+          <a:bodyPr wrap="square" lIns="254" tIns="508" rIns="508" bIns="254" rtlCol="0" anchor="ctr"/>
+          <a:lstStyle/>
+          <a:p>
+            <a:pPr algn="ctr" indent="0" marL="0">
+              <a:lnSpc>
+                <a:spcPct val="92000"/>
+              </a:lnSpc>
+              <a:buNone/>
+            </a:pPr>
+            <a:r>
+              <a:rPr lang="en-US" sz="690" b="1" dirty="0">
+                <a:solidFill>
+                  <a:srgbClr val="081F5C"/>
+                </a:solidFill>
+                <a:latin typeface="Arial" pitchFamily="34" charset="0"/>
+                <a:ea typeface="Arial" pitchFamily="34" charset="-122"/>
+                <a:cs typeface="Arial" pitchFamily="34" charset="-120"/>
+              </a:rPr>
+              <a:t>Power BI semantic model</a:t>
+            </a:r>
+            <a:endParaRPr lang="en-US" sz="690" dirty="0"/>
+          </a:p>
+        </p:txBody>
+      </p:sp>
+      <p:sp>
+        <p:nvSpPr>
+          <p:cNvPr id="19" name="Text 17"/>
+          <p:cNvSpPr/>
+          <p:nvPr/>
+        </p:nvSpPr>
+        <p:spPr>
+          <a:xfrm>
+            <a:off x="1188720" y="1682496"/>
+            <a:ext cx="1536192" cy="457200"/>
+          </a:xfrm>
+          <a:prstGeom prst="rect">
+            <a:avLst/>
+          </a:prstGeom>
+          <a:noFill/>
+          <a:ln/>
+        </p:spPr>
+        <p:txBody>
+          <a:bodyPr wrap="square" lIns="0" tIns="0" rIns="0" bIns="0" rtlCol="0" anchor="t"/>
+          <a:lstStyle/>
+          <a:p>
+            <a:pPr algn="ctr" indent="0" marL="0">
+              <a:lnSpc>
+                <a:spcPct val="92000"/>
+              </a:lnSpc>
+              <a:buNone/>
+            </a:pPr>
+            <a:r>
+              <a:rPr lang="en-US" sz="630" i="1" dirty="0">
+                <a:solidFill>
+                  <a:srgbClr val="2E4A85"/>
+                </a:solidFill>
+                <a:latin typeface="Arial" pitchFamily="34" charset="0"/>
+                <a:ea typeface="Arial" pitchFamily="34" charset="-122"/>
+                <a:cs typeface="Arial" pitchFamily="34" charset="-120"/>
+              </a:rPr>
+              <a:t>Extract completeness: row count and high-water mark per table, CDC continuity</a:t>
+            </a:r>
+            <a:endParaRPr lang="en-US" sz="630" dirty="0"/>
+          </a:p>
+        </p:txBody>
+      </p:sp>
+      <p:sp>
+        <p:nvSpPr>
+          <p:cNvPr id="20" name="Text 18"/>
+          <p:cNvSpPr/>
+          <p:nvPr/>
+        </p:nvSpPr>
+        <p:spPr>
+          <a:xfrm>
+            <a:off x="2834640" y="1682496"/>
+            <a:ext cx="1536192" cy="457200"/>
+          </a:xfrm>
+          <a:prstGeom prst="rect">
+            <a:avLst/>
+          </a:prstGeom>
+          <a:noFill/>
+          <a:ln/>
+        </p:spPr>
+        <p:txBody>
+          <a:bodyPr wrap="square" lIns="0" tIns="0" rIns="0" bIns="0" rtlCol="0" anchor="t"/>
+          <a:lstStyle/>
+          <a:p>
+            <a:pPr algn="ctr" indent="0" marL="0">
+              <a:lnSpc>
+                <a:spcPct val="92000"/>
+              </a:lnSpc>
+              <a:buNone/>
+            </a:pPr>
+            <a:r>
+              <a:rPr lang="en-US" sz="630" i="1" dirty="0">
+                <a:solidFill>
+                  <a:srgbClr val="2E4A85"/>
+                </a:solidFill>
+                <a:latin typeface="Arial" pitchFamily="34" charset="0"/>
+                <a:ea typeface="Arial" pitchFamily="34" charset="-122"/>
+                <a:cs typeface="Arial" pitchFamily="34" charset="-120"/>
+              </a:rPr>
+              <a:t>DDL parity, type and precision mapping, checksum and business-key reconciliation</a:t>
+            </a:r>
+            <a:endParaRPr lang="en-US" sz="630" dirty="0"/>
+          </a:p>
+        </p:txBody>
+      </p:sp>
+      <p:sp>
+        <p:nvSpPr>
+          <p:cNvPr id="21" name="Text 19"/>
+          <p:cNvSpPr/>
+          <p:nvPr/>
+        </p:nvSpPr>
+        <p:spPr>
+          <a:xfrm>
+            <a:off x="4480560" y="1682496"/>
+            <a:ext cx="1536192" cy="457200"/>
+          </a:xfrm>
+          <a:prstGeom prst="rect">
+            <a:avLst/>
+          </a:prstGeom>
+          <a:noFill/>
+          <a:ln/>
+        </p:spPr>
+        <p:txBody>
+          <a:bodyPr wrap="square" lIns="0" tIns="0" rIns="0" bIns="0" rtlCol="0" anchor="t"/>
+          <a:lstStyle/>
+          <a:p>
+            <a:pPr algn="ctr" indent="0" marL="0">
+              <a:lnSpc>
+                <a:spcPct val="92000"/>
+              </a:lnSpc>
+              <a:buNone/>
+            </a:pPr>
+            <a:r>
+              <a:rPr lang="en-US" sz="630" i="1" dirty="0">
+                <a:solidFill>
+                  <a:srgbClr val="2E4A85"/>
+                </a:solidFill>
+                <a:latin typeface="Arial" pitchFamily="34" charset="0"/>
+                <a:ea typeface="Arial" pitchFamily="34" charset="-122"/>
+                <a:cs typeface="Arial" pitchFamily="34" charset="-120"/>
+              </a:rPr>
+              <a:t>Measure parity in DAX under the same filter context, RLS, refresh SLA</a:t>
+            </a:r>
+            <a:endParaRPr lang="en-US" sz="630" dirty="0"/>
+          </a:p>
+        </p:txBody>
+      </p:sp>
+      <p:sp>
+        <p:nvSpPr>
+          <p:cNvPr id="22" name="Shape 20"/>
+          <p:cNvSpPr/>
+          <p:nvPr/>
+        </p:nvSpPr>
+        <p:spPr>
+          <a:xfrm>
+            <a:off x="6858000" y="1188720"/>
+            <a:ext cx="2926080" cy="1243584"/>
+          </a:xfrm>
+          <a:prstGeom prst="rect">
+            <a:avLst/>
+          </a:prstGeom>
+          <a:solidFill>
+            <a:srgbClr val="ADDAFB"/>
+          </a:solidFill>
+          <a:ln w="6350">
+            <a:solidFill>
+              <a:srgbClr val="ADDAFB"/>
+            </a:solidFill>
+            <a:prstDash val="solid"/>
+          </a:ln>
+        </p:spPr>
+      </p:sp>
+      <p:sp>
+        <p:nvSpPr>
+          <p:cNvPr id="23" name="Text 21"/>
+          <p:cNvSpPr/>
+          <p:nvPr/>
+        </p:nvSpPr>
+        <p:spPr>
+          <a:xfrm>
+            <a:off x="6858000" y="1188720"/>
+            <a:ext cx="2926080" cy="1243584"/>
+          </a:xfrm>
+          <a:prstGeom prst="rect">
+            <a:avLst/>
+          </a:prstGeom>
+          <a:noFill/>
+          <a:ln/>
+        </p:spPr>
+        <p:txBody>
+          <a:bodyPr wrap="square" lIns="762" tIns="1143" rIns="1143" bIns="508" rtlCol="0" anchor="t"/>
+          <a:lstStyle/>
+          <a:p>
+            <a:pPr indent="0" marL="0">
+              <a:lnSpc>
+                <a:spcPct val="92000"/>
+              </a:lnSpc>
+              <a:spcAft>
+                <a:spcPts val="300"/>
+              </a:spcAft>
+              <a:buNone/>
+            </a:pPr>
+            <a:r>
+              <a:rPr lang="en-US" sz="720" b="1" dirty="0">
+                <a:solidFill>
+                  <a:srgbClr val="081F5C"/>
+                </a:solidFill>
+                <a:latin typeface="Arial" pitchFamily="34" charset="0"/>
+                <a:ea typeface="Arial" pitchFamily="34" charset="-122"/>
+                <a:cs typeface="Arial" pitchFamily="34" charset="-120"/>
+              </a:rPr>
+              <a:t>Automated checks  ·  Oracle 19c → MS SQL Server</a:t>
+            </a:r>
+            <a:endParaRPr lang="en-US" sz="720" dirty="0"/>
+          </a:p>
+          <a:p>
+            <a:pPr marL="342900" indent="-342900">
+              <a:lnSpc>
+                <a:spcPct val="92000"/>
+              </a:lnSpc>
+              <a:spcAft>
+                <a:spcPts val="200"/>
+              </a:spcAft>
+              <a:buSzPct val="100000"/>
+              <a:buChar char="•"/>
+            </a:pPr>
+            <a:r>
+              <a:rPr lang="en-US" sz="640" dirty="0">
+                <a:solidFill>
+                  <a:srgbClr val="1A1A1A"/>
+                </a:solidFill>
+                <a:latin typeface="Arial" pitchFamily="34" charset="0"/>
+                <a:ea typeface="Arial" pitchFamily="34" charset="-122"/>
+                <a:cs typeface="Arial" pitchFamily="34" charset="-120"/>
+              </a:rPr>
+              <a:t>DDL and type mapping: NUMBER(p,s) to DECIMAL, VARCHAR2 to VARCHAR, DATE to DATETIME2, CLOB to VARCHAR(MAX)</a:t>
+            </a:r>
+            <a:endParaRPr lang="en-US" sz="720" dirty="0"/>
+          </a:p>
+          <a:p>
+            <a:pPr marL="342900" indent="-342900">
+              <a:lnSpc>
+                <a:spcPct val="92000"/>
+              </a:lnSpc>
+              <a:spcAft>
+                <a:spcPts val="200"/>
+              </a:spcAft>
+              <a:buSzPct val="100000"/>
+              <a:buChar char="•"/>
+            </a:pPr>
+            <a:r>
+              <a:rPr lang="en-US" sz="640" dirty="0">
+                <a:solidFill>
+                  <a:srgbClr val="1A1A1A"/>
+                </a:solidFill>
+                <a:latin typeface="Arial" pitchFamily="34" charset="0"/>
+                <a:ea typeface="Arial" pitchFamily="34" charset="-122"/>
+                <a:cs typeface="Arial" pitchFamily="34" charset="-120"/>
+              </a:rPr>
+              <a:t>Collation and case sensitivity — Oracle compares case-sensitively, SQL Server does not by default, which silently changes joins and filters</a:t>
+            </a:r>
+            <a:endParaRPr lang="en-US" sz="720" dirty="0"/>
+          </a:p>
+          <a:p>
+            <a:pPr marL="342900" indent="-342900">
+              <a:lnSpc>
+                <a:spcPct val="92000"/>
+              </a:lnSpc>
+              <a:spcAft>
+                <a:spcPts val="200"/>
+              </a:spcAft>
+              <a:buSzPct val="100000"/>
+              <a:buChar char="•"/>
+            </a:pPr>
+            <a:r>
+              <a:rPr lang="en-US" sz="640" dirty="0">
+                <a:solidFill>
+                  <a:srgbClr val="1A1A1A"/>
+                </a:solidFill>
+                <a:latin typeface="Arial" pitchFamily="34" charset="0"/>
+                <a:ea typeface="Arial" pitchFamily="34" charset="-122"/>
+                <a:cs typeface="Arial" pitchFamily="34" charset="-120"/>
+              </a:rPr>
+              <a:t>Row count, column checksum, business-key uniqueness, orphan foreign keys, NULL-ratio drift</a:t>
+            </a:r>
+            <a:endParaRPr lang="en-US" sz="720" dirty="0"/>
+          </a:p>
+          <a:p>
+            <a:pPr marL="342900" indent="-342900">
+              <a:lnSpc>
+                <a:spcPct val="92000"/>
+              </a:lnSpc>
+              <a:spcAft>
+                <a:spcPts val="200"/>
+              </a:spcAft>
+              <a:buSzPct val="100000"/>
+              <a:buChar char="•"/>
+            </a:pPr>
+            <a:r>
+              <a:rPr lang="en-US" sz="640" dirty="0">
+                <a:solidFill>
+                  <a:srgbClr val="1A1A1A"/>
+                </a:solidFill>
+                <a:latin typeface="Arial" pitchFamily="34" charset="0"/>
+                <a:ea typeface="Arial" pitchFamily="34" charset="-122"/>
+                <a:cs typeface="Arial" pitchFamily="34" charset="-120"/>
+              </a:rPr>
+              <a:t>Converted T-SQL procedure re-run on pinned inputs and diffed against the Oracle package output</a:t>
+            </a:r>
+            <a:endParaRPr lang="en-US" sz="720" dirty="0"/>
+          </a:p>
+          <a:p>
+            <a:pPr marL="342900" indent="-342900">
+              <a:lnSpc>
+                <a:spcPct val="92000"/>
+              </a:lnSpc>
+              <a:spcAft>
+                <a:spcPts val="200"/>
+              </a:spcAft>
+              <a:buSzPct val="100000"/>
+              <a:buChar char="•"/>
+            </a:pPr>
+            <a:r>
+              <a:rPr lang="en-US" sz="640" dirty="0">
+                <a:solidFill>
+                  <a:srgbClr val="1A1A1A"/>
+                </a:solidFill>
+                <a:latin typeface="Arial" pitchFamily="34" charset="0"/>
+                <a:ea typeface="Arial" pitchFamily="34" charset="-122"/>
+                <a:cs typeface="Arial" pitchFamily="34" charset="-120"/>
+              </a:rPr>
+              <a:t>Domain control totals — encounter counts, charge amounts and member months balanced across the subject area</a:t>
+            </a:r>
+            <a:endParaRPr lang="en-US" sz="720" dirty="0"/>
+          </a:p>
+        </p:txBody>
+      </p:sp>
+      <p:sp>
+        <p:nvSpPr>
+          <p:cNvPr id="24" name="Shape 22"/>
+          <p:cNvSpPr/>
+          <p:nvPr/>
+        </p:nvSpPr>
+        <p:spPr>
+          <a:xfrm>
+            <a:off x="384048" y="2578608"/>
+            <a:ext cx="9464040" cy="219456"/>
+          </a:xfrm>
+          <a:prstGeom prst="rect">
+            <a:avLst/>
+          </a:prstGeom>
+          <a:solidFill>
+            <a:srgbClr val="3E6DA8"/>
+          </a:solidFill>
+          <a:ln w="6350">
+            <a:solidFill>
+              <a:srgbClr val="3E6DA8"/>
+            </a:solidFill>
+            <a:prstDash val="solid"/>
+          </a:ln>
+        </p:spPr>
+      </p:sp>
+      <p:sp>
+        <p:nvSpPr>
+          <p:cNvPr id="25" name="Text 23"/>
+          <p:cNvSpPr/>
+          <p:nvPr/>
+        </p:nvSpPr>
+        <p:spPr>
+          <a:xfrm>
+            <a:off x="475488" y="2578608"/>
+            <a:ext cx="7360920" cy="219456"/>
+          </a:xfrm>
+          <a:prstGeom prst="rect">
+            <a:avLst/>
+          </a:prstGeom>
+          <a:noFill/>
+          <a:ln/>
+        </p:spPr>
+        <p:txBody>
+          <a:bodyPr wrap="square" lIns="0" tIns="0" rIns="0" bIns="0" rtlCol="0" anchor="ctr"/>
+          <a:lstStyle/>
+          <a:p>
+            <a:pPr indent="0" marL="0">
+              <a:buNone/>
+            </a:pPr>
+            <a:r>
+              <a:rPr lang="en-US" sz="850" b="1" dirty="0">
+                <a:solidFill>
+                  <a:srgbClr val="FFFFFF"/>
+                </a:solidFill>
+                <a:latin typeface="Arial" pitchFamily="34" charset="0"/>
+                <a:ea typeface="Arial" pitchFamily="34" charset="-122"/>
+                <a:cs typeface="Arial" pitchFamily="34" charset="-120"/>
+              </a:rPr>
+              <a:t>2 · Database objects   Oracle 19c  →  Delta and Unity Catalog        feeds Databricks AI/BI</a:t>
+            </a:r>
+            <a:endParaRPr lang="en-US" sz="850" dirty="0"/>
+          </a:p>
+        </p:txBody>
+      </p:sp>
+      <p:sp>
+        <p:nvSpPr>
+          <p:cNvPr id="26" name="Text 24"/>
+          <p:cNvSpPr/>
+          <p:nvPr/>
+        </p:nvSpPr>
+        <p:spPr>
+          <a:xfrm>
+            <a:off x="7744968" y="2578608"/>
+            <a:ext cx="2011680" cy="219456"/>
+          </a:xfrm>
+          <a:prstGeom prst="rect">
+            <a:avLst/>
+          </a:prstGeom>
+          <a:noFill/>
+          <a:ln/>
+        </p:spPr>
+        <p:txBody>
+          <a:bodyPr wrap="square" lIns="0" tIns="0" rIns="0" bIns="0" rtlCol="0" anchor="ctr"/>
+          <a:lstStyle/>
+          <a:p>
+            <a:pPr algn="r" indent="0" marL="0">
+              <a:buNone/>
+            </a:pPr>
+            <a:r>
+              <a:rPr lang="en-US" sz="700" i="1" dirty="0">
+                <a:solidFill>
+                  <a:srgbClr val="E3E9F5"/>
+                </a:solidFill>
+                <a:latin typeface="Arial" pitchFamily="34" charset="0"/>
+                <a:ea typeface="Arial" pitchFamily="34" charset="-122"/>
+                <a:cs typeface="Arial" pitchFamily="34" charset="-120"/>
+              </a:rPr>
+              <a:t>CATE Test Engine</a:t>
+            </a:r>
+            <a:endParaRPr lang="en-US" sz="700" dirty="0"/>
+          </a:p>
+        </p:txBody>
+      </p:sp>
+      <p:sp>
+        <p:nvSpPr>
+          <p:cNvPr id="27" name="Shape 25"/>
+          <p:cNvSpPr/>
+          <p:nvPr/>
+        </p:nvSpPr>
+        <p:spPr>
+          <a:xfrm>
+            <a:off x="384048" y="2798064"/>
+            <a:ext cx="9464040" cy="1353312"/>
+          </a:xfrm>
+          <a:prstGeom prst="rect">
+            <a:avLst/>
+          </a:prstGeom>
+          <a:solidFill>
+            <a:srgbClr val="FCFDFE"/>
+          </a:solidFill>
+          <a:ln w="9525">
+            <a:solidFill>
+              <a:srgbClr val="DCE6F0"/>
+            </a:solidFill>
+            <a:prstDash val="solid"/>
+          </a:ln>
+        </p:spPr>
+      </p:sp>
+      <p:sp>
+        <p:nvSpPr>
+          <p:cNvPr id="28" name="Shape 26"/>
+          <p:cNvSpPr/>
+          <p:nvPr/>
+        </p:nvSpPr>
+        <p:spPr>
+          <a:xfrm>
+            <a:off x="530352" y="2871216"/>
+            <a:ext cx="1207008" cy="420624"/>
+          </a:xfrm>
+          <a:prstGeom prst="roundRect">
+            <a:avLst>
+              <a:gd name="adj" fmla="val 21739"/>
+            </a:avLst>
+          </a:prstGeom>
+          <a:solidFill>
+            <a:srgbClr val="FFFFFF"/>
+          </a:solidFill>
+          <a:ln w="15875">
+            <a:solidFill>
+              <a:srgbClr val="3E6DA8"/>
+            </a:solidFill>
+            <a:prstDash val="solid"/>
+          </a:ln>
+        </p:spPr>
+      </p:sp>
+      <p:sp>
+        <p:nvSpPr>
+          <p:cNvPr id="29" name="Text 27"/>
+          <p:cNvSpPr/>
+          <p:nvPr/>
+        </p:nvSpPr>
+        <p:spPr>
+          <a:xfrm>
+            <a:off x="530352" y="2871216"/>
+            <a:ext cx="1207008" cy="420624"/>
+          </a:xfrm>
+          <a:prstGeom prst="rect">
+            <a:avLst/>
+          </a:prstGeom>
+          <a:noFill/>
+          <a:ln/>
+        </p:spPr>
+        <p:txBody>
+          <a:bodyPr wrap="square" lIns="254" tIns="508" rIns="508" bIns="254" rtlCol="0" anchor="ctr"/>
+          <a:lstStyle/>
+          <a:p>
+            <a:pPr algn="ctr" indent="0" marL="0">
+              <a:lnSpc>
+                <a:spcPct val="92000"/>
+              </a:lnSpc>
+              <a:buNone/>
+            </a:pPr>
+            <a:r>
+              <a:rPr lang="en-US" sz="690" b="1" dirty="0">
+                <a:solidFill>
+                  <a:srgbClr val="081F5C"/>
+                </a:solidFill>
+                <a:latin typeface="Arial" pitchFamily="34" charset="0"/>
+                <a:ea typeface="Arial" pitchFamily="34" charset="-122"/>
+                <a:cs typeface="Arial" pitchFamily="34" charset="-120"/>
+              </a:rPr>
+              <a:t>Oracle 19c custom schema</a:t>
+            </a:r>
+            <a:endParaRPr lang="en-US" sz="690" dirty="0"/>
+          </a:p>
+        </p:txBody>
+      </p:sp>
+      <p:sp>
+        <p:nvSpPr>
+          <p:cNvPr id="30" name="Shape 28"/>
+          <p:cNvSpPr/>
+          <p:nvPr/>
+        </p:nvSpPr>
+        <p:spPr>
+          <a:xfrm>
+            <a:off x="1755648" y="3008376"/>
+            <a:ext cx="365760" cy="146304"/>
+          </a:xfrm>
+          <a:prstGeom prst="rightArrow">
+            <a:avLst/>
+          </a:prstGeom>
+          <a:solidFill>
+            <a:srgbClr val="3E6DA8"/>
+          </a:solidFill>
+          <a:ln w="6350">
+            <a:solidFill>
+              <a:srgbClr val="3E6DA8"/>
+            </a:solidFill>
+            <a:prstDash val="solid"/>
+          </a:ln>
+        </p:spPr>
+      </p:sp>
+      <p:sp>
+        <p:nvSpPr>
+          <p:cNvPr id="31" name="Shape 29"/>
+          <p:cNvSpPr/>
+          <p:nvPr/>
+        </p:nvSpPr>
+        <p:spPr>
+          <a:xfrm>
+            <a:off x="2176272" y="2871216"/>
+            <a:ext cx="1207008" cy="420624"/>
+          </a:xfrm>
+          <a:prstGeom prst="roundRect">
+            <a:avLst>
+              <a:gd name="adj" fmla="val 21739"/>
+            </a:avLst>
+          </a:prstGeom>
+          <a:solidFill>
+            <a:srgbClr val="FFFFFF"/>
+          </a:solidFill>
+          <a:ln w="15875">
+            <a:solidFill>
+              <a:srgbClr val="3E6DA8"/>
+            </a:solidFill>
+            <a:prstDash val="solid"/>
+          </a:ln>
+        </p:spPr>
+      </p:sp>
+      <p:sp>
+        <p:nvSpPr>
+          <p:cNvPr id="32" name="Text 30"/>
+          <p:cNvSpPr/>
+          <p:nvPr/>
+        </p:nvSpPr>
+        <p:spPr>
+          <a:xfrm>
+            <a:off x="2176272" y="2871216"/>
+            <a:ext cx="1207008" cy="420624"/>
+          </a:xfrm>
+          <a:prstGeom prst="rect">
+            <a:avLst/>
+          </a:prstGeom>
+          <a:noFill/>
+          <a:ln/>
+        </p:spPr>
+        <p:txBody>
+          <a:bodyPr wrap="square" lIns="254" tIns="508" rIns="508" bIns="254" rtlCol="0" anchor="ctr"/>
+          <a:lstStyle/>
+          <a:p>
+            <a:pPr algn="ctr" indent="0" marL="0">
+              <a:lnSpc>
+                <a:spcPct val="92000"/>
+              </a:lnSpc>
+              <a:buNone/>
+            </a:pPr>
+            <a:r>
+              <a:rPr lang="en-US" sz="690" b="1" dirty="0">
+                <a:solidFill>
+                  <a:srgbClr val="081F5C"/>
+                </a:solidFill>
+                <a:latin typeface="Arial" pitchFamily="34" charset="0"/>
+                <a:ea typeface="Arial" pitchFamily="34" charset="-122"/>
+                <a:cs typeface="Arial" pitchFamily="34" charset="-120"/>
+              </a:rPr>
+              <a:t>Bronze — Delta</a:t>
+            </a:r>
+            <a:endParaRPr lang="en-US" sz="690" dirty="0"/>
+          </a:p>
+        </p:txBody>
+      </p:sp>
+      <p:sp>
+        <p:nvSpPr>
+          <p:cNvPr id="33" name="Shape 31"/>
+          <p:cNvSpPr/>
+          <p:nvPr/>
+        </p:nvSpPr>
+        <p:spPr>
+          <a:xfrm>
+            <a:off x="3401568" y="3008376"/>
+            <a:ext cx="365760" cy="146304"/>
+          </a:xfrm>
+          <a:prstGeom prst="rightArrow">
+            <a:avLst/>
+          </a:prstGeom>
+          <a:solidFill>
+            <a:srgbClr val="3E6DA8"/>
+          </a:solidFill>
+          <a:ln w="6350">
+            <a:solidFill>
+              <a:srgbClr val="3E6DA8"/>
+            </a:solidFill>
+            <a:prstDash val="solid"/>
+          </a:ln>
+        </p:spPr>
+      </p:sp>
+      <p:sp>
+        <p:nvSpPr>
+          <p:cNvPr id="34" name="Shape 32"/>
+          <p:cNvSpPr/>
+          <p:nvPr/>
+        </p:nvSpPr>
+        <p:spPr>
+          <a:xfrm>
+            <a:off x="3822192" y="2871216"/>
+            <a:ext cx="1207008" cy="420624"/>
+          </a:xfrm>
+          <a:prstGeom prst="roundRect">
+            <a:avLst>
+              <a:gd name="adj" fmla="val 21739"/>
+            </a:avLst>
+          </a:prstGeom>
+          <a:solidFill>
+            <a:srgbClr val="FFFFFF"/>
+          </a:solidFill>
+          <a:ln w="15875">
+            <a:solidFill>
+              <a:srgbClr val="3E6DA8"/>
+            </a:solidFill>
+            <a:prstDash val="solid"/>
+          </a:ln>
+        </p:spPr>
+      </p:sp>
+      <p:sp>
+        <p:nvSpPr>
+          <p:cNvPr id="35" name="Text 33"/>
+          <p:cNvSpPr/>
+          <p:nvPr/>
+        </p:nvSpPr>
+        <p:spPr>
+          <a:xfrm>
+            <a:off x="3822192" y="2871216"/>
+            <a:ext cx="1207008" cy="420624"/>
+          </a:xfrm>
+          <a:prstGeom prst="rect">
+            <a:avLst/>
+          </a:prstGeom>
+          <a:noFill/>
+          <a:ln/>
+        </p:spPr>
+        <p:txBody>
+          <a:bodyPr wrap="square" lIns="254" tIns="508" rIns="508" bIns="254" rtlCol="0" anchor="ctr"/>
+          <a:lstStyle/>
+          <a:p>
+            <a:pPr algn="ctr" indent="0" marL="0">
+              <a:lnSpc>
+                <a:spcPct val="92000"/>
+              </a:lnSpc>
+              <a:buNone/>
+            </a:pPr>
+            <a:r>
+              <a:rPr lang="en-US" sz="690" b="1" dirty="0">
+                <a:solidFill>
+                  <a:srgbClr val="081F5C"/>
+                </a:solidFill>
+                <a:latin typeface="Arial" pitchFamily="34" charset="0"/>
+                <a:ea typeface="Arial" pitchFamily="34" charset="-122"/>
+                <a:cs typeface="Arial" pitchFamily="34" charset="-120"/>
+              </a:rPr>
+              <a:t>Silver &amp; gold — Unity Catalog</a:t>
+            </a:r>
+            <a:endParaRPr lang="en-US" sz="690" dirty="0"/>
+          </a:p>
+        </p:txBody>
+      </p:sp>
+      <p:sp>
+        <p:nvSpPr>
+          <p:cNvPr id="36" name="Shape 34"/>
+          <p:cNvSpPr/>
+          <p:nvPr/>
+        </p:nvSpPr>
+        <p:spPr>
+          <a:xfrm>
+            <a:off x="5047488" y="3008376"/>
+            <a:ext cx="365760" cy="146304"/>
+          </a:xfrm>
+          <a:prstGeom prst="rightArrow">
+            <a:avLst/>
+          </a:prstGeom>
+          <a:solidFill>
+            <a:srgbClr val="3E6DA8"/>
+          </a:solidFill>
+          <a:ln w="6350">
+            <a:solidFill>
+              <a:srgbClr val="3E6DA8"/>
+            </a:solidFill>
+            <a:prstDash val="solid"/>
+          </a:ln>
+        </p:spPr>
+      </p:sp>
+      <p:sp>
+        <p:nvSpPr>
+          <p:cNvPr id="37" name="Shape 35"/>
+          <p:cNvSpPr/>
+          <p:nvPr/>
+        </p:nvSpPr>
+        <p:spPr>
+          <a:xfrm>
+            <a:off x="5468112" y="2871216"/>
+            <a:ext cx="1207008" cy="420624"/>
+          </a:xfrm>
+          <a:prstGeom prst="roundRect">
+            <a:avLst>
+              <a:gd name="adj" fmla="val 21739"/>
+            </a:avLst>
+          </a:prstGeom>
+          <a:solidFill>
+            <a:srgbClr val="FFFFFF"/>
+          </a:solidFill>
+          <a:ln w="15875">
+            <a:solidFill>
+              <a:srgbClr val="3E6DA8"/>
+            </a:solidFill>
+            <a:prstDash val="solid"/>
+          </a:ln>
+        </p:spPr>
+      </p:sp>
+      <p:sp>
+        <p:nvSpPr>
+          <p:cNvPr id="38" name="Text 36"/>
+          <p:cNvSpPr/>
+          <p:nvPr/>
+        </p:nvSpPr>
+        <p:spPr>
+          <a:xfrm>
+            <a:off x="5468112" y="2871216"/>
+            <a:ext cx="1207008" cy="420624"/>
+          </a:xfrm>
+          <a:prstGeom prst="rect">
+            <a:avLst/>
+          </a:prstGeom>
+          <a:noFill/>
+          <a:ln/>
+        </p:spPr>
+        <p:txBody>
+          <a:bodyPr wrap="square" lIns="254" tIns="508" rIns="508" bIns="254" rtlCol="0" anchor="ctr"/>
+          <a:lstStyle/>
+          <a:p>
+            <a:pPr algn="ctr" indent="0" marL="0">
+              <a:lnSpc>
+                <a:spcPct val="92000"/>
+              </a:lnSpc>
+              <a:buNone/>
+            </a:pPr>
+            <a:r>
+              <a:rPr lang="en-US" sz="690" b="1" dirty="0">
+                <a:solidFill>
+                  <a:srgbClr val="081F5C"/>
+                </a:solidFill>
+                <a:latin typeface="Arial" pitchFamily="34" charset="0"/>
+                <a:ea typeface="Arial" pitchFamily="34" charset="-122"/>
+                <a:cs typeface="Arial" pitchFamily="34" charset="-120"/>
+              </a:rPr>
+              <a:t>AI/BI dashboard &amp; Genie</a:t>
+            </a:r>
+            <a:endParaRPr lang="en-US" sz="690" dirty="0"/>
+          </a:p>
+        </p:txBody>
+      </p:sp>
+      <p:sp>
+        <p:nvSpPr>
+          <p:cNvPr id="39" name="Text 37"/>
+          <p:cNvSpPr/>
+          <p:nvPr/>
+        </p:nvSpPr>
+        <p:spPr>
+          <a:xfrm>
+            <a:off x="1188720" y="3346704"/>
+            <a:ext cx="1536192" cy="457200"/>
+          </a:xfrm>
+          <a:prstGeom prst="rect">
+            <a:avLst/>
+          </a:prstGeom>
+          <a:noFill/>
+          <a:ln/>
+        </p:spPr>
+        <p:txBody>
+          <a:bodyPr wrap="square" lIns="0" tIns="0" rIns="0" bIns="0" rtlCol="0" anchor="t"/>
+          <a:lstStyle/>
+          <a:p>
+            <a:pPr algn="ctr" indent="0" marL="0">
+              <a:lnSpc>
+                <a:spcPct val="92000"/>
+              </a:lnSpc>
+              <a:buNone/>
+            </a:pPr>
+            <a:r>
+              <a:rPr lang="en-US" sz="630" i="1" dirty="0">
+                <a:solidFill>
+                  <a:srgbClr val="2E4A85"/>
+                </a:solidFill>
+                <a:latin typeface="Arial" pitchFamily="34" charset="0"/>
+                <a:ea typeface="Arial" pitchFamily="34" charset="-122"/>
+                <a:cs typeface="Arial" pitchFamily="34" charset="-120"/>
+              </a:rPr>
+              <a:t>Ingest completeness: row count, watermark, CDC continuity, late-arriving records</a:t>
+            </a:r>
+            <a:endParaRPr lang="en-US" sz="630" dirty="0"/>
+          </a:p>
+        </p:txBody>
+      </p:sp>
+      <p:sp>
+        <p:nvSpPr>
+          <p:cNvPr id="40" name="Text 38"/>
+          <p:cNvSpPr/>
+          <p:nvPr/>
+        </p:nvSpPr>
+        <p:spPr>
+          <a:xfrm>
+            <a:off x="2834640" y="3346704"/>
+            <a:ext cx="1536192" cy="457200"/>
+          </a:xfrm>
+          <a:prstGeom prst="rect">
+            <a:avLst/>
+          </a:prstGeom>
+          <a:noFill/>
+          <a:ln/>
+        </p:spPr>
+        <p:txBody>
+          <a:bodyPr wrap="square" lIns="0" tIns="0" rIns="0" bIns="0" rtlCol="0" anchor="t"/>
+          <a:lstStyle/>
+          <a:p>
+            <a:pPr algn="ctr" indent="0" marL="0">
+              <a:lnSpc>
+                <a:spcPct val="92000"/>
+              </a:lnSpc>
+              <a:buNone/>
+            </a:pPr>
+            <a:r>
+              <a:rPr lang="en-US" sz="630" i="1" dirty="0">
+                <a:solidFill>
+                  <a:srgbClr val="2E4A85"/>
+                </a:solidFill>
+                <a:latin typeface="Arial" pitchFamily="34" charset="0"/>
+                <a:ea typeface="Arial" pitchFamily="34" charset="-122"/>
+                <a:cs typeface="Arial" pitchFamily="34" charset="-120"/>
+              </a:rPr>
+              <a:t>Delta DDL parity, type mapping, checksum, procedural logic re-run diff</a:t>
+            </a:r>
+            <a:endParaRPr lang="en-US" sz="630" dirty="0"/>
+          </a:p>
+        </p:txBody>
+      </p:sp>
+      <p:sp>
+        <p:nvSpPr>
+          <p:cNvPr id="41" name="Text 39"/>
+          <p:cNvSpPr/>
+          <p:nvPr/>
+        </p:nvSpPr>
+        <p:spPr>
+          <a:xfrm>
+            <a:off x="4480560" y="3346704"/>
+            <a:ext cx="1536192" cy="457200"/>
+          </a:xfrm>
+          <a:prstGeom prst="rect">
+            <a:avLst/>
+          </a:prstGeom>
+          <a:noFill/>
+          <a:ln/>
+        </p:spPr>
+        <p:txBody>
+          <a:bodyPr wrap="square" lIns="0" tIns="0" rIns="0" bIns="0" rtlCol="0" anchor="t"/>
+          <a:lstStyle/>
+          <a:p>
+            <a:pPr algn="ctr" indent="0" marL="0">
+              <a:lnSpc>
+                <a:spcPct val="92000"/>
+              </a:lnSpc>
+              <a:buNone/>
+            </a:pPr>
+            <a:r>
+              <a:rPr lang="en-US" sz="630" i="1" dirty="0">
+                <a:solidFill>
+                  <a:srgbClr val="2E4A85"/>
+                </a:solidFill>
+                <a:latin typeface="Arial" pitchFamily="34" charset="0"/>
+                <a:ea typeface="Arial" pitchFamily="34" charset="-122"/>
+                <a:cs typeface="Arial" pitchFamily="34" charset="-120"/>
+              </a:rPr>
+              <a:t>Metric view parity, UC row filter and mask enforcement, Genie known-answer set</a:t>
+            </a:r>
+            <a:endParaRPr lang="en-US" sz="630" dirty="0"/>
+          </a:p>
+        </p:txBody>
+      </p:sp>
+      <p:sp>
+        <p:nvSpPr>
+          <p:cNvPr id="42" name="Shape 40"/>
+          <p:cNvSpPr/>
+          <p:nvPr/>
+        </p:nvSpPr>
+        <p:spPr>
+          <a:xfrm>
+            <a:off x="6858000" y="2852928"/>
+            <a:ext cx="2926080" cy="1243584"/>
+          </a:xfrm>
+          <a:prstGeom prst="rect">
+            <a:avLst/>
+          </a:prstGeom>
+          <a:solidFill>
+            <a:srgbClr val="ADDAFB"/>
+          </a:solidFill>
+          <a:ln w="6350">
+            <a:solidFill>
+              <a:srgbClr val="ADDAFB"/>
+            </a:solidFill>
+            <a:prstDash val="solid"/>
+          </a:ln>
+        </p:spPr>
+      </p:sp>
+      <p:sp>
+        <p:nvSpPr>
+          <p:cNvPr id="43" name="Text 41"/>
+          <p:cNvSpPr/>
+          <p:nvPr/>
+        </p:nvSpPr>
+        <p:spPr>
+          <a:xfrm>
+            <a:off x="6858000" y="2852928"/>
+            <a:ext cx="2926080" cy="1243584"/>
+          </a:xfrm>
+          <a:prstGeom prst="rect">
+            <a:avLst/>
+          </a:prstGeom>
+          <a:noFill/>
+          <a:ln/>
+        </p:spPr>
+        <p:txBody>
+          <a:bodyPr wrap="square" lIns="762" tIns="1143" rIns="1143" bIns="508" rtlCol="0" anchor="t"/>
+          <a:lstStyle/>
+          <a:p>
+            <a:pPr indent="0" marL="0">
+              <a:lnSpc>
+                <a:spcPct val="92000"/>
+              </a:lnSpc>
+              <a:spcAft>
+                <a:spcPts val="300"/>
+              </a:spcAft>
+              <a:buNone/>
+            </a:pPr>
+            <a:r>
+              <a:rPr lang="en-US" sz="720" b="1" dirty="0">
+                <a:solidFill>
+                  <a:srgbClr val="081F5C"/>
+                </a:solidFill>
+                <a:latin typeface="Arial" pitchFamily="34" charset="0"/>
+                <a:ea typeface="Arial" pitchFamily="34" charset="-122"/>
+                <a:cs typeface="Arial" pitchFamily="34" charset="-120"/>
+              </a:rPr>
+              <a:t>Automated checks  ·  Oracle 19c → Delta and Unity Catalog</a:t>
+            </a:r>
+            <a:endParaRPr lang="en-US" sz="720" dirty="0"/>
+          </a:p>
+          <a:p>
+            <a:pPr marL="342900" indent="-342900">
+              <a:lnSpc>
+                <a:spcPct val="92000"/>
+              </a:lnSpc>
+              <a:spcAft>
+                <a:spcPts val="200"/>
+              </a:spcAft>
+              <a:buSzPct val="100000"/>
+              <a:buChar char="•"/>
+            </a:pPr>
+            <a:r>
+              <a:rPr lang="en-US" sz="640" dirty="0">
+                <a:solidFill>
+                  <a:srgbClr val="1A1A1A"/>
+                </a:solidFill>
+                <a:latin typeface="Arial" pitchFamily="34" charset="0"/>
+                <a:ea typeface="Arial" pitchFamily="34" charset="-122"/>
+                <a:cs typeface="Arial" pitchFamily="34" charset="-120"/>
+              </a:rPr>
+              <a:t>DDL and type mapping: NUMBER(p,s) to DECIMAL, DATE to TIMESTAMP normalised to UTC, no informational-only constraint relied on</a:t>
+            </a:r>
+            <a:endParaRPr lang="en-US" sz="720" dirty="0"/>
+          </a:p>
+          <a:p>
+            <a:pPr marL="342900" indent="-342900">
+              <a:lnSpc>
+                <a:spcPct val="92000"/>
+              </a:lnSpc>
+              <a:spcAft>
+                <a:spcPts val="200"/>
+              </a:spcAft>
+              <a:buSzPct val="100000"/>
+              <a:buChar char="•"/>
+            </a:pPr>
+            <a:r>
+              <a:rPr lang="en-US" sz="640" dirty="0">
+                <a:solidFill>
+                  <a:srgbClr val="1A1A1A"/>
+                </a:solidFill>
+                <a:latin typeface="Arial" pitchFamily="34" charset="0"/>
+                <a:ea typeface="Arial" pitchFamily="34" charset="-122"/>
+                <a:cs typeface="Arial" pitchFamily="34" charset="-120"/>
+              </a:rPr>
+              <a:t>Timezone and date-boundary check after the UTC shift — day-grain aggregates move if this is missed</a:t>
+            </a:r>
+            <a:endParaRPr lang="en-US" sz="720" dirty="0"/>
+          </a:p>
+          <a:p>
+            <a:pPr marL="342900" indent="-342900">
+              <a:lnSpc>
+                <a:spcPct val="92000"/>
+              </a:lnSpc>
+              <a:spcAft>
+                <a:spcPts val="200"/>
+              </a:spcAft>
+              <a:buSzPct val="100000"/>
+              <a:buChar char="•"/>
+            </a:pPr>
+            <a:r>
+              <a:rPr lang="en-US" sz="640" dirty="0">
+                <a:solidFill>
+                  <a:srgbClr val="1A1A1A"/>
+                </a:solidFill>
+                <a:latin typeface="Arial" pitchFamily="34" charset="0"/>
+                <a:ea typeface="Arial" pitchFamily="34" charset="-122"/>
+                <a:cs typeface="Arial" pitchFamily="34" charset="-120"/>
+              </a:rPr>
+              <a:t>Row count, column checksum, business-key uniqueness, duplicate detection after MERGE, late-arriving CDC handling</a:t>
+            </a:r>
+            <a:endParaRPr lang="en-US" sz="720" dirty="0"/>
+          </a:p>
+          <a:p>
+            <a:pPr marL="342900" indent="-342900">
+              <a:lnSpc>
+                <a:spcPct val="92000"/>
+              </a:lnSpc>
+              <a:spcAft>
+                <a:spcPts val="200"/>
+              </a:spcAft>
+              <a:buSzPct val="100000"/>
+              <a:buChar char="•"/>
+            </a:pPr>
+            <a:r>
+              <a:rPr lang="en-US" sz="640" dirty="0">
+                <a:solidFill>
+                  <a:srgbClr val="1A1A1A"/>
+                </a:solidFill>
+                <a:latin typeface="Arial" pitchFamily="34" charset="0"/>
+                <a:ea typeface="Arial" pitchFamily="34" charset="-122"/>
+                <a:cs typeface="Arial" pitchFamily="34" charset="-120"/>
+              </a:rPr>
+              <a:t>Converted SQL UDF, notebook or DLT logic re-run on pinned inputs and diffed against the Oracle package</a:t>
+            </a:r>
+            <a:endParaRPr lang="en-US" sz="720" dirty="0"/>
+          </a:p>
+          <a:p>
+            <a:pPr marL="342900" indent="-342900">
+              <a:lnSpc>
+                <a:spcPct val="92000"/>
+              </a:lnSpc>
+              <a:spcAft>
+                <a:spcPts val="200"/>
+              </a:spcAft>
+              <a:buSzPct val="100000"/>
+              <a:buChar char="•"/>
+            </a:pPr>
+            <a:r>
+              <a:rPr lang="en-US" sz="640" dirty="0">
+                <a:solidFill>
+                  <a:srgbClr val="1A1A1A"/>
+                </a:solidFill>
+                <a:latin typeface="Arial" pitchFamily="34" charset="0"/>
+                <a:ea typeface="Arial" pitchFamily="34" charset="-122"/>
+                <a:cs typeface="Arial" pitchFamily="34" charset="-120"/>
+              </a:rPr>
+              <a:t>NULL ordering: Oracle sorts NULLS LAST by default, which changes every TOP-N and ranked result</a:t>
+            </a:r>
+            <a:endParaRPr lang="en-US" sz="720" dirty="0"/>
+          </a:p>
+        </p:txBody>
+      </p:sp>
+      <p:sp>
+        <p:nvSpPr>
+          <p:cNvPr id="44" name="Shape 42"/>
+          <p:cNvSpPr/>
+          <p:nvPr/>
+        </p:nvSpPr>
+        <p:spPr>
+          <a:xfrm>
+            <a:off x="384048" y="4242816"/>
+            <a:ext cx="9464040" cy="219456"/>
+          </a:xfrm>
+          <a:prstGeom prst="rect">
+            <a:avLst/>
+          </a:prstGeom>
+          <a:solidFill>
+            <a:srgbClr val="081F5C"/>
+          </a:solidFill>
+          <a:ln w="6350">
+            <a:solidFill>
+              <a:srgbClr val="081F5C"/>
+            </a:solidFill>
+            <a:prstDash val="solid"/>
+          </a:ln>
+        </p:spPr>
+      </p:sp>
+      <p:sp>
+        <p:nvSpPr>
+          <p:cNvPr id="45" name="Text 43"/>
+          <p:cNvSpPr/>
+          <p:nvPr/>
+        </p:nvSpPr>
+        <p:spPr>
+          <a:xfrm>
+            <a:off x="475488" y="4242816"/>
+            <a:ext cx="7360920" cy="219456"/>
+          </a:xfrm>
+          <a:prstGeom prst="rect">
+            <a:avLst/>
+          </a:prstGeom>
+          <a:noFill/>
+          <a:ln/>
+        </p:spPr>
+        <p:txBody>
+          <a:bodyPr wrap="square" lIns="0" tIns="0" rIns="0" bIns="0" rtlCol="0" anchor="ctr"/>
+          <a:lstStyle/>
+          <a:p>
+            <a:pPr indent="0" marL="0">
+              <a:buNone/>
+            </a:pPr>
+            <a:r>
+              <a:rPr lang="en-US" sz="850" b="1" dirty="0">
+                <a:solidFill>
+                  <a:srgbClr val="FFFFFF"/>
+                </a:solidFill>
+                <a:latin typeface="Arial" pitchFamily="34" charset="0"/>
+                <a:ea typeface="Arial" pitchFamily="34" charset="-122"/>
+                <a:cs typeface="Arial" pitchFamily="34" charset="-120"/>
+              </a:rPr>
+              <a:t>3 · Report validation by disposition        every rebuilt report is proved against its BOBJ baseline before release</a:t>
+            </a:r>
+            <a:endParaRPr lang="en-US" sz="850" dirty="0"/>
+          </a:p>
+        </p:txBody>
+      </p:sp>
+      <p:sp>
+        <p:nvSpPr>
+          <p:cNvPr id="46" name="Text 44"/>
+          <p:cNvSpPr/>
+          <p:nvPr/>
+        </p:nvSpPr>
+        <p:spPr>
+          <a:xfrm>
+            <a:off x="7744968" y="4242816"/>
+            <a:ext cx="2011680" cy="219456"/>
+          </a:xfrm>
+          <a:prstGeom prst="rect">
+            <a:avLst/>
+          </a:prstGeom>
+          <a:noFill/>
+          <a:ln/>
+        </p:spPr>
+        <p:txBody>
+          <a:bodyPr wrap="square" lIns="0" tIns="0" rIns="0" bIns="0" rtlCol="0" anchor="ctr"/>
+          <a:lstStyle/>
+          <a:p>
+            <a:pPr algn="r" indent="0" marL="0">
+              <a:buNone/>
+            </a:pPr>
+            <a:r>
+              <a:rPr lang="en-US" sz="700" i="1" dirty="0">
+                <a:solidFill>
+                  <a:srgbClr val="E3E9F5"/>
+                </a:solidFill>
+                <a:latin typeface="Arial" pitchFamily="34" charset="0"/>
+                <a:ea typeface="Arial" pitchFamily="34" charset="-122"/>
+                <a:cs typeface="Arial" pitchFamily="34" charset="-120"/>
+              </a:rPr>
+              <a:t>Automated Report Tester</a:t>
+            </a:r>
+            <a:endParaRPr lang="en-US" sz="700" dirty="0"/>
+          </a:p>
+        </p:txBody>
+      </p:sp>
+      <p:sp>
+        <p:nvSpPr>
+          <p:cNvPr id="47" name="Shape 45"/>
+          <p:cNvSpPr/>
+          <p:nvPr/>
+        </p:nvSpPr>
+        <p:spPr>
+          <a:xfrm>
+            <a:off x="384048" y="4535424"/>
+            <a:ext cx="2269998" cy="201168"/>
+          </a:xfrm>
+          <a:prstGeom prst="rect">
+            <a:avLst/>
+          </a:prstGeom>
+          <a:solidFill>
+            <a:srgbClr val="68349A"/>
+          </a:solidFill>
+          <a:ln w="6350">
+            <a:solidFill>
+              <a:srgbClr val="68349A"/>
+            </a:solidFill>
+            <a:prstDash val="solid"/>
+          </a:ln>
+        </p:spPr>
+      </p:sp>
+      <p:sp>
+        <p:nvSpPr>
+          <p:cNvPr id="48" name="Text 46"/>
+          <p:cNvSpPr/>
+          <p:nvPr/>
+        </p:nvSpPr>
+        <p:spPr>
+          <a:xfrm>
+            <a:off x="384048" y="4535424"/>
+            <a:ext cx="2269998" cy="201168"/>
+          </a:xfrm>
+          <a:prstGeom prst="rect">
+            <a:avLst/>
+          </a:prstGeom>
+          <a:noFill/>
+          <a:ln/>
+        </p:spPr>
+        <p:txBody>
+          <a:bodyPr wrap="square" lIns="0" tIns="0" rIns="0" bIns="0" rtlCol="0" anchor="ctr"/>
+          <a:lstStyle/>
+          <a:p>
+            <a:pPr algn="ctr" indent="0" marL="0">
+              <a:buNone/>
+            </a:pPr>
+            <a:r>
+              <a:rPr lang="en-US" sz="800" b="1" dirty="0">
+                <a:solidFill>
+                  <a:srgbClr val="FFFFFF"/>
+                </a:solidFill>
+                <a:latin typeface="Arial" pitchFamily="34" charset="0"/>
+                <a:ea typeface="Arial" pitchFamily="34" charset="-122"/>
+                <a:cs typeface="Arial" pitchFamily="34" charset="-120"/>
+              </a:rPr>
+              <a:t>CogitoSQL</a:t>
+            </a:r>
+            <a:endParaRPr lang="en-US" sz="800" dirty="0"/>
+          </a:p>
+        </p:txBody>
+      </p:sp>
+      <p:sp>
+        <p:nvSpPr>
+          <p:cNvPr id="49" name="Shape 47"/>
+          <p:cNvSpPr/>
+          <p:nvPr/>
+        </p:nvSpPr>
+        <p:spPr>
+          <a:xfrm>
+            <a:off x="384048" y="4736592"/>
+            <a:ext cx="2269998" cy="1371600"/>
+          </a:xfrm>
+          <a:prstGeom prst="rect">
+            <a:avLst/>
+          </a:prstGeom>
+          <a:solidFill>
+            <a:srgbClr val="F5F9FD"/>
+          </a:solidFill>
+          <a:ln w="9525">
+            <a:solidFill>
+              <a:srgbClr val="DCE6F0"/>
+            </a:solidFill>
+            <a:prstDash val="solid"/>
+          </a:ln>
+        </p:spPr>
+      </p:sp>
+      <p:sp>
+        <p:nvSpPr>
+          <p:cNvPr id="50" name="Text 48"/>
+          <p:cNvSpPr/>
+          <p:nvPr/>
+        </p:nvSpPr>
+        <p:spPr>
+          <a:xfrm>
+            <a:off x="384048" y="4736592"/>
+            <a:ext cx="2269998" cy="1371600"/>
+          </a:xfrm>
+          <a:prstGeom prst="rect">
+            <a:avLst/>
+          </a:prstGeom>
+          <a:noFill/>
+          <a:ln/>
+        </p:spPr>
+        <p:txBody>
+          <a:bodyPr wrap="square" lIns="762" tIns="1016" rIns="1016" bIns="508" rtlCol="0" anchor="t"/>
+          <a:lstStyle/>
+          <a:p>
+            <a:pPr marL="342900" indent="-342900">
+              <a:lnSpc>
+                <a:spcPct val="92000"/>
+              </a:lnSpc>
+              <a:spcAft>
+                <a:spcPts val="300"/>
+              </a:spcAft>
+              <a:buSzPct val="100000"/>
+              <a:buChar char="•"/>
+            </a:pPr>
+            <a:r>
+              <a:rPr lang="en-US" sz="660" dirty="0">
+                <a:solidFill>
+                  <a:srgbClr val="1A1A1A"/>
+                </a:solidFill>
+                <a:latin typeface="Arial" pitchFamily="34" charset="0"/>
+                <a:ea typeface="Arial" pitchFamily="34" charset="-122"/>
+                <a:cs typeface="Arial" pitchFamily="34" charset="-120"/>
+              </a:rPr>
+              <a:t>Column and row reconciliation to L2+ against the BOBJ baseline</a:t>
+            </a:r>
+            <a:endParaRPr lang="en-US" sz="660" dirty="0"/>
+          </a:p>
+          <a:p>
+            <a:pPr marL="342900" indent="-342900">
+              <a:lnSpc>
+                <a:spcPct val="92000"/>
+              </a:lnSpc>
+              <a:spcAft>
+                <a:spcPts val="300"/>
+              </a:spcAft>
+              <a:buSzPct val="100000"/>
+              <a:buChar char="•"/>
+            </a:pPr>
+            <a:r>
+              <a:rPr lang="en-US" sz="660" dirty="0">
+                <a:solidFill>
+                  <a:srgbClr val="1A1A1A"/>
+                </a:solidFill>
+                <a:latin typeface="Arial" pitchFamily="34" charset="0"/>
+                <a:ea typeface="Arial" pitchFamily="34" charset="-122"/>
+                <a:cs typeface="Arial" pitchFamily="34" charset="-120"/>
+              </a:rPr>
+              <a:t>Prompt and filter equivalence — BOBJ prompts mapped to RW criteria</a:t>
+            </a:r>
+            <a:endParaRPr lang="en-US" sz="660" dirty="0"/>
+          </a:p>
+          <a:p>
+            <a:pPr marL="342900" indent="-342900">
+              <a:lnSpc>
+                <a:spcPct val="92000"/>
+              </a:lnSpc>
+              <a:spcAft>
+                <a:spcPts val="300"/>
+              </a:spcAft>
+              <a:buSzPct val="100000"/>
+              <a:buChar char="•"/>
+            </a:pPr>
+            <a:r>
+              <a:rPr lang="en-US" sz="660" dirty="0">
+                <a:solidFill>
+                  <a:srgbClr val="1A1A1A"/>
+                </a:solidFill>
+                <a:latin typeface="Arial" pitchFamily="34" charset="0"/>
+                <a:ea typeface="Arial" pitchFamily="34" charset="-122"/>
+                <a:cs typeface="Arial" pitchFamily="34" charset="-120"/>
+              </a:rPr>
+              <a:t>Epic security class test run as a restricted clinician account</a:t>
+            </a:r>
+            <a:endParaRPr lang="en-US" sz="660" dirty="0"/>
+          </a:p>
+          <a:p>
+            <a:pPr marL="342900" indent="-342900">
+              <a:lnSpc>
+                <a:spcPct val="92000"/>
+              </a:lnSpc>
+              <a:spcAft>
+                <a:spcPts val="300"/>
+              </a:spcAft>
+              <a:buSzPct val="100000"/>
+              <a:buChar char="•"/>
+            </a:pPr>
+            <a:r>
+              <a:rPr lang="en-US" sz="660" dirty="0">
+                <a:solidFill>
+                  <a:srgbClr val="1A1A1A"/>
+                </a:solidFill>
+                <a:latin typeface="Arial" pitchFamily="34" charset="0"/>
+                <a:ea typeface="Arial" pitchFamily="34" charset="-122"/>
+                <a:cs typeface="Arial" pitchFamily="34" charset="-120"/>
+              </a:rPr>
+              <a:t>In-workflow launch: correct Hyperspace activity, patient context passes</a:t>
+            </a:r>
+            <a:endParaRPr lang="en-US" sz="660" dirty="0"/>
+          </a:p>
+          <a:p>
+            <a:pPr marL="342900" indent="-342900">
+              <a:lnSpc>
+                <a:spcPct val="92000"/>
+              </a:lnSpc>
+              <a:spcAft>
+                <a:spcPts val="300"/>
+              </a:spcAft>
+              <a:buSzPct val="100000"/>
+              <a:buChar char="•"/>
+            </a:pPr>
+            <a:r>
+              <a:rPr lang="en-US" sz="660" dirty="0">
+                <a:solidFill>
+                  <a:srgbClr val="1A1A1A"/>
+                </a:solidFill>
+                <a:latin typeface="Arial" pitchFamily="34" charset="0"/>
+                <a:ea typeface="Arial" pitchFamily="34" charset="-122"/>
+                <a:cs typeface="Arial" pitchFamily="34" charset="-120"/>
+              </a:rPr>
+              <a:t>Chronicles latency inside the agreed window</a:t>
+            </a:r>
+            <a:endParaRPr lang="en-US" sz="660" dirty="0"/>
+          </a:p>
+        </p:txBody>
+      </p:sp>
+      <p:sp>
+        <p:nvSpPr>
+          <p:cNvPr id="51" name="Shape 49"/>
+          <p:cNvSpPr/>
+          <p:nvPr/>
+        </p:nvSpPr>
+        <p:spPr>
+          <a:xfrm>
+            <a:off x="2782062" y="4535424"/>
+            <a:ext cx="2269998" cy="201168"/>
+          </a:xfrm>
+          <a:prstGeom prst="rect">
+            <a:avLst/>
+          </a:prstGeom>
+          <a:solidFill>
+            <a:srgbClr val="1596B0"/>
+          </a:solidFill>
+          <a:ln w="6350">
+            <a:solidFill>
+              <a:srgbClr val="1596B0"/>
+            </a:solidFill>
+            <a:prstDash val="solid"/>
+          </a:ln>
+        </p:spPr>
+      </p:sp>
+      <p:sp>
+        <p:nvSpPr>
+          <p:cNvPr id="52" name="Text 50"/>
+          <p:cNvSpPr/>
+          <p:nvPr/>
+        </p:nvSpPr>
+        <p:spPr>
+          <a:xfrm>
+            <a:off x="2782062" y="4535424"/>
+            <a:ext cx="2269998" cy="201168"/>
+          </a:xfrm>
+          <a:prstGeom prst="rect">
+            <a:avLst/>
+          </a:prstGeom>
+          <a:noFill/>
+          <a:ln/>
+        </p:spPr>
+        <p:txBody>
+          <a:bodyPr wrap="square" lIns="0" tIns="0" rIns="0" bIns="0" rtlCol="0" anchor="ctr"/>
+          <a:lstStyle/>
+          <a:p>
+            <a:pPr algn="ctr" indent="0" marL="0">
+              <a:buNone/>
+            </a:pPr>
+            <a:r>
+              <a:rPr lang="en-US" sz="800" b="1" dirty="0">
+                <a:solidFill>
+                  <a:srgbClr val="FFFFFF"/>
+                </a:solidFill>
+                <a:latin typeface="Arial" pitchFamily="34" charset="0"/>
+                <a:ea typeface="Arial" pitchFamily="34" charset="-122"/>
+                <a:cs typeface="Arial" pitchFamily="34" charset="-120"/>
+              </a:rPr>
+              <a:t>Power BI</a:t>
+            </a:r>
+            <a:endParaRPr lang="en-US" sz="800" dirty="0"/>
+          </a:p>
+        </p:txBody>
+      </p:sp>
+      <p:sp>
+        <p:nvSpPr>
+          <p:cNvPr id="53" name="Shape 51"/>
+          <p:cNvSpPr/>
+          <p:nvPr/>
+        </p:nvSpPr>
+        <p:spPr>
+          <a:xfrm>
+            <a:off x="2782062" y="4736592"/>
+            <a:ext cx="2269998" cy="1371600"/>
+          </a:xfrm>
+          <a:prstGeom prst="rect">
+            <a:avLst/>
+          </a:prstGeom>
+          <a:solidFill>
+            <a:srgbClr val="F5F9FD"/>
+          </a:solidFill>
+          <a:ln w="9525">
+            <a:solidFill>
+              <a:srgbClr val="DCE6F0"/>
+            </a:solidFill>
+            <a:prstDash val="solid"/>
+          </a:ln>
+        </p:spPr>
+      </p:sp>
+      <p:sp>
+        <p:nvSpPr>
+          <p:cNvPr id="54" name="Text 52"/>
+          <p:cNvSpPr/>
+          <p:nvPr/>
+        </p:nvSpPr>
+        <p:spPr>
+          <a:xfrm>
+            <a:off x="2782062" y="4736592"/>
+            <a:ext cx="2269998" cy="1371600"/>
+          </a:xfrm>
+          <a:prstGeom prst="rect">
+            <a:avLst/>
+          </a:prstGeom>
+          <a:noFill/>
+          <a:ln/>
+        </p:spPr>
+        <p:txBody>
+          <a:bodyPr wrap="square" lIns="762" tIns="1016" rIns="1016" bIns="508" rtlCol="0" anchor="t"/>
+          <a:lstStyle/>
+          <a:p>
+            <a:pPr marL="342900" indent="-342900">
+              <a:lnSpc>
+                <a:spcPct val="92000"/>
+              </a:lnSpc>
+              <a:spcAft>
+                <a:spcPts val="300"/>
+              </a:spcAft>
+              <a:buSzPct val="100000"/>
+              <a:buChar char="•"/>
+            </a:pPr>
+            <a:r>
+              <a:rPr lang="en-US" sz="660" dirty="0">
+                <a:solidFill>
+                  <a:srgbClr val="1A1A1A"/>
+                </a:solidFill>
+                <a:latin typeface="Arial" pitchFamily="34" charset="0"/>
+                <a:ea typeface="Arial" pitchFamily="34" charset="-122"/>
+                <a:cs typeface="Arial" pitchFamily="34" charset="-120"/>
+              </a:rPr>
+              <a:t>Measure-by-measure DAX parity under the same filter context</a:t>
+            </a:r>
+            <a:endParaRPr lang="en-US" sz="660" dirty="0"/>
+          </a:p>
+          <a:p>
+            <a:pPr marL="342900" indent="-342900">
+              <a:lnSpc>
+                <a:spcPct val="92000"/>
+              </a:lnSpc>
+              <a:spcAft>
+                <a:spcPts val="300"/>
+              </a:spcAft>
+              <a:buSzPct val="100000"/>
+              <a:buChar char="•"/>
+            </a:pPr>
+            <a:r>
+              <a:rPr lang="en-US" sz="660" dirty="0">
+                <a:solidFill>
+                  <a:srgbClr val="1A1A1A"/>
+                </a:solidFill>
+                <a:latin typeface="Arial" pitchFamily="34" charset="0"/>
+                <a:ea typeface="Arial" pitchFamily="34" charset="-122"/>
+                <a:cs typeface="Arial" pitchFamily="34" charset="-120"/>
+              </a:rPr>
+              <a:t>Paginated layout fidelity — page breaks, headers, totals, pagination</a:t>
+            </a:r>
+            <a:endParaRPr lang="en-US" sz="660" dirty="0"/>
+          </a:p>
+          <a:p>
+            <a:pPr marL="342900" indent="-342900">
+              <a:lnSpc>
+                <a:spcPct val="92000"/>
+              </a:lnSpc>
+              <a:spcAft>
+                <a:spcPts val="300"/>
+              </a:spcAft>
+              <a:buSzPct val="100000"/>
+              <a:buChar char="•"/>
+            </a:pPr>
+            <a:r>
+              <a:rPr lang="en-US" sz="660" dirty="0">
+                <a:solidFill>
+                  <a:srgbClr val="1A1A1A"/>
+                </a:solidFill>
+                <a:latin typeface="Arial" pitchFamily="34" charset="0"/>
+                <a:ea typeface="Arial" pitchFamily="34" charset="-122"/>
+                <a:cs typeface="Arial" pitchFamily="34" charset="-120"/>
+              </a:rPr>
+              <a:t>Subscription burst tested against the BOBJ publication recipient list</a:t>
+            </a:r>
+            <a:endParaRPr lang="en-US" sz="660" dirty="0"/>
+          </a:p>
+          <a:p>
+            <a:pPr marL="342900" indent="-342900">
+              <a:lnSpc>
+                <a:spcPct val="92000"/>
+              </a:lnSpc>
+              <a:spcAft>
+                <a:spcPts val="300"/>
+              </a:spcAft>
+              <a:buSzPct val="100000"/>
+              <a:buChar char="•"/>
+            </a:pPr>
+            <a:r>
+              <a:rPr lang="en-US" sz="660" dirty="0">
+                <a:solidFill>
+                  <a:srgbClr val="1A1A1A"/>
+                </a:solidFill>
+                <a:latin typeface="Arial" pitchFamily="34" charset="0"/>
+                <a:ea typeface="Arial" pitchFamily="34" charset="-122"/>
+                <a:cs typeface="Arial" pitchFamily="34" charset="-120"/>
+              </a:rPr>
+              <a:t>Entra RLS proved with a non-privileged account</a:t>
+            </a:r>
+            <a:endParaRPr lang="en-US" sz="660" dirty="0"/>
+          </a:p>
+          <a:p>
+            <a:pPr marL="342900" indent="-342900">
+              <a:lnSpc>
+                <a:spcPct val="92000"/>
+              </a:lnSpc>
+              <a:spcAft>
+                <a:spcPts val="300"/>
+              </a:spcAft>
+              <a:buSzPct val="100000"/>
+              <a:buChar char="•"/>
+            </a:pPr>
+            <a:r>
+              <a:rPr lang="en-US" sz="660" dirty="0">
+                <a:solidFill>
+                  <a:srgbClr val="1A1A1A"/>
+                </a:solidFill>
+                <a:latin typeface="Arial" pitchFamily="34" charset="0"/>
+                <a:ea typeface="Arial" pitchFamily="34" charset="-122"/>
+                <a:cs typeface="Arial" pitchFamily="34" charset="-120"/>
+              </a:rPr>
+              <a:t>Export fidelity to Excel and PDF, values and formatting</a:t>
+            </a:r>
+            <a:endParaRPr lang="en-US" sz="660" dirty="0"/>
+          </a:p>
+        </p:txBody>
+      </p:sp>
+      <p:sp>
+        <p:nvSpPr>
+          <p:cNvPr id="55" name="Shape 53"/>
+          <p:cNvSpPr/>
+          <p:nvPr/>
+        </p:nvSpPr>
+        <p:spPr>
+          <a:xfrm>
+            <a:off x="5180076" y="4535424"/>
+            <a:ext cx="2269998" cy="201168"/>
+          </a:xfrm>
+          <a:prstGeom prst="rect">
+            <a:avLst/>
+          </a:prstGeom>
+          <a:solidFill>
+            <a:srgbClr val="3E6DA8"/>
+          </a:solidFill>
+          <a:ln w="6350">
+            <a:solidFill>
+              <a:srgbClr val="3E6DA8"/>
+            </a:solidFill>
+            <a:prstDash val="solid"/>
+          </a:ln>
+        </p:spPr>
+      </p:sp>
+      <p:sp>
+        <p:nvSpPr>
+          <p:cNvPr id="56" name="Text 54"/>
+          <p:cNvSpPr/>
+          <p:nvPr/>
+        </p:nvSpPr>
+        <p:spPr>
+          <a:xfrm>
+            <a:off x="5180076" y="4535424"/>
+            <a:ext cx="2269998" cy="201168"/>
+          </a:xfrm>
+          <a:prstGeom prst="rect">
+            <a:avLst/>
+          </a:prstGeom>
+          <a:noFill/>
+          <a:ln/>
+        </p:spPr>
+        <p:txBody>
+          <a:bodyPr wrap="square" lIns="0" tIns="0" rIns="0" bIns="0" rtlCol="0" anchor="ctr"/>
+          <a:lstStyle/>
+          <a:p>
+            <a:pPr algn="ctr" indent="0" marL="0">
+              <a:buNone/>
+            </a:pPr>
+            <a:r>
+              <a:rPr lang="en-US" sz="800" b="1" dirty="0">
+                <a:solidFill>
+                  <a:srgbClr val="FFFFFF"/>
+                </a:solidFill>
+                <a:latin typeface="Arial" pitchFamily="34" charset="0"/>
+                <a:ea typeface="Arial" pitchFamily="34" charset="-122"/>
+                <a:cs typeface="Arial" pitchFamily="34" charset="-120"/>
+              </a:rPr>
+              <a:t>Databricks AI/BI</a:t>
+            </a:r>
+            <a:endParaRPr lang="en-US" sz="800" dirty="0"/>
+          </a:p>
+        </p:txBody>
+      </p:sp>
+      <p:sp>
+        <p:nvSpPr>
+          <p:cNvPr id="57" name="Shape 55"/>
+          <p:cNvSpPr/>
+          <p:nvPr/>
+        </p:nvSpPr>
+        <p:spPr>
+          <a:xfrm>
+            <a:off x="5180076" y="4736592"/>
+            <a:ext cx="2269998" cy="1371600"/>
+          </a:xfrm>
+          <a:prstGeom prst="rect">
+            <a:avLst/>
+          </a:prstGeom>
+          <a:solidFill>
+            <a:srgbClr val="F5F9FD"/>
+          </a:solidFill>
+          <a:ln w="9525">
+            <a:solidFill>
+              <a:srgbClr val="DCE6F0"/>
+            </a:solidFill>
+            <a:prstDash val="solid"/>
+          </a:ln>
+        </p:spPr>
+      </p:sp>
+      <p:sp>
+        <p:nvSpPr>
+          <p:cNvPr id="58" name="Text 56"/>
+          <p:cNvSpPr/>
+          <p:nvPr/>
+        </p:nvSpPr>
+        <p:spPr>
+          <a:xfrm>
+            <a:off x="5180076" y="4736592"/>
+            <a:ext cx="2269998" cy="1371600"/>
+          </a:xfrm>
+          <a:prstGeom prst="rect">
+            <a:avLst/>
+          </a:prstGeom>
+          <a:noFill/>
+          <a:ln/>
+        </p:spPr>
+        <p:txBody>
+          <a:bodyPr wrap="square" lIns="762" tIns="1016" rIns="1016" bIns="508" rtlCol="0" anchor="t"/>
+          <a:lstStyle/>
+          <a:p>
+            <a:pPr marL="342900" indent="-342900">
+              <a:lnSpc>
+                <a:spcPct val="92000"/>
+              </a:lnSpc>
+              <a:spcAft>
+                <a:spcPts val="300"/>
+              </a:spcAft>
+              <a:buSzPct val="100000"/>
+              <a:buChar char="•"/>
+            </a:pPr>
+            <a:r>
+              <a:rPr lang="en-US" sz="660" dirty="0">
+                <a:solidFill>
+                  <a:srgbClr val="1A1A1A"/>
+                </a:solidFill>
+                <a:latin typeface="Arial" pitchFamily="34" charset="0"/>
+                <a:ea typeface="Arial" pitchFamily="34" charset="-122"/>
+                <a:cs typeface="Arial" pitchFamily="34" charset="-120"/>
+              </a:rPr>
+              <a:t>Metric view and dashboard output parity against the BOBJ baseline</a:t>
+            </a:r>
+            <a:endParaRPr lang="en-US" sz="660" dirty="0"/>
+          </a:p>
+          <a:p>
+            <a:pPr marL="342900" indent="-342900">
+              <a:lnSpc>
+                <a:spcPct val="92000"/>
+              </a:lnSpc>
+              <a:spcAft>
+                <a:spcPts val="300"/>
+              </a:spcAft>
+              <a:buSzPct val="100000"/>
+              <a:buChar char="•"/>
+            </a:pPr>
+            <a:r>
+              <a:rPr lang="en-US" sz="660" dirty="0">
+                <a:solidFill>
+                  <a:srgbClr val="1A1A1A"/>
+                </a:solidFill>
+                <a:latin typeface="Arial" pitchFamily="34" charset="0"/>
+                <a:ea typeface="Arial" pitchFamily="34" charset="-122"/>
+                <a:cs typeface="Arial" pitchFamily="34" charset="-120"/>
+              </a:rPr>
+              <a:t>Genie known-answer question set, plus refusal on out-of-scope asks</a:t>
+            </a:r>
+            <a:endParaRPr lang="en-US" sz="660" dirty="0"/>
+          </a:p>
+          <a:p>
+            <a:pPr marL="342900" indent="-342900">
+              <a:lnSpc>
+                <a:spcPct val="92000"/>
+              </a:lnSpc>
+              <a:spcAft>
+                <a:spcPts val="300"/>
+              </a:spcAft>
+              <a:buSzPct val="100000"/>
+              <a:buChar char="•"/>
+            </a:pPr>
+            <a:r>
+              <a:rPr lang="en-US" sz="660" dirty="0">
+                <a:solidFill>
+                  <a:srgbClr val="1A1A1A"/>
+                </a:solidFill>
+                <a:latin typeface="Arial" pitchFamily="34" charset="0"/>
+                <a:ea typeface="Arial" pitchFamily="34" charset="-122"/>
+                <a:cs typeface="Arial" pitchFamily="34" charset="-120"/>
+              </a:rPr>
+              <a:t>Genie scope test: no reach beyond governed gold tables</a:t>
+            </a:r>
+            <a:endParaRPr lang="en-US" sz="660" dirty="0"/>
+          </a:p>
+          <a:p>
+            <a:pPr marL="342900" indent="-342900">
+              <a:lnSpc>
+                <a:spcPct val="92000"/>
+              </a:lnSpc>
+              <a:spcAft>
+                <a:spcPts val="300"/>
+              </a:spcAft>
+              <a:buSzPct val="100000"/>
+              <a:buChar char="•"/>
+            </a:pPr>
+            <a:r>
+              <a:rPr lang="en-US" sz="660" dirty="0">
+                <a:solidFill>
+                  <a:srgbClr val="1A1A1A"/>
+                </a:solidFill>
+                <a:latin typeface="Arial" pitchFamily="34" charset="0"/>
+                <a:ea typeface="Arial" pitchFamily="34" charset="-122"/>
+                <a:cs typeface="Arial" pitchFamily="34" charset="-120"/>
+              </a:rPr>
+              <a:t>UC row filter and column mask enforcement, non-privileged principal</a:t>
+            </a:r>
+            <a:endParaRPr lang="en-US" sz="660" dirty="0"/>
+          </a:p>
+          <a:p>
+            <a:pPr marL="342900" indent="-342900">
+              <a:lnSpc>
+                <a:spcPct val="92000"/>
+              </a:lnSpc>
+              <a:spcAft>
+                <a:spcPts val="300"/>
+              </a:spcAft>
+              <a:buSzPct val="100000"/>
+              <a:buChar char="•"/>
+            </a:pPr>
+            <a:r>
+              <a:rPr lang="en-US" sz="660" dirty="0">
+                <a:solidFill>
+                  <a:srgbClr val="1A1A1A"/>
+                </a:solidFill>
+                <a:latin typeface="Arial" pitchFamily="34" charset="0"/>
+                <a:ea typeface="Arial" pitchFamily="34" charset="-122"/>
+                <a:cs typeface="Arial" pitchFamily="34" charset="-120"/>
+              </a:rPr>
+              <a:t>Warehouse concurrency and response time at peak</a:t>
+            </a:r>
+            <a:endParaRPr lang="en-US" sz="660" dirty="0"/>
+          </a:p>
+        </p:txBody>
+      </p:sp>
+      <p:sp>
+        <p:nvSpPr>
+          <p:cNvPr id="59" name="Shape 57"/>
+          <p:cNvSpPr/>
+          <p:nvPr/>
+        </p:nvSpPr>
+        <p:spPr>
+          <a:xfrm>
+            <a:off x="7578090" y="4535424"/>
+            <a:ext cx="2269998" cy="201168"/>
+          </a:xfrm>
+          <a:prstGeom prst="rect">
+            <a:avLst/>
+          </a:prstGeom>
+          <a:solidFill>
+            <a:srgbClr val="081F5C"/>
+          </a:solidFill>
+          <a:ln w="6350">
+            <a:solidFill>
+              <a:srgbClr val="081F5C"/>
+            </a:solidFill>
+            <a:prstDash val="solid"/>
+          </a:ln>
+        </p:spPr>
+      </p:sp>
+      <p:sp>
+        <p:nvSpPr>
+          <p:cNvPr id="60" name="Text 58"/>
+          <p:cNvSpPr/>
+          <p:nvPr/>
+        </p:nvSpPr>
+        <p:spPr>
+          <a:xfrm>
+            <a:off x="7578090" y="4535424"/>
+            <a:ext cx="2269998" cy="201168"/>
+          </a:xfrm>
+          <a:prstGeom prst="rect">
+            <a:avLst/>
+          </a:prstGeom>
+          <a:noFill/>
+          <a:ln/>
+        </p:spPr>
+        <p:txBody>
+          <a:bodyPr wrap="square" lIns="0" tIns="0" rIns="0" bIns="0" rtlCol="0" anchor="ctr"/>
+          <a:lstStyle/>
+          <a:p>
+            <a:pPr algn="ctr" indent="0" marL="0">
+              <a:buNone/>
+            </a:pPr>
+            <a:r>
+              <a:rPr lang="en-US" sz="800" b="1" dirty="0">
+                <a:solidFill>
+                  <a:srgbClr val="FFFFFF"/>
+                </a:solidFill>
+                <a:latin typeface="Arial" pitchFamily="34" charset="0"/>
+                <a:ea typeface="Arial" pitchFamily="34" charset="-122"/>
+                <a:cs typeface="Arial" pitchFamily="34" charset="-120"/>
+              </a:rPr>
+              <a:t>Retain in BOBJ</a:t>
+            </a:r>
+            <a:endParaRPr lang="en-US" sz="800" dirty="0"/>
+          </a:p>
+        </p:txBody>
+      </p:sp>
+      <p:sp>
+        <p:nvSpPr>
+          <p:cNvPr id="61" name="Shape 59"/>
+          <p:cNvSpPr/>
+          <p:nvPr/>
+        </p:nvSpPr>
+        <p:spPr>
+          <a:xfrm>
+            <a:off x="7578090" y="4736592"/>
+            <a:ext cx="2269998" cy="1371600"/>
+          </a:xfrm>
+          <a:prstGeom prst="rect">
+            <a:avLst/>
+          </a:prstGeom>
+          <a:solidFill>
+            <a:srgbClr val="FFFFFF"/>
+          </a:solidFill>
+          <a:ln w="9525">
+            <a:solidFill>
+              <a:srgbClr val="081F5C"/>
+            </a:solidFill>
+            <a:prstDash val="dash"/>
+          </a:ln>
+        </p:spPr>
+      </p:sp>
+      <p:sp>
+        <p:nvSpPr>
+          <p:cNvPr id="62" name="Text 60"/>
+          <p:cNvSpPr/>
+          <p:nvPr/>
+        </p:nvSpPr>
+        <p:spPr>
+          <a:xfrm>
+            <a:off x="7578090" y="4736592"/>
+            <a:ext cx="2269998" cy="1371600"/>
+          </a:xfrm>
+          <a:prstGeom prst="rect">
+            <a:avLst/>
+          </a:prstGeom>
+          <a:noFill/>
+          <a:ln/>
+        </p:spPr>
+        <p:txBody>
+          <a:bodyPr wrap="square" lIns="762" tIns="1016" rIns="1016" bIns="508" rtlCol="0" anchor="t"/>
+          <a:lstStyle/>
+          <a:p>
+            <a:pPr marL="342900" indent="-342900">
+              <a:lnSpc>
+                <a:spcPct val="92000"/>
+              </a:lnSpc>
+              <a:spcAft>
+                <a:spcPts val="300"/>
+              </a:spcAft>
+              <a:buSzPct val="100000"/>
+              <a:buChar char="•"/>
+            </a:pPr>
+            <a:r>
+              <a:rPr lang="en-US" sz="660" dirty="0">
+                <a:solidFill>
+                  <a:srgbClr val="1A1A1A"/>
+                </a:solidFill>
+                <a:latin typeface="Arial" pitchFamily="34" charset="0"/>
+                <a:ea typeface="Arial" pitchFamily="34" charset="-122"/>
+                <a:cs typeface="Arial" pitchFamily="34" charset="-120"/>
+              </a:rPr>
+              <a:t>Pre and post re-point output compared — identical, no logic drift</a:t>
+            </a:r>
+            <a:endParaRPr lang="en-US" sz="660" dirty="0"/>
+          </a:p>
+          <a:p>
+            <a:pPr marL="342900" indent="-342900">
+              <a:lnSpc>
+                <a:spcPct val="92000"/>
+              </a:lnSpc>
+              <a:spcAft>
+                <a:spcPts val="300"/>
+              </a:spcAft>
+              <a:buSzPct val="100000"/>
+              <a:buChar char="•"/>
+            </a:pPr>
+            <a:r>
+              <a:rPr lang="en-US" sz="660" dirty="0">
+                <a:solidFill>
+                  <a:srgbClr val="1A1A1A"/>
+                </a:solidFill>
+                <a:latin typeface="Arial" pitchFamily="34" charset="0"/>
+                <a:ea typeface="Arial" pitchFamily="34" charset="-122"/>
+                <a:cs typeface="Arial" pitchFamily="34" charset="-120"/>
+              </a:rPr>
+              <a:t>Universe restrictions re-tested after the connection change</a:t>
+            </a:r>
+            <a:endParaRPr lang="en-US" sz="660" dirty="0"/>
+          </a:p>
+          <a:p>
+            <a:pPr marL="342900" indent="-342900">
+              <a:lnSpc>
+                <a:spcPct val="92000"/>
+              </a:lnSpc>
+              <a:spcAft>
+                <a:spcPts val="300"/>
+              </a:spcAft>
+              <a:buSzPct val="100000"/>
+              <a:buChar char="•"/>
+            </a:pPr>
+            <a:r>
+              <a:rPr lang="en-US" sz="660" dirty="0">
+                <a:solidFill>
+                  <a:srgbClr val="1A1A1A"/>
+                </a:solidFill>
+                <a:latin typeface="Arial" pitchFamily="34" charset="0"/>
+                <a:ea typeface="Arial" pitchFamily="34" charset="-122"/>
+                <a:cs typeface="Arial" pitchFamily="34" charset="-120"/>
+              </a:rPr>
+              <a:t>Scheduled publication still runs and delivers to the same list</a:t>
+            </a:r>
+            <a:endParaRPr lang="en-US" sz="660" dirty="0"/>
+          </a:p>
+          <a:p>
+            <a:pPr marL="342900" indent="-342900">
+              <a:lnSpc>
+                <a:spcPct val="92000"/>
+              </a:lnSpc>
+              <a:spcAft>
+                <a:spcPts val="300"/>
+              </a:spcAft>
+              <a:buSzPct val="100000"/>
+              <a:buChar char="•"/>
+            </a:pPr>
+            <a:r>
+              <a:rPr lang="en-US" sz="660" dirty="0">
+                <a:solidFill>
+                  <a:srgbClr val="1A1A1A"/>
+                </a:solidFill>
+                <a:latin typeface="Arial" pitchFamily="34" charset="0"/>
+                <a:ea typeface="Arial" pitchFamily="34" charset="-122"/>
+                <a:cs typeface="Arial" pitchFamily="34" charset="-120"/>
+              </a:rPr>
+              <a:t>Query plan and runtime re-baselined on the new source</a:t>
+            </a:r>
+            <a:endParaRPr lang="en-US" sz="660" dirty="0"/>
+          </a:p>
+          <a:p>
+            <a:pPr marL="342900" indent="-342900">
+              <a:lnSpc>
+                <a:spcPct val="92000"/>
+              </a:lnSpc>
+              <a:spcAft>
+                <a:spcPts val="300"/>
+              </a:spcAft>
+              <a:buSzPct val="100000"/>
+              <a:buChar char="•"/>
+            </a:pPr>
+            <a:r>
+              <a:rPr lang="en-US" sz="660" dirty="0">
+                <a:solidFill>
+                  <a:srgbClr val="1A1A1A"/>
+                </a:solidFill>
+                <a:latin typeface="Arial" pitchFamily="34" charset="0"/>
+                <a:ea typeface="Arial" pitchFamily="34" charset="-122"/>
+                <a:cs typeface="Arial" pitchFamily="34" charset="-120"/>
+              </a:rPr>
+              <a:t>Sunset date checked at every wave gate</a:t>
+            </a:r>
+            <a:endParaRPr lang="en-US" sz="660" dirty="0"/>
+          </a:p>
+        </p:txBody>
+      </p:sp>
+      <p:sp>
+        <p:nvSpPr>
+          <p:cNvPr id="63" name="Shape 61"/>
+          <p:cNvSpPr/>
+          <p:nvPr/>
+        </p:nvSpPr>
+        <p:spPr>
+          <a:xfrm>
+            <a:off x="9966960" y="914400"/>
+            <a:ext cx="1837944" cy="237744"/>
+          </a:xfrm>
+          <a:prstGeom prst="rect">
+            <a:avLst/>
+          </a:prstGeom>
+          <a:solidFill>
+            <a:srgbClr val="081F5C"/>
+          </a:solidFill>
+          <a:ln w="6350">
+            <a:solidFill>
+              <a:srgbClr val="081F5C"/>
+            </a:solidFill>
+            <a:prstDash val="solid"/>
+          </a:ln>
+        </p:spPr>
+      </p:sp>
+      <p:sp>
+        <p:nvSpPr>
+          <p:cNvPr id="64" name="Text 62"/>
+          <p:cNvSpPr/>
+          <p:nvPr/>
+        </p:nvSpPr>
+        <p:spPr>
+          <a:xfrm>
+            <a:off x="9966960" y="914400"/>
+            <a:ext cx="1837944" cy="237744"/>
+          </a:xfrm>
+          <a:prstGeom prst="rect">
+            <a:avLst/>
+          </a:prstGeom>
+          <a:noFill/>
+          <a:ln/>
+        </p:spPr>
+        <p:txBody>
+          <a:bodyPr wrap="square" lIns="0" tIns="0" rIns="0" bIns="0" rtlCol="0" anchor="ctr"/>
+          <a:lstStyle/>
+          <a:p>
+            <a:pPr algn="ctr" indent="0" marL="0">
+              <a:buNone/>
+            </a:pPr>
+            <a:r>
+              <a:rPr lang="en-US" sz="760" b="1" spc="40" kern="0" dirty="0">
+                <a:solidFill>
+                  <a:srgbClr val="FFFFFF"/>
+                </a:solidFill>
+                <a:latin typeface="Arial" pitchFamily="34" charset="0"/>
+                <a:ea typeface="Arial" pitchFamily="34" charset="-122"/>
+                <a:cs typeface="Arial" pitchFamily="34" charset="-120"/>
+              </a:rPr>
+              <a:t>REGRESSION SUITE</a:t>
+            </a:r>
+            <a:endParaRPr lang="en-US" sz="760" dirty="0"/>
+          </a:p>
+        </p:txBody>
+      </p:sp>
+      <p:sp>
+        <p:nvSpPr>
+          <p:cNvPr id="65" name="Shape 63"/>
+          <p:cNvSpPr/>
+          <p:nvPr/>
+        </p:nvSpPr>
+        <p:spPr>
+          <a:xfrm>
+            <a:off x="9966960" y="1225296"/>
+            <a:ext cx="1837944" cy="420624"/>
+          </a:xfrm>
+          <a:prstGeom prst="rect">
+            <a:avLst/>
+          </a:prstGeom>
+          <a:solidFill>
+            <a:srgbClr val="ADDAFB"/>
+          </a:solidFill>
+          <a:ln w="6350">
+            <a:solidFill>
+              <a:srgbClr val="ADDAFB"/>
+            </a:solidFill>
+            <a:prstDash val="solid"/>
+          </a:ln>
+        </p:spPr>
+      </p:sp>
+      <p:sp>
+        <p:nvSpPr>
+          <p:cNvPr id="66" name="Text 64"/>
+          <p:cNvSpPr/>
+          <p:nvPr/>
+        </p:nvSpPr>
+        <p:spPr>
+          <a:xfrm>
+            <a:off x="9966960" y="1225296"/>
+            <a:ext cx="1837944" cy="420624"/>
+          </a:xfrm>
+          <a:prstGeom prst="rect">
+            <a:avLst/>
+          </a:prstGeom>
+          <a:noFill/>
+          <a:ln/>
+        </p:spPr>
+        <p:txBody>
+          <a:bodyPr wrap="square" lIns="381" tIns="889" rIns="889" bIns="381" rtlCol="0" anchor="ctr"/>
+          <a:lstStyle/>
+          <a:p>
+            <a:pPr indent="0" marL="0">
+              <a:lnSpc>
+                <a:spcPct val="92000"/>
+              </a:lnSpc>
+              <a:spcAft>
+                <a:spcPts val="200"/>
+              </a:spcAft>
+              <a:buNone/>
+            </a:pPr>
+            <a:r>
+              <a:rPr lang="en-US" sz="700" b="1" dirty="0">
+                <a:solidFill>
+                  <a:srgbClr val="081F5C"/>
+                </a:solidFill>
+                <a:latin typeface="Arial" pitchFamily="34" charset="0"/>
+                <a:ea typeface="Arial" pitchFamily="34" charset="-122"/>
+                <a:cs typeface="Arial" pitchFamily="34" charset="-120"/>
+              </a:rPr>
+              <a:t>DDL &amp; type-mapping parity</a:t>
+            </a:r>
+            <a:endParaRPr lang="en-US" sz="700" dirty="0"/>
+          </a:p>
+          <a:p>
+            <a:pPr indent="0" marL="0">
+              <a:lnSpc>
+                <a:spcPct val="92000"/>
+              </a:lnSpc>
+              <a:buNone/>
+            </a:pPr>
+            <a:r>
+              <a:rPr lang="en-US" sz="620" i="1" dirty="0">
+                <a:solidFill>
+                  <a:srgbClr val="1A1A1A"/>
+                </a:solidFill>
+                <a:latin typeface="Arial" pitchFamily="34" charset="0"/>
+                <a:ea typeface="Arial" pitchFamily="34" charset="-122"/>
+                <a:cs typeface="Arial" pitchFamily="34" charset="-120"/>
+              </a:rPr>
+              <a:t>precision, scale, nullability, collation</a:t>
+            </a:r>
+            <a:endParaRPr lang="en-US" sz="700" dirty="0"/>
+          </a:p>
+        </p:txBody>
+      </p:sp>
+      <p:sp>
+        <p:nvSpPr>
+          <p:cNvPr id="67" name="Shape 65"/>
+          <p:cNvSpPr/>
+          <p:nvPr/>
+        </p:nvSpPr>
+        <p:spPr>
+          <a:xfrm>
+            <a:off x="9966960" y="1723644"/>
+            <a:ext cx="1837944" cy="420624"/>
+          </a:xfrm>
+          <a:prstGeom prst="rect">
+            <a:avLst/>
+          </a:prstGeom>
+          <a:solidFill>
+            <a:srgbClr val="ADDAFB"/>
+          </a:solidFill>
+          <a:ln w="6350">
+            <a:solidFill>
+              <a:srgbClr val="ADDAFB"/>
+            </a:solidFill>
+            <a:prstDash val="solid"/>
+          </a:ln>
+        </p:spPr>
+      </p:sp>
+      <p:sp>
+        <p:nvSpPr>
+          <p:cNvPr id="68" name="Text 66"/>
+          <p:cNvSpPr/>
+          <p:nvPr/>
+        </p:nvSpPr>
+        <p:spPr>
+          <a:xfrm>
+            <a:off x="9966960" y="1723644"/>
+            <a:ext cx="1837944" cy="420624"/>
+          </a:xfrm>
+          <a:prstGeom prst="rect">
+            <a:avLst/>
+          </a:prstGeom>
+          <a:noFill/>
+          <a:ln/>
+        </p:spPr>
+        <p:txBody>
+          <a:bodyPr wrap="square" lIns="381" tIns="889" rIns="889" bIns="381" rtlCol="0" anchor="ctr"/>
+          <a:lstStyle/>
+          <a:p>
+            <a:pPr indent="0" marL="0">
+              <a:lnSpc>
+                <a:spcPct val="92000"/>
+              </a:lnSpc>
+              <a:spcAft>
+                <a:spcPts val="200"/>
+              </a:spcAft>
+              <a:buNone/>
+            </a:pPr>
+            <a:r>
+              <a:rPr lang="en-US" sz="700" b="1" dirty="0">
+                <a:solidFill>
+                  <a:srgbClr val="081F5C"/>
+                </a:solidFill>
+                <a:latin typeface="Arial" pitchFamily="34" charset="0"/>
+                <a:ea typeface="Arial" pitchFamily="34" charset="-122"/>
+                <a:cs typeface="Arial" pitchFamily="34" charset="-120"/>
+              </a:rPr>
+              <a:t>Row count &amp; watermark</a:t>
+            </a:r>
+            <a:endParaRPr lang="en-US" sz="700" dirty="0"/>
+          </a:p>
+          <a:p>
+            <a:pPr indent="0" marL="0">
+              <a:lnSpc>
+                <a:spcPct val="92000"/>
+              </a:lnSpc>
+              <a:buNone/>
+            </a:pPr>
+            <a:r>
+              <a:rPr lang="en-US" sz="620" i="1" dirty="0">
+                <a:solidFill>
+                  <a:srgbClr val="1A1A1A"/>
+                </a:solidFill>
+                <a:latin typeface="Arial" pitchFamily="34" charset="0"/>
+                <a:ea typeface="Arial" pitchFamily="34" charset="-122"/>
+                <a:cs typeface="Arial" pitchFamily="34" charset="-120"/>
+              </a:rPr>
+              <a:t>history load and every incremental run</a:t>
+            </a:r>
+            <a:endParaRPr lang="en-US" sz="700" dirty="0"/>
+          </a:p>
+        </p:txBody>
+      </p:sp>
+      <p:sp>
+        <p:nvSpPr>
+          <p:cNvPr id="69" name="Shape 67"/>
+          <p:cNvSpPr/>
+          <p:nvPr/>
+        </p:nvSpPr>
+        <p:spPr>
+          <a:xfrm>
+            <a:off x="9966960" y="2221992"/>
+            <a:ext cx="1837944" cy="420624"/>
+          </a:xfrm>
+          <a:prstGeom prst="rect">
+            <a:avLst/>
+          </a:prstGeom>
+          <a:solidFill>
+            <a:srgbClr val="ADDAFB"/>
+          </a:solidFill>
+          <a:ln w="6350">
+            <a:solidFill>
+              <a:srgbClr val="ADDAFB"/>
+            </a:solidFill>
+            <a:prstDash val="solid"/>
+          </a:ln>
+        </p:spPr>
+      </p:sp>
+      <p:sp>
+        <p:nvSpPr>
+          <p:cNvPr id="70" name="Text 68"/>
+          <p:cNvSpPr/>
+          <p:nvPr/>
+        </p:nvSpPr>
+        <p:spPr>
+          <a:xfrm>
+            <a:off x="9966960" y="2221992"/>
+            <a:ext cx="1837944" cy="420624"/>
+          </a:xfrm>
+          <a:prstGeom prst="rect">
+            <a:avLst/>
+          </a:prstGeom>
+          <a:noFill/>
+          <a:ln/>
+        </p:spPr>
+        <p:txBody>
+          <a:bodyPr wrap="square" lIns="381" tIns="889" rIns="889" bIns="381" rtlCol="0" anchor="ctr"/>
+          <a:lstStyle/>
+          <a:p>
+            <a:pPr indent="0" marL="0">
+              <a:lnSpc>
+                <a:spcPct val="92000"/>
+              </a:lnSpc>
+              <a:spcAft>
+                <a:spcPts val="200"/>
+              </a:spcAft>
+              <a:buNone/>
+            </a:pPr>
+            <a:r>
+              <a:rPr lang="en-US" sz="700" b="1" dirty="0">
+                <a:solidFill>
+                  <a:srgbClr val="081F5C"/>
+                </a:solidFill>
+                <a:latin typeface="Arial" pitchFamily="34" charset="0"/>
+                <a:ea typeface="Arial" pitchFamily="34" charset="-122"/>
+                <a:cs typeface="Arial" pitchFamily="34" charset="-120"/>
+              </a:rPr>
+              <a:t>Column checksum &amp; keys</a:t>
+            </a:r>
+            <a:endParaRPr lang="en-US" sz="700" dirty="0"/>
+          </a:p>
+          <a:p>
+            <a:pPr indent="0" marL="0">
+              <a:lnSpc>
+                <a:spcPct val="92000"/>
+              </a:lnSpc>
+              <a:buNone/>
+            </a:pPr>
+            <a:r>
+              <a:rPr lang="en-US" sz="620" i="1" dirty="0">
+                <a:solidFill>
+                  <a:srgbClr val="1A1A1A"/>
+                </a:solidFill>
+                <a:latin typeface="Arial" pitchFamily="34" charset="0"/>
+                <a:ea typeface="Arial" pitchFamily="34" charset="-122"/>
+                <a:cs typeface="Arial" pitchFamily="34" charset="-120"/>
+              </a:rPr>
+              <a:t>hash aggregate, uniqueness, orphan FK</a:t>
+            </a:r>
+            <a:endParaRPr lang="en-US" sz="700" dirty="0"/>
+          </a:p>
+        </p:txBody>
+      </p:sp>
+      <p:sp>
+        <p:nvSpPr>
+          <p:cNvPr id="71" name="Shape 69"/>
+          <p:cNvSpPr/>
+          <p:nvPr/>
+        </p:nvSpPr>
+        <p:spPr>
+          <a:xfrm>
+            <a:off x="9966960" y="2720340"/>
+            <a:ext cx="1837944" cy="420624"/>
+          </a:xfrm>
+          <a:prstGeom prst="rect">
+            <a:avLst/>
+          </a:prstGeom>
+          <a:solidFill>
+            <a:srgbClr val="ADDAFB"/>
+          </a:solidFill>
+          <a:ln w="6350">
+            <a:solidFill>
+              <a:srgbClr val="ADDAFB"/>
+            </a:solidFill>
+            <a:prstDash val="solid"/>
+          </a:ln>
+        </p:spPr>
+      </p:sp>
+      <p:sp>
+        <p:nvSpPr>
+          <p:cNvPr id="72" name="Text 70"/>
+          <p:cNvSpPr/>
+          <p:nvPr/>
+        </p:nvSpPr>
+        <p:spPr>
+          <a:xfrm>
+            <a:off x="9966960" y="2720340"/>
+            <a:ext cx="1837944" cy="420624"/>
+          </a:xfrm>
+          <a:prstGeom prst="rect">
+            <a:avLst/>
+          </a:prstGeom>
+          <a:noFill/>
+          <a:ln/>
+        </p:spPr>
+        <p:txBody>
+          <a:bodyPr wrap="square" lIns="381" tIns="889" rIns="889" bIns="381" rtlCol="0" anchor="ctr"/>
+          <a:lstStyle/>
+          <a:p>
+            <a:pPr indent="0" marL="0">
+              <a:lnSpc>
+                <a:spcPct val="92000"/>
+              </a:lnSpc>
+              <a:spcAft>
+                <a:spcPts val="200"/>
+              </a:spcAft>
+              <a:buNone/>
+            </a:pPr>
+            <a:r>
+              <a:rPr lang="en-US" sz="700" b="1" dirty="0">
+                <a:solidFill>
+                  <a:srgbClr val="081F5C"/>
+                </a:solidFill>
+                <a:latin typeface="Arial" pitchFamily="34" charset="0"/>
+                <a:ea typeface="Arial" pitchFamily="34" charset="-122"/>
+                <a:cs typeface="Arial" pitchFamily="34" charset="-120"/>
+              </a:rPr>
+              <a:t>Procedural re-run diff</a:t>
+            </a:r>
+            <a:endParaRPr lang="en-US" sz="700" dirty="0"/>
+          </a:p>
+          <a:p>
+            <a:pPr indent="0" marL="0">
+              <a:lnSpc>
+                <a:spcPct val="92000"/>
+              </a:lnSpc>
+              <a:buNone/>
+            </a:pPr>
+            <a:r>
+              <a:rPr lang="en-US" sz="620" i="1" dirty="0">
+                <a:solidFill>
+                  <a:srgbClr val="1A1A1A"/>
+                </a:solidFill>
+                <a:latin typeface="Arial" pitchFamily="34" charset="0"/>
+                <a:ea typeface="Arial" pitchFamily="34" charset="-122"/>
+                <a:cs typeface="Arial" pitchFamily="34" charset="-120"/>
+              </a:rPr>
+              <a:t>pinned inputs, output compared line by line</a:t>
+            </a:r>
+            <a:endParaRPr lang="en-US" sz="700" dirty="0"/>
+          </a:p>
+        </p:txBody>
+      </p:sp>
+      <p:sp>
+        <p:nvSpPr>
+          <p:cNvPr id="73" name="Shape 71"/>
+          <p:cNvSpPr/>
+          <p:nvPr/>
+        </p:nvSpPr>
+        <p:spPr>
+          <a:xfrm>
+            <a:off x="9966960" y="3218688"/>
+            <a:ext cx="1837944" cy="420624"/>
+          </a:xfrm>
+          <a:prstGeom prst="rect">
+            <a:avLst/>
+          </a:prstGeom>
+          <a:solidFill>
+            <a:srgbClr val="ADDAFB"/>
+          </a:solidFill>
+          <a:ln w="6350">
+            <a:solidFill>
+              <a:srgbClr val="ADDAFB"/>
+            </a:solidFill>
+            <a:prstDash val="solid"/>
+          </a:ln>
+        </p:spPr>
+      </p:sp>
+      <p:sp>
+        <p:nvSpPr>
+          <p:cNvPr id="74" name="Text 72"/>
+          <p:cNvSpPr/>
+          <p:nvPr/>
+        </p:nvSpPr>
+        <p:spPr>
+          <a:xfrm>
+            <a:off x="9966960" y="3218688"/>
+            <a:ext cx="1837944" cy="420624"/>
+          </a:xfrm>
+          <a:prstGeom prst="rect">
+            <a:avLst/>
+          </a:prstGeom>
+          <a:noFill/>
+          <a:ln/>
+        </p:spPr>
+        <p:txBody>
+          <a:bodyPr wrap="square" lIns="381" tIns="889" rIns="889" bIns="381" rtlCol="0" anchor="ctr"/>
+          <a:lstStyle/>
+          <a:p>
+            <a:pPr indent="0" marL="0">
+              <a:lnSpc>
+                <a:spcPct val="92000"/>
+              </a:lnSpc>
+              <a:spcAft>
+                <a:spcPts val="200"/>
+              </a:spcAft>
+              <a:buNone/>
+            </a:pPr>
+            <a:r>
+              <a:rPr lang="en-US" sz="700" b="1" dirty="0">
+                <a:solidFill>
+                  <a:srgbClr val="081F5C"/>
+                </a:solidFill>
+                <a:latin typeface="Arial" pitchFamily="34" charset="0"/>
+                <a:ea typeface="Arial" pitchFamily="34" charset="-122"/>
+                <a:cs typeface="Arial" pitchFamily="34" charset="-120"/>
+              </a:rPr>
+              <a:t>Domain control totals</a:t>
+            </a:r>
+            <a:endParaRPr lang="en-US" sz="700" dirty="0"/>
+          </a:p>
+          <a:p>
+            <a:pPr indent="0" marL="0">
+              <a:lnSpc>
+                <a:spcPct val="92000"/>
+              </a:lnSpc>
+              <a:buNone/>
+            </a:pPr>
+            <a:r>
+              <a:rPr lang="en-US" sz="620" i="1" dirty="0">
+                <a:solidFill>
+                  <a:srgbClr val="1A1A1A"/>
+                </a:solidFill>
+                <a:latin typeface="Arial" pitchFamily="34" charset="0"/>
+                <a:ea typeface="Arial" pitchFamily="34" charset="-122"/>
+                <a:cs typeface="Arial" pitchFamily="34" charset="-120"/>
+              </a:rPr>
+              <a:t>encounters, charges, member months</a:t>
+            </a:r>
+            <a:endParaRPr lang="en-US" sz="700" dirty="0"/>
+          </a:p>
+        </p:txBody>
+      </p:sp>
+      <p:sp>
+        <p:nvSpPr>
+          <p:cNvPr id="75" name="Shape 73"/>
+          <p:cNvSpPr/>
+          <p:nvPr/>
+        </p:nvSpPr>
+        <p:spPr>
+          <a:xfrm>
+            <a:off x="9966960" y="3717036"/>
+            <a:ext cx="1837944" cy="420624"/>
+          </a:xfrm>
+          <a:prstGeom prst="rect">
+            <a:avLst/>
+          </a:prstGeom>
+          <a:solidFill>
+            <a:srgbClr val="ADDAFB"/>
+          </a:solidFill>
+          <a:ln w="6350">
+            <a:solidFill>
+              <a:srgbClr val="ADDAFB"/>
+            </a:solidFill>
+            <a:prstDash val="solid"/>
+          </a:ln>
+        </p:spPr>
+      </p:sp>
+      <p:sp>
+        <p:nvSpPr>
+          <p:cNvPr id="76" name="Text 74"/>
+          <p:cNvSpPr/>
+          <p:nvPr/>
+        </p:nvSpPr>
+        <p:spPr>
+          <a:xfrm>
+            <a:off x="9966960" y="3717036"/>
+            <a:ext cx="1837944" cy="420624"/>
+          </a:xfrm>
+          <a:prstGeom prst="rect">
+            <a:avLst/>
+          </a:prstGeom>
+          <a:noFill/>
+          <a:ln/>
+        </p:spPr>
+        <p:txBody>
+          <a:bodyPr wrap="square" lIns="381" tIns="889" rIns="889" bIns="381" rtlCol="0" anchor="ctr"/>
+          <a:lstStyle/>
+          <a:p>
+            <a:pPr indent="0" marL="0">
+              <a:lnSpc>
+                <a:spcPct val="92000"/>
+              </a:lnSpc>
+              <a:spcAft>
+                <a:spcPts val="200"/>
+              </a:spcAft>
+              <a:buNone/>
+            </a:pPr>
+            <a:r>
+              <a:rPr lang="en-US" sz="700" b="1" dirty="0">
+                <a:solidFill>
+                  <a:srgbClr val="081F5C"/>
+                </a:solidFill>
+                <a:latin typeface="Arial" pitchFamily="34" charset="0"/>
+                <a:ea typeface="Arial" pitchFamily="34" charset="-122"/>
+                <a:cs typeface="Arial" pitchFamily="34" charset="-120"/>
+              </a:rPr>
+              <a:t>Report &amp; measure parity</a:t>
+            </a:r>
+            <a:endParaRPr lang="en-US" sz="700" dirty="0"/>
+          </a:p>
+          <a:p>
+            <a:pPr indent="0" marL="0">
+              <a:lnSpc>
+                <a:spcPct val="92000"/>
+              </a:lnSpc>
+              <a:buNone/>
+            </a:pPr>
+            <a:r>
+              <a:rPr lang="en-US" sz="620" i="1" dirty="0">
+                <a:solidFill>
+                  <a:srgbClr val="1A1A1A"/>
+                </a:solidFill>
+                <a:latin typeface="Arial" pitchFamily="34" charset="0"/>
+                <a:ea typeface="Arial" pitchFamily="34" charset="-122"/>
+                <a:cs typeface="Arial" pitchFamily="34" charset="-120"/>
+              </a:rPr>
+              <a:t>measure by measure, same filter context</a:t>
+            </a:r>
+            <a:endParaRPr lang="en-US" sz="700" dirty="0"/>
+          </a:p>
+        </p:txBody>
+      </p:sp>
+      <p:sp>
+        <p:nvSpPr>
+          <p:cNvPr id="77" name="Shape 75"/>
+          <p:cNvSpPr/>
+          <p:nvPr/>
+        </p:nvSpPr>
+        <p:spPr>
+          <a:xfrm>
+            <a:off x="9966960" y="4215384"/>
+            <a:ext cx="1837944" cy="420624"/>
+          </a:xfrm>
+          <a:prstGeom prst="rect">
+            <a:avLst/>
+          </a:prstGeom>
+          <a:solidFill>
+            <a:srgbClr val="ADDAFB"/>
+          </a:solidFill>
+          <a:ln w="6350">
+            <a:solidFill>
+              <a:srgbClr val="ADDAFB"/>
+            </a:solidFill>
+            <a:prstDash val="solid"/>
+          </a:ln>
+        </p:spPr>
+      </p:sp>
+      <p:sp>
+        <p:nvSpPr>
+          <p:cNvPr id="78" name="Text 76"/>
+          <p:cNvSpPr/>
+          <p:nvPr/>
+        </p:nvSpPr>
+        <p:spPr>
+          <a:xfrm>
+            <a:off x="9966960" y="4215384"/>
+            <a:ext cx="1837944" cy="420624"/>
+          </a:xfrm>
+          <a:prstGeom prst="rect">
+            <a:avLst/>
+          </a:prstGeom>
+          <a:noFill/>
+          <a:ln/>
+        </p:spPr>
+        <p:txBody>
+          <a:bodyPr wrap="square" lIns="381" tIns="889" rIns="889" bIns="381" rtlCol="0" anchor="ctr"/>
+          <a:lstStyle/>
+          <a:p>
+            <a:pPr indent="0" marL="0">
+              <a:lnSpc>
+                <a:spcPct val="92000"/>
+              </a:lnSpc>
+              <a:spcAft>
+                <a:spcPts val="200"/>
+              </a:spcAft>
+              <a:buNone/>
+            </a:pPr>
+            <a:r>
+              <a:rPr lang="en-US" sz="700" b="1" dirty="0">
+                <a:solidFill>
+                  <a:srgbClr val="081F5C"/>
+                </a:solidFill>
+                <a:latin typeface="Arial" pitchFamily="34" charset="0"/>
+                <a:ea typeface="Arial" pitchFamily="34" charset="-122"/>
+                <a:cs typeface="Arial" pitchFamily="34" charset="-120"/>
+              </a:rPr>
+              <a:t>Layout, burst &amp; export</a:t>
+            </a:r>
+            <a:endParaRPr lang="en-US" sz="700" dirty="0"/>
+          </a:p>
+          <a:p>
+            <a:pPr indent="0" marL="0">
+              <a:lnSpc>
+                <a:spcPct val="92000"/>
+              </a:lnSpc>
+              <a:buNone/>
+            </a:pPr>
+            <a:r>
+              <a:rPr lang="en-US" sz="620" i="1" dirty="0">
+                <a:solidFill>
+                  <a:srgbClr val="1A1A1A"/>
+                </a:solidFill>
+                <a:latin typeface="Arial" pitchFamily="34" charset="0"/>
+                <a:ea typeface="Arial" pitchFamily="34" charset="-122"/>
+                <a:cs typeface="Arial" pitchFamily="34" charset="-120"/>
+              </a:rPr>
+              <a:t>paginated, subscription, Excel and PDF</a:t>
+            </a:r>
+            <a:endParaRPr lang="en-US" sz="700" dirty="0"/>
+          </a:p>
+        </p:txBody>
+      </p:sp>
+      <p:sp>
+        <p:nvSpPr>
+          <p:cNvPr id="79" name="Shape 77"/>
+          <p:cNvSpPr/>
+          <p:nvPr/>
+        </p:nvSpPr>
+        <p:spPr>
+          <a:xfrm>
+            <a:off x="9966960" y="4713732"/>
+            <a:ext cx="1837944" cy="420624"/>
+          </a:xfrm>
+          <a:prstGeom prst="rect">
+            <a:avLst/>
+          </a:prstGeom>
+          <a:solidFill>
+            <a:srgbClr val="ADDAFB"/>
+          </a:solidFill>
+          <a:ln w="6350">
+            <a:solidFill>
+              <a:srgbClr val="ADDAFB"/>
+            </a:solidFill>
+            <a:prstDash val="solid"/>
+          </a:ln>
+        </p:spPr>
+      </p:sp>
+      <p:sp>
+        <p:nvSpPr>
+          <p:cNvPr id="80" name="Text 78"/>
+          <p:cNvSpPr/>
+          <p:nvPr/>
+        </p:nvSpPr>
+        <p:spPr>
+          <a:xfrm>
+            <a:off x="9966960" y="4713732"/>
+            <a:ext cx="1837944" cy="420624"/>
+          </a:xfrm>
+          <a:prstGeom prst="rect">
+            <a:avLst/>
+          </a:prstGeom>
+          <a:noFill/>
+          <a:ln/>
+        </p:spPr>
+        <p:txBody>
+          <a:bodyPr wrap="square" lIns="381" tIns="889" rIns="889" bIns="381" rtlCol="0" anchor="ctr"/>
+          <a:lstStyle/>
+          <a:p>
+            <a:pPr indent="0" marL="0">
+              <a:lnSpc>
+                <a:spcPct val="92000"/>
+              </a:lnSpc>
+              <a:spcAft>
+                <a:spcPts val="200"/>
+              </a:spcAft>
+              <a:buNone/>
+            </a:pPr>
+            <a:r>
+              <a:rPr lang="en-US" sz="700" b="1" dirty="0">
+                <a:solidFill>
+                  <a:srgbClr val="081F5C"/>
+                </a:solidFill>
+                <a:latin typeface="Arial" pitchFamily="34" charset="0"/>
+                <a:ea typeface="Arial" pitchFamily="34" charset="-122"/>
+                <a:cs typeface="Arial" pitchFamily="34" charset="-120"/>
+              </a:rPr>
+              <a:t>Genie answer accuracy</a:t>
+            </a:r>
+            <a:endParaRPr lang="en-US" sz="700" dirty="0"/>
+          </a:p>
+          <a:p>
+            <a:pPr indent="0" marL="0">
+              <a:lnSpc>
+                <a:spcPct val="92000"/>
+              </a:lnSpc>
+              <a:buNone/>
+            </a:pPr>
+            <a:r>
+              <a:rPr lang="en-US" sz="620" i="1" dirty="0">
+                <a:solidFill>
+                  <a:srgbClr val="1A1A1A"/>
+                </a:solidFill>
+                <a:latin typeface="Arial" pitchFamily="34" charset="0"/>
+                <a:ea typeface="Arial" pitchFamily="34" charset="-122"/>
+                <a:cs typeface="Arial" pitchFamily="34" charset="-120"/>
+              </a:rPr>
+              <a:t>known-answer set plus refusal cases</a:t>
+            </a:r>
+            <a:endParaRPr lang="en-US" sz="700" dirty="0"/>
+          </a:p>
+        </p:txBody>
+      </p:sp>
+      <p:sp>
+        <p:nvSpPr>
+          <p:cNvPr id="81" name="Shape 79"/>
+          <p:cNvSpPr/>
+          <p:nvPr/>
+        </p:nvSpPr>
+        <p:spPr>
+          <a:xfrm>
+            <a:off x="9966960" y="5212080"/>
+            <a:ext cx="1837944" cy="420624"/>
+          </a:xfrm>
+          <a:prstGeom prst="rect">
+            <a:avLst/>
+          </a:prstGeom>
+          <a:solidFill>
+            <a:srgbClr val="ADDAFB"/>
+          </a:solidFill>
+          <a:ln w="6350">
+            <a:solidFill>
+              <a:srgbClr val="ADDAFB"/>
+            </a:solidFill>
+            <a:prstDash val="solid"/>
+          </a:ln>
+        </p:spPr>
+      </p:sp>
+      <p:sp>
+        <p:nvSpPr>
+          <p:cNvPr id="82" name="Text 80"/>
+          <p:cNvSpPr/>
+          <p:nvPr/>
+        </p:nvSpPr>
+        <p:spPr>
+          <a:xfrm>
+            <a:off x="9966960" y="5212080"/>
+            <a:ext cx="1837944" cy="420624"/>
+          </a:xfrm>
+          <a:prstGeom prst="rect">
+            <a:avLst/>
+          </a:prstGeom>
+          <a:noFill/>
+          <a:ln/>
+        </p:spPr>
+        <p:txBody>
+          <a:bodyPr wrap="square" lIns="381" tIns="889" rIns="889" bIns="381" rtlCol="0" anchor="ctr"/>
+          <a:lstStyle/>
+          <a:p>
+            <a:pPr indent="0" marL="0">
+              <a:lnSpc>
+                <a:spcPct val="92000"/>
+              </a:lnSpc>
+              <a:spcAft>
+                <a:spcPts val="200"/>
+              </a:spcAft>
+              <a:buNone/>
+            </a:pPr>
+            <a:r>
+              <a:rPr lang="en-US" sz="700" b="1" dirty="0">
+                <a:solidFill>
+                  <a:srgbClr val="081F5C"/>
+                </a:solidFill>
+                <a:latin typeface="Arial" pitchFamily="34" charset="0"/>
+                <a:ea typeface="Arial" pitchFamily="34" charset="-122"/>
+                <a:cs typeface="Arial" pitchFamily="34" charset="-120"/>
+              </a:rPr>
+              <a:t>PHI masking &amp; row access</a:t>
+            </a:r>
+            <a:endParaRPr lang="en-US" sz="700" dirty="0"/>
+          </a:p>
+          <a:p>
+            <a:pPr indent="0" marL="0">
+              <a:lnSpc>
+                <a:spcPct val="92000"/>
+              </a:lnSpc>
+              <a:buNone/>
+            </a:pPr>
+            <a:r>
+              <a:rPr lang="en-US" sz="620" i="1" dirty="0">
+                <a:solidFill>
+                  <a:srgbClr val="1A1A1A"/>
+                </a:solidFill>
+                <a:latin typeface="Arial" pitchFamily="34" charset="0"/>
+                <a:ea typeface="Arial" pitchFamily="34" charset="-122"/>
+                <a:cs typeface="Arial" pitchFamily="34" charset="-120"/>
+              </a:rPr>
+              <a:t>non-privileged account, never an admin</a:t>
+            </a:r>
+            <a:endParaRPr lang="en-US" sz="700" dirty="0"/>
+          </a:p>
+        </p:txBody>
+      </p:sp>
+      <p:sp>
+        <p:nvSpPr>
+          <p:cNvPr id="83" name="Text 81"/>
+          <p:cNvSpPr/>
+          <p:nvPr/>
+        </p:nvSpPr>
+        <p:spPr>
+          <a:xfrm>
+            <a:off x="9966960" y="5760720"/>
+            <a:ext cx="1837944" cy="365760"/>
+          </a:xfrm>
+          <a:prstGeom prst="rect">
+            <a:avLst/>
+          </a:prstGeom>
+          <a:noFill/>
+          <a:ln/>
+        </p:spPr>
+        <p:txBody>
+          <a:bodyPr wrap="square" lIns="0" tIns="0" rIns="0" bIns="0" rtlCol="0" anchor="t"/>
+          <a:lstStyle/>
+          <a:p>
+            <a:pPr indent="0" marL="0">
+              <a:lnSpc>
+                <a:spcPct val="92000"/>
+              </a:lnSpc>
+              <a:buNone/>
+            </a:pPr>
+            <a:r>
+              <a:rPr lang="en-US" sz="640" i="1" dirty="0">
+                <a:solidFill>
+                  <a:srgbClr val="2E4A85"/>
+                </a:solidFill>
+                <a:latin typeface="Arial" pitchFamily="34" charset="0"/>
+                <a:ea typeface="Arial" pitchFamily="34" charset="-122"/>
+                <a:cs typeface="Arial" pitchFamily="34" charset="-120"/>
+              </a:rPr>
+              <a:t>Built once during unit test, then re-run at SIT, UAT, parallel run and every wave gate. A report is not released until its data track has cleared the suite.</a:t>
+            </a:r>
+            <a:endParaRPr lang="en-US" sz="640" dirty="0"/>
+          </a:p>
+        </p:txBody>
+      </p:sp>
+      <p:sp>
+        <p:nvSpPr>
+          <p:cNvPr id="84" name="Shape 82"/>
+          <p:cNvSpPr/>
+          <p:nvPr/>
+        </p:nvSpPr>
+        <p:spPr>
+          <a:xfrm>
+            <a:off x="384048" y="6199632"/>
+            <a:ext cx="11420856" cy="329184"/>
+          </a:xfrm>
+          <a:prstGeom prst="rect">
+            <a:avLst/>
+          </a:prstGeom>
+          <a:solidFill>
+            <a:srgbClr val="EAF5FD"/>
+          </a:solidFill>
+          <a:ln w="9525">
+            <a:solidFill>
+              <a:srgbClr val="C9E3F7"/>
+            </a:solidFill>
+            <a:prstDash val="solid"/>
+          </a:ln>
+        </p:spPr>
+      </p:sp>
+      <p:sp>
+        <p:nvSpPr>
+          <p:cNvPr id="85" name="Text 83"/>
+          <p:cNvSpPr/>
+          <p:nvPr/>
+        </p:nvSpPr>
+        <p:spPr>
+          <a:xfrm>
+            <a:off x="384048" y="6199632"/>
+            <a:ext cx="11420856" cy="329184"/>
+          </a:xfrm>
+          <a:prstGeom prst="rect">
+            <a:avLst/>
+          </a:prstGeom>
+          <a:noFill/>
+          <a:ln/>
+        </p:spPr>
+        <p:txBody>
+          <a:bodyPr wrap="square" lIns="254" tIns="1270" rIns="1270" bIns="254" rtlCol="0" anchor="ctr"/>
+          <a:lstStyle/>
+          <a:p>
+            <a:pPr indent="0" marL="0">
+              <a:lnSpc>
+                <a:spcPct val="94000"/>
+              </a:lnSpc>
+              <a:buNone/>
+            </a:pPr>
+            <a:r>
+              <a:rPr lang="en-US" sz="700" b="1" dirty="0">
+                <a:solidFill>
+                  <a:srgbClr val="081F5C"/>
+                </a:solidFill>
+                <a:latin typeface="Arial" pitchFamily="34" charset="0"/>
+                <a:ea typeface="Arial" pitchFamily="34" charset="-122"/>
+                <a:cs typeface="Arial" pitchFamily="34" charset="-120"/>
+              </a:rPr>
+              <a:t>HIPAA checkpoint — test data here is production data.  </a:t>
+            </a:r>
+            <a:pPr indent="0" marL="0">
+              <a:lnSpc>
+                <a:spcPct val="94000"/>
+              </a:lnSpc>
+              <a:buNone/>
+            </a:pPr>
+            <a:r>
+              <a:rPr lang="en-US" sz="700" dirty="0">
+                <a:solidFill>
+                  <a:srgbClr val="1A1A1A"/>
+                </a:solidFill>
+                <a:latin typeface="Arial" pitchFamily="34" charset="0"/>
+                <a:ea typeface="Arial" pitchFamily="34" charset="-122"/>
+                <a:cs typeface="Arial" pitchFamily="34" charset="-120"/>
+              </a:rPr>
+              <a:t>Reconciliation samples, report extracts and Genie test transcripts all carry PHI and sit under the BAA. Run every comparison inside the secured environment, mask before any sample is pasted into a defect ticket, and prove row-level access with a non-privileged account rather than an admin. Keep the evidence pack — it is the audit trail behind each report's disposition.</a:t>
+            </a:r>
+            <a:endParaRPr lang="en-US" sz="700" dirty="0"/>
+          </a:p>
+        </p:txBody>
+      </p:sp>
+    </p:spTree>
+  </p:cSld>
+  <p:clrMapOvr>
+    <a:masterClrMapping/>
+  </p:clrMapOvr>
+</p:sld>
+</file>
+
 <file path=ppt/theme/theme1.xml><?xml version="1.0" encoding="utf-8"?>
 <a:theme xmlns:a="http://schemas.openxmlformats.org/drawingml/2006/main" name="Office Theme">
   <a:themeElements>
